--- a/school/MGCCC-Spring2026/CSC1123-ComputerApplications/ModuleFourteen/M14Project/Weaver_PowerPoint_2G_Orientation.pptx
+++ b/school/MGCCC-Spring2026/CSC1123-ComputerApplications/ModuleFourteen/M14Project/Weaver_PowerPoint_2G_Orientation.pptx
@@ -2,18 +2,18 @@
 <file path=ppt/presentation.xml><?xml version="1.0" encoding="utf-8"?>
 <p:presentation xmlns:a="http://schemas.openxmlformats.org/drawingml/2006/main" xmlns:r="http://schemas.openxmlformats.org/officeDocument/2006/relationships" xmlns:p="http://schemas.openxmlformats.org/presentationml/2006/main" autoCompressPictures="0">
   <p:sldMasterIdLst>
-    <p:sldMasterId id="2147483675" r:id="rId1"/>
+    <p:sldMasterId id="2147483675" r:id="rId2"/>
   </p:sldMasterIdLst>
   <p:notesMasterIdLst>
-    <p:notesMasterId r:id="rId8"/>
+    <p:notesMasterId r:id="rId9"/>
   </p:notesMasterIdLst>
   <p:sldIdLst>
-    <p:sldId id="257" r:id="rId2"/>
-    <p:sldId id="258" r:id="rId3"/>
-    <p:sldId id="259" r:id="rId4"/>
-    <p:sldId id="260" r:id="rId5"/>
-    <p:sldId id="261" r:id="rId6"/>
-    <p:sldId id="262" r:id="rId7"/>
+    <p:sldId id="257" r:id="rId3"/>
+    <p:sldId id="258" r:id="rId4"/>
+    <p:sldId id="259" r:id="rId5"/>
+    <p:sldId id="260" r:id="rId6"/>
+    <p:sldId id="261" r:id="rId7"/>
+    <p:sldId id="262" r:id="rId8"/>
   </p:sldIdLst>
   <p:sldSz cx="12192000" cy="6858000"/>
   <p:notesSz cx="6858000" cy="9144000"/>
@@ -120,6 +120,4137 @@
 </p:presentation>
 </file>
 
+<file path=ppt/diagrams/colors1.xml><?xml version="1.0" encoding="utf-8"?>
+<dgm:colorsDef xmlns:dgm="http://schemas.openxmlformats.org/drawingml/2006/diagram" xmlns:a="http://schemas.openxmlformats.org/drawingml/2006/main" uniqueId="urn:microsoft.com/office/officeart/2005/8/colors/colorful3">
+  <dgm:title val=""/>
+  <dgm:desc val=""/>
+  <dgm:catLst>
+    <dgm:cat type="colorful" pri="10300"/>
+  </dgm:catLst>
+  <dgm:styleLbl name="node0">
+    <dgm:fillClrLst meth="repeat">
+      <a:schemeClr val="accent2"/>
+    </dgm:fillClrLst>
+    <dgm:linClrLst meth="repeat">
+      <a:schemeClr val="lt1"/>
+    </dgm:linClrLst>
+    <dgm:effectClrLst/>
+    <dgm:txLinClrLst/>
+    <dgm:txFillClrLst/>
+    <dgm:txEffectClrLst/>
+  </dgm:styleLbl>
+  <dgm:styleLbl name="node1">
+    <dgm:fillClrLst>
+      <a:schemeClr val="accent3"/>
+      <a:schemeClr val="accent4"/>
+    </dgm:fillClrLst>
+    <dgm:linClrLst meth="repeat">
+      <a:schemeClr val="lt1"/>
+    </dgm:linClrLst>
+    <dgm:effectClrLst/>
+    <dgm:txLinClrLst/>
+    <dgm:txFillClrLst/>
+    <dgm:txEffectClrLst/>
+  </dgm:styleLbl>
+  <dgm:styleLbl name="alignNode1">
+    <dgm:fillClrLst>
+      <a:schemeClr val="accent3"/>
+      <a:schemeClr val="accent4"/>
+    </dgm:fillClrLst>
+    <dgm:linClrLst>
+      <a:schemeClr val="accent3"/>
+      <a:schemeClr val="accent4"/>
+    </dgm:linClrLst>
+    <dgm:effectClrLst/>
+    <dgm:txLinClrLst/>
+    <dgm:txFillClrLst/>
+    <dgm:txEffectClrLst/>
+  </dgm:styleLbl>
+  <dgm:styleLbl name="lnNode1">
+    <dgm:fillClrLst>
+      <a:schemeClr val="accent3"/>
+      <a:schemeClr val="accent4"/>
+    </dgm:fillClrLst>
+    <dgm:linClrLst meth="repeat">
+      <a:schemeClr val="lt1"/>
+    </dgm:linClrLst>
+    <dgm:effectClrLst/>
+    <dgm:txLinClrLst/>
+    <dgm:txFillClrLst/>
+    <dgm:txEffectClrLst/>
+  </dgm:styleLbl>
+  <dgm:styleLbl name="vennNode1">
+    <dgm:fillClrLst>
+      <a:schemeClr val="accent3">
+        <a:alpha val="50000"/>
+      </a:schemeClr>
+      <a:schemeClr val="accent4">
+        <a:alpha val="50000"/>
+      </a:schemeClr>
+    </dgm:fillClrLst>
+    <dgm:linClrLst meth="repeat">
+      <a:schemeClr val="lt1"/>
+    </dgm:linClrLst>
+    <dgm:effectClrLst/>
+    <dgm:txLinClrLst/>
+    <dgm:txFillClrLst/>
+    <dgm:txEffectClrLst/>
+  </dgm:styleLbl>
+  <dgm:styleLbl name="node2">
+    <dgm:fillClrLst>
+      <a:schemeClr val="accent4"/>
+    </dgm:fillClrLst>
+    <dgm:linClrLst meth="repeat">
+      <a:schemeClr val="lt1"/>
+    </dgm:linClrLst>
+    <dgm:effectClrLst/>
+    <dgm:txLinClrLst/>
+    <dgm:txFillClrLst/>
+    <dgm:txEffectClrLst/>
+  </dgm:styleLbl>
+  <dgm:styleLbl name="node3">
+    <dgm:fillClrLst>
+      <a:schemeClr val="accent5"/>
+    </dgm:fillClrLst>
+    <dgm:linClrLst meth="repeat">
+      <a:schemeClr val="lt1"/>
+    </dgm:linClrLst>
+    <dgm:effectClrLst/>
+    <dgm:txLinClrLst/>
+    <dgm:txFillClrLst/>
+    <dgm:txEffectClrLst/>
+  </dgm:styleLbl>
+  <dgm:styleLbl name="node4">
+    <dgm:fillClrLst>
+      <a:schemeClr val="accent6"/>
+    </dgm:fillClrLst>
+    <dgm:linClrLst meth="repeat">
+      <a:schemeClr val="lt1"/>
+    </dgm:linClrLst>
+    <dgm:effectClrLst/>
+    <dgm:txLinClrLst/>
+    <dgm:txFillClrLst/>
+    <dgm:txEffectClrLst/>
+  </dgm:styleLbl>
+  <dgm:styleLbl name="fgImgPlace1">
+    <dgm:fillClrLst>
+      <a:schemeClr val="accent3">
+        <a:tint val="50000"/>
+      </a:schemeClr>
+      <a:schemeClr val="accent4">
+        <a:tint val="50000"/>
+      </a:schemeClr>
+    </dgm:fillClrLst>
+    <dgm:linClrLst meth="repeat">
+      <a:schemeClr val="lt1"/>
+    </dgm:linClrLst>
+    <dgm:effectClrLst/>
+    <dgm:txLinClrLst/>
+    <dgm:txFillClrLst meth="repeat">
+      <a:schemeClr val="lt1"/>
+    </dgm:txFillClrLst>
+    <dgm:txEffectClrLst/>
+  </dgm:styleLbl>
+  <dgm:styleLbl name="alignImgPlace1">
+    <dgm:fillClrLst>
+      <a:schemeClr val="accent3">
+        <a:tint val="50000"/>
+      </a:schemeClr>
+      <a:schemeClr val="accent4">
+        <a:tint val="20000"/>
+      </a:schemeClr>
+    </dgm:fillClrLst>
+    <dgm:linClrLst meth="repeat">
+      <a:schemeClr val="lt1"/>
+    </dgm:linClrLst>
+    <dgm:effectClrLst/>
+    <dgm:txLinClrLst/>
+    <dgm:txFillClrLst meth="repeat">
+      <a:schemeClr val="lt1"/>
+    </dgm:txFillClrLst>
+    <dgm:txEffectClrLst/>
+  </dgm:styleLbl>
+  <dgm:styleLbl name="bgImgPlace1">
+    <dgm:fillClrLst>
+      <a:schemeClr val="accent3">
+        <a:tint val="50000"/>
+      </a:schemeClr>
+      <a:schemeClr val="accent4">
+        <a:tint val="20000"/>
+      </a:schemeClr>
+    </dgm:fillClrLst>
+    <dgm:linClrLst meth="repeat">
+      <a:schemeClr val="lt1"/>
+    </dgm:linClrLst>
+    <dgm:effectClrLst/>
+    <dgm:txLinClrLst/>
+    <dgm:txFillClrLst meth="repeat">
+      <a:schemeClr val="lt1"/>
+    </dgm:txFillClrLst>
+    <dgm:txEffectClrLst/>
+  </dgm:styleLbl>
+  <dgm:styleLbl name="sibTrans2D1">
+    <dgm:fillClrLst>
+      <a:schemeClr val="accent3"/>
+      <a:schemeClr val="accent4"/>
+    </dgm:fillClrLst>
+    <dgm:linClrLst meth="repeat">
+      <a:schemeClr val="lt1"/>
+    </dgm:linClrLst>
+    <dgm:effectClrLst/>
+    <dgm:txLinClrLst/>
+    <dgm:txFillClrLst/>
+    <dgm:txEffectClrLst/>
+  </dgm:styleLbl>
+  <dgm:styleLbl name="fgSibTrans2D1">
+    <dgm:fillClrLst>
+      <a:schemeClr val="accent3"/>
+      <a:schemeClr val="accent4"/>
+    </dgm:fillClrLst>
+    <dgm:linClrLst meth="repeat">
+      <a:schemeClr val="lt1"/>
+    </dgm:linClrLst>
+    <dgm:effectClrLst/>
+    <dgm:txLinClrLst/>
+    <dgm:txFillClrLst meth="repeat">
+      <a:schemeClr val="lt1"/>
+    </dgm:txFillClrLst>
+    <dgm:txEffectClrLst/>
+  </dgm:styleLbl>
+  <dgm:styleLbl name="bgSibTrans2D1">
+    <dgm:fillClrLst>
+      <a:schemeClr val="accent3"/>
+      <a:schemeClr val="accent4"/>
+    </dgm:fillClrLst>
+    <dgm:linClrLst meth="repeat">
+      <a:schemeClr val="lt1"/>
+    </dgm:linClrLst>
+    <dgm:effectClrLst/>
+    <dgm:txLinClrLst/>
+    <dgm:txFillClrLst meth="repeat">
+      <a:schemeClr val="lt1"/>
+    </dgm:txFillClrLst>
+    <dgm:txEffectClrLst/>
+  </dgm:styleLbl>
+  <dgm:styleLbl name="sibTrans1D1">
+    <dgm:fillClrLst/>
+    <dgm:linClrLst>
+      <a:schemeClr val="accent3"/>
+      <a:schemeClr val="accent4"/>
+    </dgm:linClrLst>
+    <dgm:effectClrLst/>
+    <dgm:txLinClrLst/>
+    <dgm:txFillClrLst meth="repeat">
+      <a:schemeClr val="tx1"/>
+    </dgm:txFillClrLst>
+    <dgm:txEffectClrLst/>
+  </dgm:styleLbl>
+  <dgm:styleLbl name="callout">
+    <dgm:fillClrLst meth="repeat">
+      <a:schemeClr val="accent3"/>
+    </dgm:fillClrLst>
+    <dgm:linClrLst meth="repeat">
+      <a:schemeClr val="accent3">
+        <a:tint val="50000"/>
+      </a:schemeClr>
+    </dgm:linClrLst>
+    <dgm:effectClrLst/>
+    <dgm:txLinClrLst/>
+    <dgm:txFillClrLst meth="repeat">
+      <a:schemeClr val="tx1"/>
+    </dgm:txFillClrLst>
+    <dgm:txEffectClrLst/>
+  </dgm:styleLbl>
+  <dgm:styleLbl name="asst0">
+    <dgm:fillClrLst meth="repeat">
+      <a:schemeClr val="accent3"/>
+    </dgm:fillClrLst>
+    <dgm:linClrLst meth="repeat">
+      <a:schemeClr val="lt1">
+        <a:shade val="80000"/>
+      </a:schemeClr>
+    </dgm:linClrLst>
+    <dgm:effectClrLst/>
+    <dgm:txLinClrLst/>
+    <dgm:txFillClrLst/>
+    <dgm:txEffectClrLst/>
+  </dgm:styleLbl>
+  <dgm:styleLbl name="asst1">
+    <dgm:fillClrLst meth="repeat">
+      <a:schemeClr val="accent4"/>
+    </dgm:fillClrLst>
+    <dgm:linClrLst meth="repeat">
+      <a:schemeClr val="lt1">
+        <a:shade val="80000"/>
+      </a:schemeClr>
+    </dgm:linClrLst>
+    <dgm:effectClrLst/>
+    <dgm:txLinClrLst/>
+    <dgm:txFillClrLst/>
+    <dgm:txEffectClrLst/>
+  </dgm:styleLbl>
+  <dgm:styleLbl name="asst2">
+    <dgm:fillClrLst>
+      <a:schemeClr val="accent5"/>
+    </dgm:fillClrLst>
+    <dgm:linClrLst meth="repeat">
+      <a:schemeClr val="lt1"/>
+    </dgm:linClrLst>
+    <dgm:effectClrLst/>
+    <dgm:txLinClrLst/>
+    <dgm:txFillClrLst/>
+    <dgm:txEffectClrLst/>
+  </dgm:styleLbl>
+  <dgm:styleLbl name="asst3">
+    <dgm:fillClrLst>
+      <a:schemeClr val="accent6"/>
+    </dgm:fillClrLst>
+    <dgm:linClrLst meth="repeat">
+      <a:schemeClr val="lt1"/>
+    </dgm:linClrLst>
+    <dgm:effectClrLst/>
+    <dgm:txLinClrLst/>
+    <dgm:txFillClrLst/>
+    <dgm:txEffectClrLst/>
+  </dgm:styleLbl>
+  <dgm:styleLbl name="asst4">
+    <dgm:fillClrLst>
+      <a:schemeClr val="accent1"/>
+    </dgm:fillClrLst>
+    <dgm:linClrLst meth="repeat">
+      <a:schemeClr val="lt1"/>
+    </dgm:linClrLst>
+    <dgm:effectClrLst/>
+    <dgm:txLinClrLst/>
+    <dgm:txFillClrLst/>
+    <dgm:txEffectClrLst/>
+  </dgm:styleLbl>
+  <dgm:styleLbl name="parChTrans2D1">
+    <dgm:fillClrLst meth="repeat">
+      <a:schemeClr val="accent2"/>
+    </dgm:fillClrLst>
+    <dgm:linClrLst meth="repeat">
+      <a:schemeClr val="lt1"/>
+    </dgm:linClrLst>
+    <dgm:effectClrLst/>
+    <dgm:txLinClrLst/>
+    <dgm:txFillClrLst meth="repeat">
+      <a:schemeClr val="lt1"/>
+    </dgm:txFillClrLst>
+    <dgm:txEffectClrLst/>
+  </dgm:styleLbl>
+  <dgm:styleLbl name="parChTrans2D2">
+    <dgm:fillClrLst meth="repeat">
+      <a:schemeClr val="accent3"/>
+    </dgm:fillClrLst>
+    <dgm:linClrLst meth="repeat">
+      <a:schemeClr val="lt1"/>
+    </dgm:linClrLst>
+    <dgm:effectClrLst/>
+    <dgm:txLinClrLst/>
+    <dgm:txFillClrLst/>
+    <dgm:txEffectClrLst/>
+  </dgm:styleLbl>
+  <dgm:styleLbl name="parChTrans2D3">
+    <dgm:fillClrLst meth="repeat">
+      <a:schemeClr val="accent4"/>
+    </dgm:fillClrLst>
+    <dgm:linClrLst meth="repeat">
+      <a:schemeClr val="lt1"/>
+    </dgm:linClrLst>
+    <dgm:effectClrLst/>
+    <dgm:txLinClrLst/>
+    <dgm:txFillClrLst/>
+    <dgm:txEffectClrLst/>
+  </dgm:styleLbl>
+  <dgm:styleLbl name="parChTrans2D4">
+    <dgm:fillClrLst meth="repeat">
+      <a:schemeClr val="accent5"/>
+    </dgm:fillClrLst>
+    <dgm:linClrLst meth="repeat">
+      <a:schemeClr val="lt1"/>
+    </dgm:linClrLst>
+    <dgm:effectClrLst/>
+    <dgm:txLinClrLst/>
+    <dgm:txFillClrLst meth="repeat">
+      <a:schemeClr val="lt1"/>
+    </dgm:txFillClrLst>
+    <dgm:txEffectClrLst/>
+  </dgm:styleLbl>
+  <dgm:styleLbl name="parChTrans1D1">
+    <dgm:fillClrLst meth="repeat">
+      <a:schemeClr val="accent3"/>
+    </dgm:fillClrLst>
+    <dgm:linClrLst meth="repeat">
+      <a:schemeClr val="accent3"/>
+    </dgm:linClrLst>
+    <dgm:effectClrLst/>
+    <dgm:txLinClrLst/>
+    <dgm:txFillClrLst meth="repeat">
+      <a:schemeClr val="tx1"/>
+    </dgm:txFillClrLst>
+    <dgm:txEffectClrLst/>
+  </dgm:styleLbl>
+  <dgm:styleLbl name="parChTrans1D2">
+    <dgm:fillClrLst meth="repeat">
+      <a:schemeClr val="accent2">
+        <a:tint val="90000"/>
+      </a:schemeClr>
+    </dgm:fillClrLst>
+    <dgm:linClrLst meth="repeat">
+      <a:schemeClr val="accent4"/>
+    </dgm:linClrLst>
+    <dgm:effectClrLst/>
+    <dgm:txLinClrLst/>
+    <dgm:txFillClrLst meth="repeat">
+      <a:schemeClr val="tx1"/>
+    </dgm:txFillClrLst>
+    <dgm:txEffectClrLst/>
+  </dgm:styleLbl>
+  <dgm:styleLbl name="parChTrans1D3">
+    <dgm:fillClrLst meth="repeat">
+      <a:schemeClr val="accent2">
+        <a:tint val="70000"/>
+      </a:schemeClr>
+    </dgm:fillClrLst>
+    <dgm:linClrLst meth="repeat">
+      <a:schemeClr val="accent5"/>
+    </dgm:linClrLst>
+    <dgm:effectClrLst/>
+    <dgm:txLinClrLst/>
+    <dgm:txFillClrLst meth="repeat">
+      <a:schemeClr val="tx1"/>
+    </dgm:txFillClrLst>
+    <dgm:txEffectClrLst/>
+  </dgm:styleLbl>
+  <dgm:styleLbl name="parChTrans1D4">
+    <dgm:fillClrLst meth="repeat">
+      <a:schemeClr val="accent6">
+        <a:tint val="50000"/>
+      </a:schemeClr>
+    </dgm:fillClrLst>
+    <dgm:linClrLst meth="repeat">
+      <a:schemeClr val="accent6"/>
+    </dgm:linClrLst>
+    <dgm:effectClrLst/>
+    <dgm:txLinClrLst/>
+    <dgm:txFillClrLst meth="repeat">
+      <a:schemeClr val="tx1"/>
+    </dgm:txFillClrLst>
+    <dgm:txEffectClrLst/>
+  </dgm:styleLbl>
+  <dgm:styleLbl name="fgAcc1">
+    <dgm:fillClrLst meth="repeat">
+      <a:schemeClr val="lt1">
+        <a:alpha val="90000"/>
+      </a:schemeClr>
+    </dgm:fillClrLst>
+    <dgm:linClrLst>
+      <a:schemeClr val="accent3"/>
+      <a:schemeClr val="accent4"/>
+    </dgm:linClrLst>
+    <dgm:effectClrLst/>
+    <dgm:txLinClrLst/>
+    <dgm:txFillClrLst meth="repeat">
+      <a:schemeClr val="dk1"/>
+    </dgm:txFillClrLst>
+    <dgm:txEffectClrLst/>
+  </dgm:styleLbl>
+  <dgm:styleLbl name="conFgAcc1">
+    <dgm:fillClrLst meth="repeat">
+      <a:schemeClr val="lt1">
+        <a:alpha val="90000"/>
+      </a:schemeClr>
+    </dgm:fillClrLst>
+    <dgm:linClrLst>
+      <a:schemeClr val="accent3"/>
+      <a:schemeClr val="accent4"/>
+    </dgm:linClrLst>
+    <dgm:effectClrLst/>
+    <dgm:txLinClrLst/>
+    <dgm:txFillClrLst meth="repeat">
+      <a:schemeClr val="dk1"/>
+    </dgm:txFillClrLst>
+    <dgm:txEffectClrLst/>
+  </dgm:styleLbl>
+  <dgm:styleLbl name="alignAcc1">
+    <dgm:fillClrLst meth="repeat">
+      <a:schemeClr val="lt1">
+        <a:alpha val="90000"/>
+      </a:schemeClr>
+    </dgm:fillClrLst>
+    <dgm:linClrLst>
+      <a:schemeClr val="accent3"/>
+      <a:schemeClr val="accent4"/>
+    </dgm:linClrLst>
+    <dgm:effectClrLst/>
+    <dgm:txLinClrLst/>
+    <dgm:txFillClrLst meth="repeat">
+      <a:schemeClr val="dk1"/>
+    </dgm:txFillClrLst>
+    <dgm:txEffectClrLst/>
+  </dgm:styleLbl>
+  <dgm:styleLbl name="trAlignAcc1">
+    <dgm:fillClrLst meth="repeat">
+      <a:schemeClr val="lt1">
+        <a:alpha val="40000"/>
+      </a:schemeClr>
+    </dgm:fillClrLst>
+    <dgm:linClrLst meth="repeat">
+      <a:schemeClr val="accent2"/>
+    </dgm:linClrLst>
+    <dgm:effectClrLst/>
+    <dgm:txLinClrLst/>
+    <dgm:txFillClrLst meth="repeat">
+      <a:schemeClr val="dk1"/>
+    </dgm:txFillClrLst>
+    <dgm:txEffectClrLst/>
+  </dgm:styleLbl>
+  <dgm:styleLbl name="bgAcc1">
+    <dgm:fillClrLst meth="repeat">
+      <a:schemeClr val="lt1">
+        <a:alpha val="90000"/>
+      </a:schemeClr>
+    </dgm:fillClrLst>
+    <dgm:linClrLst>
+      <a:schemeClr val="accent3"/>
+      <a:schemeClr val="accent4"/>
+    </dgm:linClrLst>
+    <dgm:effectClrLst/>
+    <dgm:txLinClrLst/>
+    <dgm:txFillClrLst meth="repeat">
+      <a:schemeClr val="dk1"/>
+    </dgm:txFillClrLst>
+    <dgm:txEffectClrLst/>
+  </dgm:styleLbl>
+  <dgm:styleLbl name="solidFgAcc1">
+    <dgm:fillClrLst meth="repeat">
+      <a:schemeClr val="lt1"/>
+    </dgm:fillClrLst>
+    <dgm:linClrLst>
+      <a:schemeClr val="accent3"/>
+      <a:schemeClr val="accent4"/>
+    </dgm:linClrLst>
+    <dgm:effectClrLst/>
+    <dgm:txLinClrLst/>
+    <dgm:txFillClrLst meth="repeat">
+      <a:schemeClr val="dk1"/>
+    </dgm:txFillClrLst>
+    <dgm:txEffectClrLst/>
+  </dgm:styleLbl>
+  <dgm:styleLbl name="solidAlignAcc1">
+    <dgm:fillClrLst meth="repeat">
+      <a:schemeClr val="lt1"/>
+    </dgm:fillClrLst>
+    <dgm:linClrLst>
+      <a:schemeClr val="accent3"/>
+      <a:schemeClr val="accent4"/>
+    </dgm:linClrLst>
+    <dgm:effectClrLst/>
+    <dgm:txLinClrLst/>
+    <dgm:txFillClrLst meth="repeat">
+      <a:schemeClr val="dk1"/>
+    </dgm:txFillClrLst>
+    <dgm:txEffectClrLst/>
+  </dgm:styleLbl>
+  <dgm:styleLbl name="solidBgAcc1">
+    <dgm:fillClrLst meth="repeat">
+      <a:schemeClr val="lt1"/>
+    </dgm:fillClrLst>
+    <dgm:linClrLst>
+      <a:schemeClr val="accent3"/>
+      <a:schemeClr val="accent4"/>
+    </dgm:linClrLst>
+    <dgm:effectClrLst/>
+    <dgm:txLinClrLst/>
+    <dgm:txFillClrLst meth="repeat">
+      <a:schemeClr val="dk1"/>
+    </dgm:txFillClrLst>
+    <dgm:txEffectClrLst/>
+  </dgm:styleLbl>
+  <dgm:styleLbl name="fgAccFollowNode1">
+    <dgm:fillClrLst>
+      <a:schemeClr val="accent3">
+        <a:tint val="40000"/>
+        <a:alpha val="90000"/>
+      </a:schemeClr>
+      <a:schemeClr val="accent4">
+        <a:tint val="40000"/>
+        <a:alpha val="90000"/>
+      </a:schemeClr>
+    </dgm:fillClrLst>
+    <dgm:linClrLst>
+      <a:schemeClr val="accent3">
+        <a:tint val="40000"/>
+        <a:alpha val="90000"/>
+      </a:schemeClr>
+      <a:schemeClr val="accent4">
+        <a:tint val="40000"/>
+        <a:alpha val="90000"/>
+      </a:schemeClr>
+    </dgm:linClrLst>
+    <dgm:effectClrLst/>
+    <dgm:txLinClrLst/>
+    <dgm:txFillClrLst meth="repeat">
+      <a:schemeClr val="dk1"/>
+    </dgm:txFillClrLst>
+    <dgm:txEffectClrLst/>
+  </dgm:styleLbl>
+  <dgm:styleLbl name="alignAccFollowNode1">
+    <dgm:fillClrLst>
+      <a:schemeClr val="accent3">
+        <a:tint val="40000"/>
+        <a:alpha val="90000"/>
+      </a:schemeClr>
+      <a:schemeClr val="accent4">
+        <a:tint val="40000"/>
+        <a:alpha val="90000"/>
+      </a:schemeClr>
+    </dgm:fillClrLst>
+    <dgm:linClrLst>
+      <a:schemeClr val="accent3">
+        <a:tint val="40000"/>
+        <a:alpha val="90000"/>
+      </a:schemeClr>
+      <a:schemeClr val="accent4">
+        <a:tint val="40000"/>
+        <a:alpha val="90000"/>
+      </a:schemeClr>
+    </dgm:linClrLst>
+    <dgm:effectClrLst/>
+    <dgm:txLinClrLst/>
+    <dgm:txFillClrLst meth="repeat">
+      <a:schemeClr val="dk1"/>
+    </dgm:txFillClrLst>
+    <dgm:txEffectClrLst/>
+  </dgm:styleLbl>
+  <dgm:styleLbl name="bgAccFollowNode1">
+    <dgm:fillClrLst>
+      <a:schemeClr val="accent3">
+        <a:tint val="40000"/>
+        <a:alpha val="90000"/>
+      </a:schemeClr>
+      <a:schemeClr val="accent4">
+        <a:tint val="40000"/>
+        <a:alpha val="90000"/>
+      </a:schemeClr>
+    </dgm:fillClrLst>
+    <dgm:linClrLst>
+      <a:schemeClr val="accent3">
+        <a:tint val="40000"/>
+        <a:alpha val="90000"/>
+      </a:schemeClr>
+      <a:schemeClr val="accent4">
+        <a:tint val="40000"/>
+        <a:alpha val="90000"/>
+      </a:schemeClr>
+    </dgm:linClrLst>
+    <dgm:effectClrLst/>
+    <dgm:txLinClrLst/>
+    <dgm:txFillClrLst meth="repeat">
+      <a:schemeClr val="dk1"/>
+    </dgm:txFillClrLst>
+    <dgm:txEffectClrLst/>
+  </dgm:styleLbl>
+  <dgm:styleLbl name="fgAcc0">
+    <dgm:fillClrLst meth="repeat">
+      <a:schemeClr val="lt1">
+        <a:alpha val="90000"/>
+      </a:schemeClr>
+    </dgm:fillClrLst>
+    <dgm:linClrLst>
+      <a:schemeClr val="accent2"/>
+    </dgm:linClrLst>
+    <dgm:effectClrLst/>
+    <dgm:txLinClrLst/>
+    <dgm:txFillClrLst meth="repeat">
+      <a:schemeClr val="dk1"/>
+    </dgm:txFillClrLst>
+    <dgm:txEffectClrLst/>
+  </dgm:styleLbl>
+  <dgm:styleLbl name="fgAcc2">
+    <dgm:fillClrLst meth="repeat">
+      <a:schemeClr val="lt1">
+        <a:alpha val="90000"/>
+      </a:schemeClr>
+    </dgm:fillClrLst>
+    <dgm:linClrLst>
+      <a:schemeClr val="accent4"/>
+    </dgm:linClrLst>
+    <dgm:effectClrLst/>
+    <dgm:txLinClrLst/>
+    <dgm:txFillClrLst meth="repeat">
+      <a:schemeClr val="dk1"/>
+    </dgm:txFillClrLst>
+    <dgm:txEffectClrLst/>
+  </dgm:styleLbl>
+  <dgm:styleLbl name="fgAcc3">
+    <dgm:fillClrLst meth="repeat">
+      <a:schemeClr val="lt1">
+        <a:alpha val="90000"/>
+      </a:schemeClr>
+    </dgm:fillClrLst>
+    <dgm:linClrLst>
+      <a:schemeClr val="accent5"/>
+    </dgm:linClrLst>
+    <dgm:effectClrLst/>
+    <dgm:txLinClrLst/>
+    <dgm:txFillClrLst meth="repeat">
+      <a:schemeClr val="dk1"/>
+    </dgm:txFillClrLst>
+    <dgm:txEffectClrLst/>
+  </dgm:styleLbl>
+  <dgm:styleLbl name="fgAcc4">
+    <dgm:fillClrLst meth="repeat">
+      <a:schemeClr val="lt1">
+        <a:alpha val="90000"/>
+      </a:schemeClr>
+    </dgm:fillClrLst>
+    <dgm:linClrLst>
+      <a:schemeClr val="accent6"/>
+    </dgm:linClrLst>
+    <dgm:effectClrLst/>
+    <dgm:txLinClrLst/>
+    <dgm:txFillClrLst meth="repeat">
+      <a:schemeClr val="dk1"/>
+    </dgm:txFillClrLst>
+    <dgm:txEffectClrLst/>
+  </dgm:styleLbl>
+  <dgm:styleLbl name="bgShp">
+    <dgm:fillClrLst meth="repeat">
+      <a:schemeClr val="accent3">
+        <a:tint val="40000"/>
+      </a:schemeClr>
+    </dgm:fillClrLst>
+    <dgm:linClrLst meth="repeat">
+      <a:schemeClr val="dk1"/>
+    </dgm:linClrLst>
+    <dgm:effectClrLst/>
+    <dgm:txLinClrLst/>
+    <dgm:txFillClrLst meth="repeat">
+      <a:schemeClr val="dk1"/>
+    </dgm:txFillClrLst>
+    <dgm:txEffectClrLst/>
+  </dgm:styleLbl>
+  <dgm:styleLbl name="dkBgShp">
+    <dgm:fillClrLst meth="repeat">
+      <a:schemeClr val="accent3">
+        <a:shade val="90000"/>
+      </a:schemeClr>
+    </dgm:fillClrLst>
+    <dgm:linClrLst meth="repeat">
+      <a:schemeClr val="dk1"/>
+    </dgm:linClrLst>
+    <dgm:effectClrLst/>
+    <dgm:txLinClrLst/>
+    <dgm:txFillClrLst meth="repeat">
+      <a:schemeClr val="lt1"/>
+    </dgm:txFillClrLst>
+    <dgm:txEffectClrLst/>
+  </dgm:styleLbl>
+  <dgm:styleLbl name="trBgShp">
+    <dgm:fillClrLst meth="repeat">
+      <a:schemeClr val="accent2">
+        <a:tint val="50000"/>
+        <a:alpha val="40000"/>
+      </a:schemeClr>
+    </dgm:fillClrLst>
+    <dgm:linClrLst meth="repeat">
+      <a:schemeClr val="accent3"/>
+    </dgm:linClrLst>
+    <dgm:effectClrLst/>
+    <dgm:txLinClrLst/>
+    <dgm:txFillClrLst meth="repeat">
+      <a:schemeClr val="lt1"/>
+    </dgm:txFillClrLst>
+    <dgm:txEffectClrLst/>
+  </dgm:styleLbl>
+  <dgm:styleLbl name="fgShp">
+    <dgm:fillClrLst meth="repeat">
+      <a:schemeClr val="accent3">
+        <a:tint val="40000"/>
+      </a:schemeClr>
+    </dgm:fillClrLst>
+    <dgm:linClrLst meth="repeat">
+      <a:schemeClr val="lt1"/>
+    </dgm:linClrLst>
+    <dgm:effectClrLst/>
+    <dgm:txLinClrLst/>
+    <dgm:txFillClrLst meth="repeat">
+      <a:schemeClr val="dk1"/>
+    </dgm:txFillClrLst>
+    <dgm:txEffectClrLst/>
+  </dgm:styleLbl>
+  <dgm:styleLbl name="revTx">
+    <dgm:fillClrLst meth="repeat">
+      <a:schemeClr val="lt1">
+        <a:alpha val="0"/>
+      </a:schemeClr>
+    </dgm:fillClrLst>
+    <dgm:linClrLst meth="repeat">
+      <a:schemeClr val="dk1">
+        <a:alpha val="0"/>
+      </a:schemeClr>
+    </dgm:linClrLst>
+    <dgm:effectClrLst/>
+    <dgm:txLinClrLst/>
+    <dgm:txFillClrLst meth="repeat">
+      <a:schemeClr val="tx1"/>
+    </dgm:txFillClrLst>
+    <dgm:txEffectClrLst/>
+  </dgm:styleLbl>
+</dgm:colorsDef>
+</file>
+
+<file path=ppt/diagrams/data1.xml><?xml version="1.0" encoding="utf-8"?>
+<dgm:dataModel xmlns:dgm="http://schemas.openxmlformats.org/drawingml/2006/diagram" xmlns:a="http://schemas.openxmlformats.org/drawingml/2006/main">
+  <dgm:ptLst>
+    <dgm:pt modelId="{B10CBD63-8FBC-4B07-B7D8-4244CFFA1B55}" type="doc">
+      <dgm:prSet loTypeId="urn:microsoft.com/office/officeart/2005/8/layout/hierarchy3" loCatId="list" qsTypeId="urn:microsoft.com/office/officeart/2005/8/quickstyle/3d2" qsCatId="3D" csTypeId="urn:microsoft.com/office/officeart/2005/8/colors/colorful3" csCatId="colorful"/>
+      <dgm:spPr/>
+      <dgm:t>
+        <a:bodyPr/>
+        <a:lstStyle/>
+        <a:p>
+          <a:endParaRPr lang="en-US"/>
+        </a:p>
+      </dgm:t>
+    </dgm:pt>
+    <dgm:pt modelId="{9C9F58FB-5697-405E-9C1F-8A04D9607770}">
+      <dgm:prSet/>
+      <dgm:spPr/>
+      <dgm:t>
+        <a:bodyPr/>
+        <a:lstStyle/>
+        <a:p>
+          <a:r>
+            <a:rPr lang="en-US"/>
+            <a:t>Day One</a:t>
+          </a:r>
+        </a:p>
+      </dgm:t>
+    </dgm:pt>
+    <dgm:pt modelId="{02928794-9FCB-4C75-A065-FEB1150AC032}" type="parTrans" cxnId="{9C66C138-8240-4D5A-AB42-E9287AB18D5C}">
+      <dgm:prSet/>
+      <dgm:spPr/>
+      <dgm:t>
+        <a:bodyPr/>
+        <a:lstStyle/>
+        <a:p>
+          <a:endParaRPr lang="en-US"/>
+        </a:p>
+      </dgm:t>
+    </dgm:pt>
+    <dgm:pt modelId="{9ABF4C64-CCBA-4B90-8DDD-922C7A8E258E}" type="sibTrans" cxnId="{9C66C138-8240-4D5A-AB42-E9287AB18D5C}">
+      <dgm:prSet/>
+      <dgm:spPr/>
+      <dgm:t>
+        <a:bodyPr/>
+        <a:lstStyle/>
+        <a:p>
+          <a:endParaRPr lang="en-US"/>
+        </a:p>
+      </dgm:t>
+    </dgm:pt>
+    <dgm:pt modelId="{DA818917-02F2-433E-9EB9-CFD59262B33B}">
+      <dgm:prSet/>
+      <dgm:spPr/>
+      <dgm:t>
+        <a:bodyPr/>
+        <a:lstStyle/>
+        <a:p>
+          <a:r>
+            <a:rPr lang="en-US"/>
+            <a:t>Maya Ruiz</a:t>
+          </a:r>
+        </a:p>
+      </dgm:t>
+    </dgm:pt>
+    <dgm:pt modelId="{05BC743C-B91F-4184-80BF-86CAF5885E43}" type="parTrans" cxnId="{19DACE46-64AD-4407-9203-F0190A73BE67}">
+      <dgm:prSet/>
+      <dgm:spPr/>
+      <dgm:t>
+        <a:bodyPr/>
+        <a:lstStyle/>
+        <a:p>
+          <a:endParaRPr lang="en-US"/>
+        </a:p>
+      </dgm:t>
+    </dgm:pt>
+    <dgm:pt modelId="{D3824007-3212-4002-A694-3FAD4C004EFA}" type="sibTrans" cxnId="{19DACE46-64AD-4407-9203-F0190A73BE67}">
+      <dgm:prSet/>
+      <dgm:spPr/>
+      <dgm:t>
+        <a:bodyPr/>
+        <a:lstStyle/>
+        <a:p>
+          <a:endParaRPr lang="en-US"/>
+        </a:p>
+      </dgm:t>
+    </dgm:pt>
+    <dgm:pt modelId="{7125609E-8844-4DFB-9DD6-79F0D7E8DDE1}">
+      <dgm:prSet/>
+      <dgm:spPr/>
+      <dgm:t>
+        <a:bodyPr/>
+        <a:lstStyle/>
+        <a:p>
+          <a:r>
+            <a:rPr lang="en-US"/>
+            <a:t>Human Resources Director</a:t>
+          </a:r>
+        </a:p>
+      </dgm:t>
+    </dgm:pt>
+    <dgm:pt modelId="{A7FA202B-60BD-4995-BC4D-1E10D31E64E5}" type="parTrans" cxnId="{640C6C34-63BF-4B18-BB4D-688E28B8DAFF}">
+      <dgm:prSet/>
+      <dgm:spPr/>
+      <dgm:t>
+        <a:bodyPr/>
+        <a:lstStyle/>
+        <a:p>
+          <a:endParaRPr lang="en-US"/>
+        </a:p>
+      </dgm:t>
+    </dgm:pt>
+    <dgm:pt modelId="{34F52B03-4457-4CE1-80F9-C1FDDD11E60B}" type="sibTrans" cxnId="{640C6C34-63BF-4B18-BB4D-688E28B8DAFF}">
+      <dgm:prSet/>
+      <dgm:spPr/>
+      <dgm:t>
+        <a:bodyPr/>
+        <a:lstStyle/>
+        <a:p>
+          <a:endParaRPr lang="en-US"/>
+        </a:p>
+      </dgm:t>
+    </dgm:pt>
+    <dgm:pt modelId="{D11AA0BA-5F27-4299-970F-77D874E9D576}">
+      <dgm:prSet/>
+      <dgm:spPr/>
+      <dgm:t>
+        <a:bodyPr/>
+        <a:lstStyle/>
+        <a:p>
+          <a:r>
+            <a:rPr lang="en-US"/>
+            <a:t>Day Two</a:t>
+          </a:r>
+        </a:p>
+      </dgm:t>
+    </dgm:pt>
+    <dgm:pt modelId="{F749A40C-06D9-4BB3-B0F2-312735A6CB59}" type="parTrans" cxnId="{01E17DC0-868B-4492-A55C-6F2EF1B37EAB}">
+      <dgm:prSet/>
+      <dgm:spPr/>
+      <dgm:t>
+        <a:bodyPr/>
+        <a:lstStyle/>
+        <a:p>
+          <a:endParaRPr lang="en-US"/>
+        </a:p>
+      </dgm:t>
+    </dgm:pt>
+    <dgm:pt modelId="{45B00693-8FD4-48A4-86EC-ADF10B75B442}" type="sibTrans" cxnId="{01E17DC0-868B-4492-A55C-6F2EF1B37EAB}">
+      <dgm:prSet/>
+      <dgm:spPr/>
+      <dgm:t>
+        <a:bodyPr/>
+        <a:lstStyle/>
+        <a:p>
+          <a:endParaRPr lang="en-US"/>
+        </a:p>
+      </dgm:t>
+    </dgm:pt>
+    <dgm:pt modelId="{71CC35C6-0FB7-48F9-ACFF-A3DBC9F79965}">
+      <dgm:prSet/>
+      <dgm:spPr/>
+      <dgm:t>
+        <a:bodyPr/>
+        <a:lstStyle/>
+        <a:p>
+          <a:r>
+            <a:rPr lang="en-US"/>
+            <a:t>David Jensen</a:t>
+          </a:r>
+        </a:p>
+      </dgm:t>
+    </dgm:pt>
+    <dgm:pt modelId="{09444A8A-09BB-4B36-A755-D2FBF8F28052}" type="parTrans" cxnId="{5D6D5745-124D-429B-BC93-C60F7D2E41CF}">
+      <dgm:prSet/>
+      <dgm:spPr/>
+      <dgm:t>
+        <a:bodyPr/>
+        <a:lstStyle/>
+        <a:p>
+          <a:endParaRPr lang="en-US"/>
+        </a:p>
+      </dgm:t>
+    </dgm:pt>
+    <dgm:pt modelId="{009492FA-3F1E-4AFC-A68E-4009C53F0E87}" type="sibTrans" cxnId="{5D6D5745-124D-429B-BC93-C60F7D2E41CF}">
+      <dgm:prSet/>
+      <dgm:spPr/>
+      <dgm:t>
+        <a:bodyPr/>
+        <a:lstStyle/>
+        <a:p>
+          <a:endParaRPr lang="en-US"/>
+        </a:p>
+      </dgm:t>
+    </dgm:pt>
+    <dgm:pt modelId="{B8CEF231-6CE4-405A-91C4-A721F3961CE2}">
+      <dgm:prSet/>
+      <dgm:spPr/>
+      <dgm:t>
+        <a:bodyPr/>
+        <a:lstStyle/>
+        <a:p>
+          <a:r>
+            <a:rPr lang="en-US"/>
+            <a:t>Resort Operations Director</a:t>
+          </a:r>
+        </a:p>
+      </dgm:t>
+    </dgm:pt>
+    <dgm:pt modelId="{3D0A5C7C-25D7-401C-BE27-7C05942C3CC6}" type="parTrans" cxnId="{84AF3DF3-A975-4F98-867C-E62A81CDEEA9}">
+      <dgm:prSet/>
+      <dgm:spPr/>
+      <dgm:t>
+        <a:bodyPr/>
+        <a:lstStyle/>
+        <a:p>
+          <a:endParaRPr lang="en-US"/>
+        </a:p>
+      </dgm:t>
+    </dgm:pt>
+    <dgm:pt modelId="{3FDF1E87-3E9A-4DE6-88B1-C54F75E7780B}" type="sibTrans" cxnId="{84AF3DF3-A975-4F98-867C-E62A81CDEEA9}">
+      <dgm:prSet/>
+      <dgm:spPr/>
+      <dgm:t>
+        <a:bodyPr/>
+        <a:lstStyle/>
+        <a:p>
+          <a:endParaRPr lang="en-US"/>
+        </a:p>
+      </dgm:t>
+    </dgm:pt>
+    <dgm:pt modelId="{8213B124-5091-423C-A0FE-D3EC81063DF0}">
+      <dgm:prSet/>
+      <dgm:spPr/>
+      <dgm:t>
+        <a:bodyPr/>
+        <a:lstStyle/>
+        <a:p>
+          <a:r>
+            <a:rPr lang="en-US"/>
+            <a:t>Day Three</a:t>
+          </a:r>
+        </a:p>
+      </dgm:t>
+    </dgm:pt>
+    <dgm:pt modelId="{EBF656CB-E5D3-40D4-883C-2BA562A9B34C}" type="parTrans" cxnId="{7A5DE8ED-9C66-4311-B634-30CCA2029BBD}">
+      <dgm:prSet/>
+      <dgm:spPr/>
+      <dgm:t>
+        <a:bodyPr/>
+        <a:lstStyle/>
+        <a:p>
+          <a:endParaRPr lang="en-US"/>
+        </a:p>
+      </dgm:t>
+    </dgm:pt>
+    <dgm:pt modelId="{6E5E95C6-C8E2-42E2-88D0-801AEF9F7812}" type="sibTrans" cxnId="{7A5DE8ED-9C66-4311-B634-30CCA2029BBD}">
+      <dgm:prSet/>
+      <dgm:spPr/>
+      <dgm:t>
+        <a:bodyPr/>
+        <a:lstStyle/>
+        <a:p>
+          <a:endParaRPr lang="en-US"/>
+        </a:p>
+      </dgm:t>
+    </dgm:pt>
+    <dgm:pt modelId="{ABD7B137-6AE2-41FF-9FCC-C6ABE75B89F1}">
+      <dgm:prSet/>
+      <dgm:spPr/>
+      <dgm:t>
+        <a:bodyPr/>
+        <a:lstStyle/>
+        <a:p>
+          <a:r>
+            <a:rPr lang="en-US"/>
+            <a:t>Ken Lee</a:t>
+          </a:r>
+        </a:p>
+      </dgm:t>
+    </dgm:pt>
+    <dgm:pt modelId="{548EAECB-3BD3-4E62-B006-C14E39111C1F}" type="parTrans" cxnId="{86DD78BE-3045-4F6A-896F-F55BA6C1F20F}">
+      <dgm:prSet/>
+      <dgm:spPr/>
+      <dgm:t>
+        <a:bodyPr/>
+        <a:lstStyle/>
+        <a:p>
+          <a:endParaRPr lang="en-US"/>
+        </a:p>
+      </dgm:t>
+    </dgm:pt>
+    <dgm:pt modelId="{FC064957-EC65-4EE5-A950-16F66546D6C2}" type="sibTrans" cxnId="{86DD78BE-3045-4F6A-896F-F55BA6C1F20F}">
+      <dgm:prSet/>
+      <dgm:spPr/>
+      <dgm:t>
+        <a:bodyPr/>
+        <a:lstStyle/>
+        <a:p>
+          <a:endParaRPr lang="en-US"/>
+        </a:p>
+      </dgm:t>
+    </dgm:pt>
+    <dgm:pt modelId="{0CA1BD56-5757-4DFB-A93E-8B3F27A46AFF}">
+      <dgm:prSet/>
+      <dgm:spPr/>
+      <dgm:t>
+        <a:bodyPr/>
+        <a:lstStyle/>
+        <a:p>
+          <a:r>
+            <a:rPr lang="en-US"/>
+            <a:t>Safety Director</a:t>
+          </a:r>
+        </a:p>
+      </dgm:t>
+    </dgm:pt>
+    <dgm:pt modelId="{2B656D2E-4063-4157-BE99-B4EE541A3D2A}" type="parTrans" cxnId="{9E3EBF48-D481-4519-A31B-6BA8BCC546FD}">
+      <dgm:prSet/>
+      <dgm:spPr/>
+      <dgm:t>
+        <a:bodyPr/>
+        <a:lstStyle/>
+        <a:p>
+          <a:endParaRPr lang="en-US"/>
+        </a:p>
+      </dgm:t>
+    </dgm:pt>
+    <dgm:pt modelId="{2BBE6512-ECA7-460C-BC53-D7A8F7C037D5}" type="sibTrans" cxnId="{9E3EBF48-D481-4519-A31B-6BA8BCC546FD}">
+      <dgm:prSet/>
+      <dgm:spPr/>
+      <dgm:t>
+        <a:bodyPr/>
+        <a:lstStyle/>
+        <a:p>
+          <a:endParaRPr lang="en-US"/>
+        </a:p>
+      </dgm:t>
+    </dgm:pt>
+    <dgm:pt modelId="{DDE4C3A0-D396-4FFE-8179-9BFB4A3F0423}" type="pres">
+      <dgm:prSet presAssocID="{B10CBD63-8FBC-4B07-B7D8-4244CFFA1B55}" presName="diagram" presStyleCnt="0">
+        <dgm:presLayoutVars>
+          <dgm:chPref val="1"/>
+          <dgm:dir/>
+          <dgm:animOne val="branch"/>
+          <dgm:animLvl val="lvl"/>
+          <dgm:resizeHandles/>
+        </dgm:presLayoutVars>
+      </dgm:prSet>
+      <dgm:spPr/>
+    </dgm:pt>
+    <dgm:pt modelId="{710CF8E6-66B7-4B03-A417-31FF1ED69017}" type="pres">
+      <dgm:prSet presAssocID="{9C9F58FB-5697-405E-9C1F-8A04D9607770}" presName="root" presStyleCnt="0"/>
+      <dgm:spPr/>
+    </dgm:pt>
+    <dgm:pt modelId="{ED97D5B5-6A08-4A28-B637-3870E8D9F683}" type="pres">
+      <dgm:prSet presAssocID="{9C9F58FB-5697-405E-9C1F-8A04D9607770}" presName="rootComposite" presStyleCnt="0"/>
+      <dgm:spPr/>
+    </dgm:pt>
+    <dgm:pt modelId="{D8A260C7-740A-4931-8CD2-78F6D7ED64AD}" type="pres">
+      <dgm:prSet presAssocID="{9C9F58FB-5697-405E-9C1F-8A04D9607770}" presName="rootText" presStyleLbl="node1" presStyleIdx="0" presStyleCnt="3"/>
+      <dgm:spPr/>
+    </dgm:pt>
+    <dgm:pt modelId="{0BD55F58-8545-4591-9962-579D5AC8A0EE}" type="pres">
+      <dgm:prSet presAssocID="{9C9F58FB-5697-405E-9C1F-8A04D9607770}" presName="rootConnector" presStyleLbl="node1" presStyleIdx="0" presStyleCnt="3"/>
+      <dgm:spPr/>
+    </dgm:pt>
+    <dgm:pt modelId="{57795413-E6C5-4CD7-934F-6905D86A4FDB}" type="pres">
+      <dgm:prSet presAssocID="{9C9F58FB-5697-405E-9C1F-8A04D9607770}" presName="childShape" presStyleCnt="0"/>
+      <dgm:spPr/>
+    </dgm:pt>
+    <dgm:pt modelId="{8578CFEC-ADE1-4DA5-AAAD-FEF6080D456A}" type="pres">
+      <dgm:prSet presAssocID="{05BC743C-B91F-4184-80BF-86CAF5885E43}" presName="Name13" presStyleLbl="parChTrans1D2" presStyleIdx="0" presStyleCnt="6"/>
+      <dgm:spPr/>
+    </dgm:pt>
+    <dgm:pt modelId="{7334F9D4-9292-4317-8977-381D95682519}" type="pres">
+      <dgm:prSet presAssocID="{DA818917-02F2-433E-9EB9-CFD59262B33B}" presName="childText" presStyleLbl="bgAcc1" presStyleIdx="0" presStyleCnt="6">
+        <dgm:presLayoutVars>
+          <dgm:bulletEnabled val="1"/>
+        </dgm:presLayoutVars>
+      </dgm:prSet>
+      <dgm:spPr/>
+    </dgm:pt>
+    <dgm:pt modelId="{72587B53-35F5-4B0B-A2E1-C345D8CAC5B0}" type="pres">
+      <dgm:prSet presAssocID="{A7FA202B-60BD-4995-BC4D-1E10D31E64E5}" presName="Name13" presStyleLbl="parChTrans1D2" presStyleIdx="1" presStyleCnt="6"/>
+      <dgm:spPr/>
+    </dgm:pt>
+    <dgm:pt modelId="{B40365CC-4AC8-4766-A430-7EC391CFE5BE}" type="pres">
+      <dgm:prSet presAssocID="{7125609E-8844-4DFB-9DD6-79F0D7E8DDE1}" presName="childText" presStyleLbl="bgAcc1" presStyleIdx="1" presStyleCnt="6">
+        <dgm:presLayoutVars>
+          <dgm:bulletEnabled val="1"/>
+        </dgm:presLayoutVars>
+      </dgm:prSet>
+      <dgm:spPr/>
+    </dgm:pt>
+    <dgm:pt modelId="{77D63D2A-A62E-4E9B-A69C-4E769EB58B60}" type="pres">
+      <dgm:prSet presAssocID="{D11AA0BA-5F27-4299-970F-77D874E9D576}" presName="root" presStyleCnt="0"/>
+      <dgm:spPr/>
+    </dgm:pt>
+    <dgm:pt modelId="{89761107-8C08-40AB-96DF-201EAA9E024A}" type="pres">
+      <dgm:prSet presAssocID="{D11AA0BA-5F27-4299-970F-77D874E9D576}" presName="rootComposite" presStyleCnt="0"/>
+      <dgm:spPr/>
+    </dgm:pt>
+    <dgm:pt modelId="{D1E5B0C2-D8E0-46CE-B11A-7E487BA21377}" type="pres">
+      <dgm:prSet presAssocID="{D11AA0BA-5F27-4299-970F-77D874E9D576}" presName="rootText" presStyleLbl="node1" presStyleIdx="1" presStyleCnt="3"/>
+      <dgm:spPr/>
+    </dgm:pt>
+    <dgm:pt modelId="{64BFFB1E-AA69-4EAC-BD29-B952BAD0B3A9}" type="pres">
+      <dgm:prSet presAssocID="{D11AA0BA-5F27-4299-970F-77D874E9D576}" presName="rootConnector" presStyleLbl="node1" presStyleIdx="1" presStyleCnt="3"/>
+      <dgm:spPr/>
+    </dgm:pt>
+    <dgm:pt modelId="{CC09882E-0371-4905-85E4-A1B4AD964351}" type="pres">
+      <dgm:prSet presAssocID="{D11AA0BA-5F27-4299-970F-77D874E9D576}" presName="childShape" presStyleCnt="0"/>
+      <dgm:spPr/>
+    </dgm:pt>
+    <dgm:pt modelId="{713CEBAF-A1E8-4963-AD04-54DA32F2EB8B}" type="pres">
+      <dgm:prSet presAssocID="{09444A8A-09BB-4B36-A755-D2FBF8F28052}" presName="Name13" presStyleLbl="parChTrans1D2" presStyleIdx="2" presStyleCnt="6"/>
+      <dgm:spPr/>
+    </dgm:pt>
+    <dgm:pt modelId="{1B8667FB-337D-49EF-A785-46B38D8F4B9E}" type="pres">
+      <dgm:prSet presAssocID="{71CC35C6-0FB7-48F9-ACFF-A3DBC9F79965}" presName="childText" presStyleLbl="bgAcc1" presStyleIdx="2" presStyleCnt="6">
+        <dgm:presLayoutVars>
+          <dgm:bulletEnabled val="1"/>
+        </dgm:presLayoutVars>
+      </dgm:prSet>
+      <dgm:spPr/>
+    </dgm:pt>
+    <dgm:pt modelId="{B65F1D1F-AB85-445D-BE32-1F7266314353}" type="pres">
+      <dgm:prSet presAssocID="{3D0A5C7C-25D7-401C-BE27-7C05942C3CC6}" presName="Name13" presStyleLbl="parChTrans1D2" presStyleIdx="3" presStyleCnt="6"/>
+      <dgm:spPr/>
+    </dgm:pt>
+    <dgm:pt modelId="{7407D5C2-B86B-4576-BCA3-B0E4FB850A92}" type="pres">
+      <dgm:prSet presAssocID="{B8CEF231-6CE4-405A-91C4-A721F3961CE2}" presName="childText" presStyleLbl="bgAcc1" presStyleIdx="3" presStyleCnt="6">
+        <dgm:presLayoutVars>
+          <dgm:bulletEnabled val="1"/>
+        </dgm:presLayoutVars>
+      </dgm:prSet>
+      <dgm:spPr/>
+    </dgm:pt>
+    <dgm:pt modelId="{84275F07-5AFB-4C05-A1EB-E4BBCC9A11A4}" type="pres">
+      <dgm:prSet presAssocID="{8213B124-5091-423C-A0FE-D3EC81063DF0}" presName="root" presStyleCnt="0"/>
+      <dgm:spPr/>
+    </dgm:pt>
+    <dgm:pt modelId="{744D72DA-2032-4754-9B4C-EBC08D9E908B}" type="pres">
+      <dgm:prSet presAssocID="{8213B124-5091-423C-A0FE-D3EC81063DF0}" presName="rootComposite" presStyleCnt="0"/>
+      <dgm:spPr/>
+    </dgm:pt>
+    <dgm:pt modelId="{FD70A21F-0E54-4D13-924C-10305F0E168C}" type="pres">
+      <dgm:prSet presAssocID="{8213B124-5091-423C-A0FE-D3EC81063DF0}" presName="rootText" presStyleLbl="node1" presStyleIdx="2" presStyleCnt="3"/>
+      <dgm:spPr/>
+    </dgm:pt>
+    <dgm:pt modelId="{5939F7DC-802B-45EE-85FE-3BA6D22A3EA3}" type="pres">
+      <dgm:prSet presAssocID="{8213B124-5091-423C-A0FE-D3EC81063DF0}" presName="rootConnector" presStyleLbl="node1" presStyleIdx="2" presStyleCnt="3"/>
+      <dgm:spPr/>
+    </dgm:pt>
+    <dgm:pt modelId="{96CFAEFD-5B3D-417D-BA0F-CA0492976128}" type="pres">
+      <dgm:prSet presAssocID="{8213B124-5091-423C-A0FE-D3EC81063DF0}" presName="childShape" presStyleCnt="0"/>
+      <dgm:spPr/>
+    </dgm:pt>
+    <dgm:pt modelId="{34A9B0FA-BD48-4F0E-9F58-CF87FE63D4EF}" type="pres">
+      <dgm:prSet presAssocID="{548EAECB-3BD3-4E62-B006-C14E39111C1F}" presName="Name13" presStyleLbl="parChTrans1D2" presStyleIdx="4" presStyleCnt="6"/>
+      <dgm:spPr/>
+    </dgm:pt>
+    <dgm:pt modelId="{585D2916-80BC-491B-9C04-70D865CBF33A}" type="pres">
+      <dgm:prSet presAssocID="{ABD7B137-6AE2-41FF-9FCC-C6ABE75B89F1}" presName="childText" presStyleLbl="bgAcc1" presStyleIdx="4" presStyleCnt="6">
+        <dgm:presLayoutVars>
+          <dgm:bulletEnabled val="1"/>
+        </dgm:presLayoutVars>
+      </dgm:prSet>
+      <dgm:spPr/>
+    </dgm:pt>
+    <dgm:pt modelId="{3AB641FA-F7A0-4564-AD9C-8824B81219B4}" type="pres">
+      <dgm:prSet presAssocID="{2B656D2E-4063-4157-BE99-B4EE541A3D2A}" presName="Name13" presStyleLbl="parChTrans1D2" presStyleIdx="5" presStyleCnt="6"/>
+      <dgm:spPr/>
+    </dgm:pt>
+    <dgm:pt modelId="{DB320430-CCCF-4F4E-A6BA-984D169FE04C}" type="pres">
+      <dgm:prSet presAssocID="{0CA1BD56-5757-4DFB-A93E-8B3F27A46AFF}" presName="childText" presStyleLbl="bgAcc1" presStyleIdx="5" presStyleCnt="6">
+        <dgm:presLayoutVars>
+          <dgm:bulletEnabled val="1"/>
+        </dgm:presLayoutVars>
+      </dgm:prSet>
+      <dgm:spPr/>
+    </dgm:pt>
+  </dgm:ptLst>
+  <dgm:cxnLst>
+    <dgm:cxn modelId="{B51E0907-9141-43F6-B359-F559B77F2C97}" type="presOf" srcId="{05BC743C-B91F-4184-80BF-86CAF5885E43}" destId="{8578CFEC-ADE1-4DA5-AAAD-FEF6080D456A}" srcOrd="0" destOrd="0" presId="urn:microsoft.com/office/officeart/2005/8/layout/hierarchy3"/>
+    <dgm:cxn modelId="{8FBC7708-AB9D-46CA-A4D1-FE904D05C5CD}" type="presOf" srcId="{9C9F58FB-5697-405E-9C1F-8A04D9607770}" destId="{D8A260C7-740A-4931-8CD2-78F6D7ED64AD}" srcOrd="0" destOrd="0" presId="urn:microsoft.com/office/officeart/2005/8/layout/hierarchy3"/>
+    <dgm:cxn modelId="{097B900C-6CB9-4932-990E-F76FF0A4632F}" type="presOf" srcId="{2B656D2E-4063-4157-BE99-B4EE541A3D2A}" destId="{3AB641FA-F7A0-4564-AD9C-8824B81219B4}" srcOrd="0" destOrd="0" presId="urn:microsoft.com/office/officeart/2005/8/layout/hierarchy3"/>
+    <dgm:cxn modelId="{80897714-D95D-446F-887D-955909C19858}" type="presOf" srcId="{B10CBD63-8FBC-4B07-B7D8-4244CFFA1B55}" destId="{DDE4C3A0-D396-4FFE-8179-9BFB4A3F0423}" srcOrd="0" destOrd="0" presId="urn:microsoft.com/office/officeart/2005/8/layout/hierarchy3"/>
+    <dgm:cxn modelId="{43976F17-46F9-422B-8D54-7B018DCFCC0B}" type="presOf" srcId="{8213B124-5091-423C-A0FE-D3EC81063DF0}" destId="{5939F7DC-802B-45EE-85FE-3BA6D22A3EA3}" srcOrd="1" destOrd="0" presId="urn:microsoft.com/office/officeart/2005/8/layout/hierarchy3"/>
+    <dgm:cxn modelId="{57B92F21-15C2-4741-80F5-D25035ACFAEF}" type="presOf" srcId="{09444A8A-09BB-4B36-A755-D2FBF8F28052}" destId="{713CEBAF-A1E8-4963-AD04-54DA32F2EB8B}" srcOrd="0" destOrd="0" presId="urn:microsoft.com/office/officeart/2005/8/layout/hierarchy3"/>
+    <dgm:cxn modelId="{49746133-39E8-4CC4-A061-AF68AC6A2A71}" type="presOf" srcId="{0CA1BD56-5757-4DFB-A93E-8B3F27A46AFF}" destId="{DB320430-CCCF-4F4E-A6BA-984D169FE04C}" srcOrd="0" destOrd="0" presId="urn:microsoft.com/office/officeart/2005/8/layout/hierarchy3"/>
+    <dgm:cxn modelId="{640C6C34-63BF-4B18-BB4D-688E28B8DAFF}" srcId="{9C9F58FB-5697-405E-9C1F-8A04D9607770}" destId="{7125609E-8844-4DFB-9DD6-79F0D7E8DDE1}" srcOrd="1" destOrd="0" parTransId="{A7FA202B-60BD-4995-BC4D-1E10D31E64E5}" sibTransId="{34F52B03-4457-4CE1-80F9-C1FDDD11E60B}"/>
+    <dgm:cxn modelId="{D60B9537-CFCA-462D-B9B3-A9935E2D360E}" type="presOf" srcId="{A7FA202B-60BD-4995-BC4D-1E10D31E64E5}" destId="{72587B53-35F5-4B0B-A2E1-C345D8CAC5B0}" srcOrd="0" destOrd="0" presId="urn:microsoft.com/office/officeart/2005/8/layout/hierarchy3"/>
+    <dgm:cxn modelId="{9C66C138-8240-4D5A-AB42-E9287AB18D5C}" srcId="{B10CBD63-8FBC-4B07-B7D8-4244CFFA1B55}" destId="{9C9F58FB-5697-405E-9C1F-8A04D9607770}" srcOrd="0" destOrd="0" parTransId="{02928794-9FCB-4C75-A065-FEB1150AC032}" sibTransId="{9ABF4C64-CCBA-4B90-8DDD-922C7A8E258E}"/>
+    <dgm:cxn modelId="{5D6D5745-124D-429B-BC93-C60F7D2E41CF}" srcId="{D11AA0BA-5F27-4299-970F-77D874E9D576}" destId="{71CC35C6-0FB7-48F9-ACFF-A3DBC9F79965}" srcOrd="0" destOrd="0" parTransId="{09444A8A-09BB-4B36-A755-D2FBF8F28052}" sibTransId="{009492FA-3F1E-4AFC-A68E-4009C53F0E87}"/>
+    <dgm:cxn modelId="{19DACE46-64AD-4407-9203-F0190A73BE67}" srcId="{9C9F58FB-5697-405E-9C1F-8A04D9607770}" destId="{DA818917-02F2-433E-9EB9-CFD59262B33B}" srcOrd="0" destOrd="0" parTransId="{05BC743C-B91F-4184-80BF-86CAF5885E43}" sibTransId="{D3824007-3212-4002-A694-3FAD4C004EFA}"/>
+    <dgm:cxn modelId="{9E3EBF48-D481-4519-A31B-6BA8BCC546FD}" srcId="{8213B124-5091-423C-A0FE-D3EC81063DF0}" destId="{0CA1BD56-5757-4DFB-A93E-8B3F27A46AFF}" srcOrd="1" destOrd="0" parTransId="{2B656D2E-4063-4157-BE99-B4EE541A3D2A}" sibTransId="{2BBE6512-ECA7-460C-BC53-D7A8F7C037D5}"/>
+    <dgm:cxn modelId="{DC937B69-74A3-4975-A905-6549E1250A1B}" type="presOf" srcId="{7125609E-8844-4DFB-9DD6-79F0D7E8DDE1}" destId="{B40365CC-4AC8-4766-A430-7EC391CFE5BE}" srcOrd="0" destOrd="0" presId="urn:microsoft.com/office/officeart/2005/8/layout/hierarchy3"/>
+    <dgm:cxn modelId="{25CD694A-B558-45F0-9FC5-99DF8D837772}" type="presOf" srcId="{ABD7B137-6AE2-41FF-9FCC-C6ABE75B89F1}" destId="{585D2916-80BC-491B-9C04-70D865CBF33A}" srcOrd="0" destOrd="0" presId="urn:microsoft.com/office/officeart/2005/8/layout/hierarchy3"/>
+    <dgm:cxn modelId="{8394D24F-3C54-4B42-8082-5E6F1D343732}" type="presOf" srcId="{DA818917-02F2-433E-9EB9-CFD59262B33B}" destId="{7334F9D4-9292-4317-8977-381D95682519}" srcOrd="0" destOrd="0" presId="urn:microsoft.com/office/officeart/2005/8/layout/hierarchy3"/>
+    <dgm:cxn modelId="{D76C8455-68EC-4BCA-9D8C-E6BA41AC4EAA}" type="presOf" srcId="{D11AA0BA-5F27-4299-970F-77D874E9D576}" destId="{64BFFB1E-AA69-4EAC-BD29-B952BAD0B3A9}" srcOrd="1" destOrd="0" presId="urn:microsoft.com/office/officeart/2005/8/layout/hierarchy3"/>
+    <dgm:cxn modelId="{F651AB7D-7059-4B2E-847F-7594B630650B}" type="presOf" srcId="{71CC35C6-0FB7-48F9-ACFF-A3DBC9F79965}" destId="{1B8667FB-337D-49EF-A785-46B38D8F4B9E}" srcOrd="0" destOrd="0" presId="urn:microsoft.com/office/officeart/2005/8/layout/hierarchy3"/>
+    <dgm:cxn modelId="{5E676AA6-ABE7-4E91-A650-4A4A38A3959C}" type="presOf" srcId="{548EAECB-3BD3-4E62-B006-C14E39111C1F}" destId="{34A9B0FA-BD48-4F0E-9F58-CF87FE63D4EF}" srcOrd="0" destOrd="0" presId="urn:microsoft.com/office/officeart/2005/8/layout/hierarchy3"/>
+    <dgm:cxn modelId="{4E2576AA-4D17-49EE-952D-59E7510EA741}" type="presOf" srcId="{8213B124-5091-423C-A0FE-D3EC81063DF0}" destId="{FD70A21F-0E54-4D13-924C-10305F0E168C}" srcOrd="0" destOrd="0" presId="urn:microsoft.com/office/officeart/2005/8/layout/hierarchy3"/>
+    <dgm:cxn modelId="{008C42B1-C2CA-42FC-B12A-88AE692E1218}" type="presOf" srcId="{D11AA0BA-5F27-4299-970F-77D874E9D576}" destId="{D1E5B0C2-D8E0-46CE-B11A-7E487BA21377}" srcOrd="0" destOrd="0" presId="urn:microsoft.com/office/officeart/2005/8/layout/hierarchy3"/>
+    <dgm:cxn modelId="{86DD78BE-3045-4F6A-896F-F55BA6C1F20F}" srcId="{8213B124-5091-423C-A0FE-D3EC81063DF0}" destId="{ABD7B137-6AE2-41FF-9FCC-C6ABE75B89F1}" srcOrd="0" destOrd="0" parTransId="{548EAECB-3BD3-4E62-B006-C14E39111C1F}" sibTransId="{FC064957-EC65-4EE5-A950-16F66546D6C2}"/>
+    <dgm:cxn modelId="{01E17DC0-868B-4492-A55C-6F2EF1B37EAB}" srcId="{B10CBD63-8FBC-4B07-B7D8-4244CFFA1B55}" destId="{D11AA0BA-5F27-4299-970F-77D874E9D576}" srcOrd="1" destOrd="0" parTransId="{F749A40C-06D9-4BB3-B0F2-312735A6CB59}" sibTransId="{45B00693-8FD4-48A4-86EC-ADF10B75B442}"/>
+    <dgm:cxn modelId="{DEE868C1-16C6-4EF2-90DF-9DC84DDC1A9E}" type="presOf" srcId="{9C9F58FB-5697-405E-9C1F-8A04D9607770}" destId="{0BD55F58-8545-4591-9962-579D5AC8A0EE}" srcOrd="1" destOrd="0" presId="urn:microsoft.com/office/officeart/2005/8/layout/hierarchy3"/>
+    <dgm:cxn modelId="{7C4F24C6-941A-4AFC-900F-AF2DA1E652F5}" type="presOf" srcId="{B8CEF231-6CE4-405A-91C4-A721F3961CE2}" destId="{7407D5C2-B86B-4576-BCA3-B0E4FB850A92}" srcOrd="0" destOrd="0" presId="urn:microsoft.com/office/officeart/2005/8/layout/hierarchy3"/>
+    <dgm:cxn modelId="{E801F5CF-D2BF-465E-AF22-187201815394}" type="presOf" srcId="{3D0A5C7C-25D7-401C-BE27-7C05942C3CC6}" destId="{B65F1D1F-AB85-445D-BE32-1F7266314353}" srcOrd="0" destOrd="0" presId="urn:microsoft.com/office/officeart/2005/8/layout/hierarchy3"/>
+    <dgm:cxn modelId="{7A5DE8ED-9C66-4311-B634-30CCA2029BBD}" srcId="{B10CBD63-8FBC-4B07-B7D8-4244CFFA1B55}" destId="{8213B124-5091-423C-A0FE-D3EC81063DF0}" srcOrd="2" destOrd="0" parTransId="{EBF656CB-E5D3-40D4-883C-2BA562A9B34C}" sibTransId="{6E5E95C6-C8E2-42E2-88D0-801AEF9F7812}"/>
+    <dgm:cxn modelId="{84AF3DF3-A975-4F98-867C-E62A81CDEEA9}" srcId="{D11AA0BA-5F27-4299-970F-77D874E9D576}" destId="{B8CEF231-6CE4-405A-91C4-A721F3961CE2}" srcOrd="1" destOrd="0" parTransId="{3D0A5C7C-25D7-401C-BE27-7C05942C3CC6}" sibTransId="{3FDF1E87-3E9A-4DE6-88B1-C54F75E7780B}"/>
+    <dgm:cxn modelId="{53E4BA30-6484-4013-8E0C-BE5AD38CA9CC}" type="presParOf" srcId="{DDE4C3A0-D396-4FFE-8179-9BFB4A3F0423}" destId="{710CF8E6-66B7-4B03-A417-31FF1ED69017}" srcOrd="0" destOrd="0" presId="urn:microsoft.com/office/officeart/2005/8/layout/hierarchy3"/>
+    <dgm:cxn modelId="{55B83667-2727-433E-AB52-EDAA0D9828B7}" type="presParOf" srcId="{710CF8E6-66B7-4B03-A417-31FF1ED69017}" destId="{ED97D5B5-6A08-4A28-B637-3870E8D9F683}" srcOrd="0" destOrd="0" presId="urn:microsoft.com/office/officeart/2005/8/layout/hierarchy3"/>
+    <dgm:cxn modelId="{79B58115-2E56-4143-8B7C-E5F991A5570A}" type="presParOf" srcId="{ED97D5B5-6A08-4A28-B637-3870E8D9F683}" destId="{D8A260C7-740A-4931-8CD2-78F6D7ED64AD}" srcOrd="0" destOrd="0" presId="urn:microsoft.com/office/officeart/2005/8/layout/hierarchy3"/>
+    <dgm:cxn modelId="{CAC70DE9-A28C-42B6-8001-D61851FFBFD5}" type="presParOf" srcId="{ED97D5B5-6A08-4A28-B637-3870E8D9F683}" destId="{0BD55F58-8545-4591-9962-579D5AC8A0EE}" srcOrd="1" destOrd="0" presId="urn:microsoft.com/office/officeart/2005/8/layout/hierarchy3"/>
+    <dgm:cxn modelId="{CE620F69-5FAB-4A5B-B994-F1ADCBB04B03}" type="presParOf" srcId="{710CF8E6-66B7-4B03-A417-31FF1ED69017}" destId="{57795413-E6C5-4CD7-934F-6905D86A4FDB}" srcOrd="1" destOrd="0" presId="urn:microsoft.com/office/officeart/2005/8/layout/hierarchy3"/>
+    <dgm:cxn modelId="{ECF0F5B2-D321-479A-AEB7-0E1280F10D34}" type="presParOf" srcId="{57795413-E6C5-4CD7-934F-6905D86A4FDB}" destId="{8578CFEC-ADE1-4DA5-AAAD-FEF6080D456A}" srcOrd="0" destOrd="0" presId="urn:microsoft.com/office/officeart/2005/8/layout/hierarchy3"/>
+    <dgm:cxn modelId="{DB6CB3DD-125D-4E29-B5BD-31F663FB9DA9}" type="presParOf" srcId="{57795413-E6C5-4CD7-934F-6905D86A4FDB}" destId="{7334F9D4-9292-4317-8977-381D95682519}" srcOrd="1" destOrd="0" presId="urn:microsoft.com/office/officeart/2005/8/layout/hierarchy3"/>
+    <dgm:cxn modelId="{4B0D8E5C-1C91-4273-A64D-2352C23F2171}" type="presParOf" srcId="{57795413-E6C5-4CD7-934F-6905D86A4FDB}" destId="{72587B53-35F5-4B0B-A2E1-C345D8CAC5B0}" srcOrd="2" destOrd="0" presId="urn:microsoft.com/office/officeart/2005/8/layout/hierarchy3"/>
+    <dgm:cxn modelId="{1C54A77C-CA58-4DEA-87C3-583959127461}" type="presParOf" srcId="{57795413-E6C5-4CD7-934F-6905D86A4FDB}" destId="{B40365CC-4AC8-4766-A430-7EC391CFE5BE}" srcOrd="3" destOrd="0" presId="urn:microsoft.com/office/officeart/2005/8/layout/hierarchy3"/>
+    <dgm:cxn modelId="{FD0DFAEC-48E5-42DD-800F-A96EA8827A32}" type="presParOf" srcId="{DDE4C3A0-D396-4FFE-8179-9BFB4A3F0423}" destId="{77D63D2A-A62E-4E9B-A69C-4E769EB58B60}" srcOrd="1" destOrd="0" presId="urn:microsoft.com/office/officeart/2005/8/layout/hierarchy3"/>
+    <dgm:cxn modelId="{360A1716-943A-4C5B-99FE-795F2A2DCAAE}" type="presParOf" srcId="{77D63D2A-A62E-4E9B-A69C-4E769EB58B60}" destId="{89761107-8C08-40AB-96DF-201EAA9E024A}" srcOrd="0" destOrd="0" presId="urn:microsoft.com/office/officeart/2005/8/layout/hierarchy3"/>
+    <dgm:cxn modelId="{939C1F86-5ED1-40AF-AC15-FE8AE3E05985}" type="presParOf" srcId="{89761107-8C08-40AB-96DF-201EAA9E024A}" destId="{D1E5B0C2-D8E0-46CE-B11A-7E487BA21377}" srcOrd="0" destOrd="0" presId="urn:microsoft.com/office/officeart/2005/8/layout/hierarchy3"/>
+    <dgm:cxn modelId="{C871DC76-BA53-419D-8531-820BACD3A63D}" type="presParOf" srcId="{89761107-8C08-40AB-96DF-201EAA9E024A}" destId="{64BFFB1E-AA69-4EAC-BD29-B952BAD0B3A9}" srcOrd="1" destOrd="0" presId="urn:microsoft.com/office/officeart/2005/8/layout/hierarchy3"/>
+    <dgm:cxn modelId="{9992B388-A04A-4528-AE3B-D74A8F8D3117}" type="presParOf" srcId="{77D63D2A-A62E-4E9B-A69C-4E769EB58B60}" destId="{CC09882E-0371-4905-85E4-A1B4AD964351}" srcOrd="1" destOrd="0" presId="urn:microsoft.com/office/officeart/2005/8/layout/hierarchy3"/>
+    <dgm:cxn modelId="{652249BF-1E78-4709-AB0D-A9FED91BCD94}" type="presParOf" srcId="{CC09882E-0371-4905-85E4-A1B4AD964351}" destId="{713CEBAF-A1E8-4963-AD04-54DA32F2EB8B}" srcOrd="0" destOrd="0" presId="urn:microsoft.com/office/officeart/2005/8/layout/hierarchy3"/>
+    <dgm:cxn modelId="{A1861D0F-E611-4BB6-AEB4-A8B3B99BEE04}" type="presParOf" srcId="{CC09882E-0371-4905-85E4-A1B4AD964351}" destId="{1B8667FB-337D-49EF-A785-46B38D8F4B9E}" srcOrd="1" destOrd="0" presId="urn:microsoft.com/office/officeart/2005/8/layout/hierarchy3"/>
+    <dgm:cxn modelId="{F8A753EB-C9E6-4583-9BE2-6CAC8411AE3D}" type="presParOf" srcId="{CC09882E-0371-4905-85E4-A1B4AD964351}" destId="{B65F1D1F-AB85-445D-BE32-1F7266314353}" srcOrd="2" destOrd="0" presId="urn:microsoft.com/office/officeart/2005/8/layout/hierarchy3"/>
+    <dgm:cxn modelId="{EB93488D-C6A0-4C2D-B727-F9989DCDE5AC}" type="presParOf" srcId="{CC09882E-0371-4905-85E4-A1B4AD964351}" destId="{7407D5C2-B86B-4576-BCA3-B0E4FB850A92}" srcOrd="3" destOrd="0" presId="urn:microsoft.com/office/officeart/2005/8/layout/hierarchy3"/>
+    <dgm:cxn modelId="{418FEFDA-B035-4006-829B-25BB7D1FC354}" type="presParOf" srcId="{DDE4C3A0-D396-4FFE-8179-9BFB4A3F0423}" destId="{84275F07-5AFB-4C05-A1EB-E4BBCC9A11A4}" srcOrd="2" destOrd="0" presId="urn:microsoft.com/office/officeart/2005/8/layout/hierarchy3"/>
+    <dgm:cxn modelId="{76EFCFA3-B1A9-4592-B643-C0B55B5DEBD5}" type="presParOf" srcId="{84275F07-5AFB-4C05-A1EB-E4BBCC9A11A4}" destId="{744D72DA-2032-4754-9B4C-EBC08D9E908B}" srcOrd="0" destOrd="0" presId="urn:microsoft.com/office/officeart/2005/8/layout/hierarchy3"/>
+    <dgm:cxn modelId="{17831EDB-E745-4CF1-99EA-EEF1B1C9EE65}" type="presParOf" srcId="{744D72DA-2032-4754-9B4C-EBC08D9E908B}" destId="{FD70A21F-0E54-4D13-924C-10305F0E168C}" srcOrd="0" destOrd="0" presId="urn:microsoft.com/office/officeart/2005/8/layout/hierarchy3"/>
+    <dgm:cxn modelId="{FE5302BD-CAF3-42E0-AFFB-10EADAB8174D}" type="presParOf" srcId="{744D72DA-2032-4754-9B4C-EBC08D9E908B}" destId="{5939F7DC-802B-45EE-85FE-3BA6D22A3EA3}" srcOrd="1" destOrd="0" presId="urn:microsoft.com/office/officeart/2005/8/layout/hierarchy3"/>
+    <dgm:cxn modelId="{D2FEA587-C18C-4C0E-B51E-20507D7AA09A}" type="presParOf" srcId="{84275F07-5AFB-4C05-A1EB-E4BBCC9A11A4}" destId="{96CFAEFD-5B3D-417D-BA0F-CA0492976128}" srcOrd="1" destOrd="0" presId="urn:microsoft.com/office/officeart/2005/8/layout/hierarchy3"/>
+    <dgm:cxn modelId="{F79DCAAB-3213-4031-9565-EAC24CC292D6}" type="presParOf" srcId="{96CFAEFD-5B3D-417D-BA0F-CA0492976128}" destId="{34A9B0FA-BD48-4F0E-9F58-CF87FE63D4EF}" srcOrd="0" destOrd="0" presId="urn:microsoft.com/office/officeart/2005/8/layout/hierarchy3"/>
+    <dgm:cxn modelId="{C76A913C-19EC-4441-8678-7BBB6F47D75A}" type="presParOf" srcId="{96CFAEFD-5B3D-417D-BA0F-CA0492976128}" destId="{585D2916-80BC-491B-9C04-70D865CBF33A}" srcOrd="1" destOrd="0" presId="urn:microsoft.com/office/officeart/2005/8/layout/hierarchy3"/>
+    <dgm:cxn modelId="{B92D427C-85A6-41F9-AA89-2D4F92AAC9ED}" type="presParOf" srcId="{96CFAEFD-5B3D-417D-BA0F-CA0492976128}" destId="{3AB641FA-F7A0-4564-AD9C-8824B81219B4}" srcOrd="2" destOrd="0" presId="urn:microsoft.com/office/officeart/2005/8/layout/hierarchy3"/>
+    <dgm:cxn modelId="{D3AC6A81-A288-4332-AB85-F9D6D03F6E96}" type="presParOf" srcId="{96CFAEFD-5B3D-417D-BA0F-CA0492976128}" destId="{DB320430-CCCF-4F4E-A6BA-984D169FE04C}" srcOrd="3" destOrd="0" presId="urn:microsoft.com/office/officeart/2005/8/layout/hierarchy3"/>
+  </dgm:cxnLst>
+  <dgm:bg/>
+  <dgm:whole/>
+  <dgm:extLst>
+    <a:ext uri="http://schemas.microsoft.com/office/drawing/2008/diagram">
+      <dsp:dataModelExt xmlns:dsp="http://schemas.microsoft.com/office/drawing/2008/diagram" relId="rId6" minVer="http://schemas.openxmlformats.org/drawingml/2006/diagram"/>
+    </a:ext>
+  </dgm:extLst>
+</dgm:dataModel>
+</file>
+
+<file path=ppt/diagrams/drawing1.xml><?xml version="1.0" encoding="utf-8"?>
+<dsp:drawing xmlns:dgm="http://schemas.openxmlformats.org/drawingml/2006/diagram" xmlns:dsp="http://schemas.microsoft.com/office/drawing/2008/diagram" xmlns:a="http://schemas.openxmlformats.org/drawingml/2006/main">
+  <dsp:spTree>
+    <dsp:nvGrpSpPr>
+      <dsp:cNvPr id="0" name=""/>
+      <dsp:cNvGrpSpPr/>
+    </dsp:nvGrpSpPr>
+    <dsp:grpSpPr/>
+    <dsp:sp modelId="{D8A260C7-740A-4931-8CD2-78F6D7ED64AD}">
+      <dsp:nvSpPr>
+        <dsp:cNvPr id="0" name=""/>
+        <dsp:cNvSpPr/>
+      </dsp:nvSpPr>
+      <dsp:spPr>
+        <a:xfrm>
+          <a:off x="419759" y="1099"/>
+          <a:ext cx="2216328" cy="1108164"/>
+        </a:xfrm>
+        <a:prstGeom prst="roundRect">
+          <a:avLst>
+            <a:gd name="adj" fmla="val 10000"/>
+          </a:avLst>
+        </a:prstGeom>
+        <a:gradFill rotWithShape="0">
+          <a:gsLst>
+            <a:gs pos="0">
+              <a:schemeClr val="accent3">
+                <a:hueOff val="0"/>
+                <a:satOff val="0"/>
+                <a:lumOff val="0"/>
+                <a:alphaOff val="0"/>
+                <a:tint val="96000"/>
+                <a:lumMod val="100000"/>
+              </a:schemeClr>
+            </a:gs>
+            <a:gs pos="78000">
+              <a:schemeClr val="accent3">
+                <a:hueOff val="0"/>
+                <a:satOff val="0"/>
+                <a:lumOff val="0"/>
+                <a:alphaOff val="0"/>
+                <a:shade val="94000"/>
+                <a:lumMod val="94000"/>
+              </a:schemeClr>
+            </a:gs>
+          </a:gsLst>
+          <a:lin ang="5400000" scaled="0"/>
+        </a:gradFill>
+        <a:ln>
+          <a:noFill/>
+        </a:ln>
+        <a:effectLst>
+          <a:outerShdw blurRad="38100" dist="25400" dir="5400000" rotWithShape="0">
+            <a:srgbClr val="000000">
+              <a:alpha val="35000"/>
+            </a:srgbClr>
+          </a:outerShdw>
+        </a:effectLst>
+        <a:scene3d>
+          <a:camera prst="orthographicFront"/>
+          <a:lightRig rig="threePt" dir="t">
+            <a:rot lat="0" lon="0" rev="7500000"/>
+          </a:lightRig>
+        </a:scene3d>
+        <a:sp3d prstMaterial="plastic">
+          <a:bevelT w="127000" h="25400" prst="relaxedInset"/>
+        </a:sp3d>
+      </dsp:spPr>
+      <dsp:style>
+        <a:lnRef idx="0">
+          <a:scrgbClr r="0" g="0" b="0"/>
+        </a:lnRef>
+        <a:fillRef idx="3">
+          <a:scrgbClr r="0" g="0" b="0"/>
+        </a:fillRef>
+        <a:effectRef idx="2">
+          <a:scrgbClr r="0" g="0" b="0"/>
+        </a:effectRef>
+        <a:fontRef idx="minor">
+          <a:schemeClr val="lt1"/>
+        </a:fontRef>
+      </dsp:style>
+      <dsp:txBody>
+        <a:bodyPr spcFirstLastPara="0" vert="horz" wrap="square" lIns="66675" tIns="44450" rIns="66675" bIns="44450" numCol="1" spcCol="1270" anchor="ctr" anchorCtr="0">
+          <a:noAutofit/>
+        </a:bodyPr>
+        <a:lstStyle/>
+        <a:p>
+          <a:pPr marL="0" lvl="0" indent="0" algn="ctr" defTabSz="1555750">
+            <a:lnSpc>
+              <a:spcPct val="90000"/>
+            </a:lnSpc>
+            <a:spcBef>
+              <a:spcPct val="0"/>
+            </a:spcBef>
+            <a:spcAft>
+              <a:spcPct val="35000"/>
+            </a:spcAft>
+            <a:buNone/>
+          </a:pPr>
+          <a:r>
+            <a:rPr lang="en-US" sz="3500" kern="1200"/>
+            <a:t>Day One</a:t>
+          </a:r>
+        </a:p>
+      </dsp:txBody>
+      <dsp:txXfrm>
+        <a:off x="452216" y="33556"/>
+        <a:ext cx="2151414" cy="1043250"/>
+      </dsp:txXfrm>
+    </dsp:sp>
+    <dsp:sp modelId="{8578CFEC-ADE1-4DA5-AAAD-FEF6080D456A}">
+      <dsp:nvSpPr>
+        <dsp:cNvPr id="0" name=""/>
+        <dsp:cNvSpPr/>
+      </dsp:nvSpPr>
+      <dsp:spPr>
+        <a:xfrm>
+          <a:off x="641392" y="1109263"/>
+          <a:ext cx="221632" cy="831123"/>
+        </a:xfrm>
+        <a:custGeom>
+          <a:avLst/>
+          <a:gdLst/>
+          <a:ahLst/>
+          <a:cxnLst/>
+          <a:rect l="0" t="0" r="0" b="0"/>
+          <a:pathLst>
+            <a:path>
+              <a:moveTo>
+                <a:pt x="0" y="0"/>
+              </a:moveTo>
+              <a:lnTo>
+                <a:pt x="0" y="831123"/>
+              </a:lnTo>
+              <a:lnTo>
+                <a:pt x="221632" y="831123"/>
+              </a:lnTo>
+            </a:path>
+          </a:pathLst>
+        </a:custGeom>
+        <a:noFill/>
+        <a:ln w="19050" cap="rnd" cmpd="sng" algn="ctr">
+          <a:solidFill>
+            <a:schemeClr val="accent4">
+              <a:hueOff val="0"/>
+              <a:satOff val="0"/>
+              <a:lumOff val="0"/>
+              <a:alphaOff val="0"/>
+            </a:schemeClr>
+          </a:solidFill>
+          <a:prstDash val="solid"/>
+        </a:ln>
+        <a:effectLst/>
+        <a:scene3d>
+          <a:camera prst="orthographicFront"/>
+          <a:lightRig rig="threePt" dir="t">
+            <a:rot lat="0" lon="0" rev="7500000"/>
+          </a:lightRig>
+        </a:scene3d>
+        <a:sp3d z="-40000" prstMaterial="matte"/>
+      </dsp:spPr>
+      <dsp:style>
+        <a:lnRef idx="2">
+          <a:scrgbClr r="0" g="0" b="0"/>
+        </a:lnRef>
+        <a:fillRef idx="0">
+          <a:scrgbClr r="0" g="0" b="0"/>
+        </a:fillRef>
+        <a:effectRef idx="0">
+          <a:scrgbClr r="0" g="0" b="0"/>
+        </a:effectRef>
+        <a:fontRef idx="minor"/>
+      </dsp:style>
+    </dsp:sp>
+    <dsp:sp modelId="{7334F9D4-9292-4317-8977-381D95682519}">
+      <dsp:nvSpPr>
+        <dsp:cNvPr id="0" name=""/>
+        <dsp:cNvSpPr/>
+      </dsp:nvSpPr>
+      <dsp:spPr>
+        <a:xfrm>
+          <a:off x="863024" y="1386304"/>
+          <a:ext cx="1773062" cy="1108164"/>
+        </a:xfrm>
+        <a:prstGeom prst="roundRect">
+          <a:avLst>
+            <a:gd name="adj" fmla="val 10000"/>
+          </a:avLst>
+        </a:prstGeom>
+        <a:solidFill>
+          <a:schemeClr val="lt1">
+            <a:alpha val="90000"/>
+            <a:hueOff val="0"/>
+            <a:satOff val="0"/>
+            <a:lumOff val="0"/>
+            <a:alphaOff val="0"/>
+          </a:schemeClr>
+        </a:solidFill>
+        <a:ln w="12700" cap="rnd" cmpd="sng" algn="ctr">
+          <a:solidFill>
+            <a:schemeClr val="accent3">
+              <a:hueOff val="0"/>
+              <a:satOff val="0"/>
+              <a:lumOff val="0"/>
+              <a:alphaOff val="0"/>
+            </a:schemeClr>
+          </a:solidFill>
+          <a:prstDash val="solid"/>
+        </a:ln>
+        <a:effectLst/>
+        <a:scene3d>
+          <a:camera prst="orthographicFront"/>
+          <a:lightRig rig="threePt" dir="t">
+            <a:rot lat="0" lon="0" rev="7500000"/>
+          </a:lightRig>
+        </a:scene3d>
+        <a:sp3d z="-152400" extrusionH="63500" prstMaterial="dkEdge">
+          <a:bevelT w="124450" h="16350" prst="relaxedInset"/>
+          <a:contourClr>
+            <a:schemeClr val="bg1"/>
+          </a:contourClr>
+        </a:sp3d>
+      </dsp:spPr>
+      <dsp:style>
+        <a:lnRef idx="1">
+          <a:scrgbClr r="0" g="0" b="0"/>
+        </a:lnRef>
+        <a:fillRef idx="1">
+          <a:scrgbClr r="0" g="0" b="0"/>
+        </a:fillRef>
+        <a:effectRef idx="0">
+          <a:scrgbClr r="0" g="0" b="0"/>
+        </a:effectRef>
+        <a:fontRef idx="minor"/>
+      </dsp:style>
+      <dsp:txBody>
+        <a:bodyPr spcFirstLastPara="0" vert="horz" wrap="square" lIns="45720" tIns="30480" rIns="45720" bIns="30480" numCol="1" spcCol="1270" anchor="ctr" anchorCtr="0">
+          <a:noAutofit/>
+        </a:bodyPr>
+        <a:lstStyle/>
+        <a:p>
+          <a:pPr marL="0" lvl="0" indent="0" algn="ctr" defTabSz="1066800">
+            <a:lnSpc>
+              <a:spcPct val="90000"/>
+            </a:lnSpc>
+            <a:spcBef>
+              <a:spcPct val="0"/>
+            </a:spcBef>
+            <a:spcAft>
+              <a:spcPct val="35000"/>
+            </a:spcAft>
+            <a:buNone/>
+          </a:pPr>
+          <a:r>
+            <a:rPr lang="en-US" sz="2400" kern="1200"/>
+            <a:t>Maya Ruiz</a:t>
+          </a:r>
+        </a:p>
+      </dsp:txBody>
+      <dsp:txXfrm>
+        <a:off x="895481" y="1418761"/>
+        <a:ext cx="1708148" cy="1043250"/>
+      </dsp:txXfrm>
+    </dsp:sp>
+    <dsp:sp modelId="{72587B53-35F5-4B0B-A2E1-C345D8CAC5B0}">
+      <dsp:nvSpPr>
+        <dsp:cNvPr id="0" name=""/>
+        <dsp:cNvSpPr/>
+      </dsp:nvSpPr>
+      <dsp:spPr>
+        <a:xfrm>
+          <a:off x="641392" y="1109263"/>
+          <a:ext cx="221632" cy="2216328"/>
+        </a:xfrm>
+        <a:custGeom>
+          <a:avLst/>
+          <a:gdLst/>
+          <a:ahLst/>
+          <a:cxnLst/>
+          <a:rect l="0" t="0" r="0" b="0"/>
+          <a:pathLst>
+            <a:path>
+              <a:moveTo>
+                <a:pt x="0" y="0"/>
+              </a:moveTo>
+              <a:lnTo>
+                <a:pt x="0" y="2216328"/>
+              </a:lnTo>
+              <a:lnTo>
+                <a:pt x="221632" y="2216328"/>
+              </a:lnTo>
+            </a:path>
+          </a:pathLst>
+        </a:custGeom>
+        <a:noFill/>
+        <a:ln w="19050" cap="rnd" cmpd="sng" algn="ctr">
+          <a:solidFill>
+            <a:schemeClr val="accent4">
+              <a:hueOff val="0"/>
+              <a:satOff val="0"/>
+              <a:lumOff val="0"/>
+              <a:alphaOff val="0"/>
+            </a:schemeClr>
+          </a:solidFill>
+          <a:prstDash val="solid"/>
+        </a:ln>
+        <a:effectLst/>
+        <a:scene3d>
+          <a:camera prst="orthographicFront"/>
+          <a:lightRig rig="threePt" dir="t">
+            <a:rot lat="0" lon="0" rev="7500000"/>
+          </a:lightRig>
+        </a:scene3d>
+        <a:sp3d z="-40000" prstMaterial="matte"/>
+      </dsp:spPr>
+      <dsp:style>
+        <a:lnRef idx="2">
+          <a:scrgbClr r="0" g="0" b="0"/>
+        </a:lnRef>
+        <a:fillRef idx="0">
+          <a:scrgbClr r="0" g="0" b="0"/>
+        </a:fillRef>
+        <a:effectRef idx="0">
+          <a:scrgbClr r="0" g="0" b="0"/>
+        </a:effectRef>
+        <a:fontRef idx="minor"/>
+      </dsp:style>
+    </dsp:sp>
+    <dsp:sp modelId="{B40365CC-4AC8-4766-A430-7EC391CFE5BE}">
+      <dsp:nvSpPr>
+        <dsp:cNvPr id="0" name=""/>
+        <dsp:cNvSpPr/>
+      </dsp:nvSpPr>
+      <dsp:spPr>
+        <a:xfrm>
+          <a:off x="863024" y="2771509"/>
+          <a:ext cx="1773062" cy="1108164"/>
+        </a:xfrm>
+        <a:prstGeom prst="roundRect">
+          <a:avLst>
+            <a:gd name="adj" fmla="val 10000"/>
+          </a:avLst>
+        </a:prstGeom>
+        <a:solidFill>
+          <a:schemeClr val="lt1">
+            <a:alpha val="90000"/>
+            <a:hueOff val="0"/>
+            <a:satOff val="0"/>
+            <a:lumOff val="0"/>
+            <a:alphaOff val="0"/>
+          </a:schemeClr>
+        </a:solidFill>
+        <a:ln w="12700" cap="rnd" cmpd="sng" algn="ctr">
+          <a:solidFill>
+            <a:schemeClr val="accent3">
+              <a:hueOff val="-56167"/>
+              <a:satOff val="-1518"/>
+              <a:lumOff val="-3137"/>
+              <a:alphaOff val="0"/>
+            </a:schemeClr>
+          </a:solidFill>
+          <a:prstDash val="solid"/>
+        </a:ln>
+        <a:effectLst/>
+        <a:scene3d>
+          <a:camera prst="orthographicFront"/>
+          <a:lightRig rig="threePt" dir="t">
+            <a:rot lat="0" lon="0" rev="7500000"/>
+          </a:lightRig>
+        </a:scene3d>
+        <a:sp3d z="-152400" extrusionH="63500" prstMaterial="dkEdge">
+          <a:bevelT w="124450" h="16350" prst="relaxedInset"/>
+          <a:contourClr>
+            <a:schemeClr val="bg1"/>
+          </a:contourClr>
+        </a:sp3d>
+      </dsp:spPr>
+      <dsp:style>
+        <a:lnRef idx="1">
+          <a:scrgbClr r="0" g="0" b="0"/>
+        </a:lnRef>
+        <a:fillRef idx="1">
+          <a:scrgbClr r="0" g="0" b="0"/>
+        </a:fillRef>
+        <a:effectRef idx="0">
+          <a:scrgbClr r="0" g="0" b="0"/>
+        </a:effectRef>
+        <a:fontRef idx="minor"/>
+      </dsp:style>
+      <dsp:txBody>
+        <a:bodyPr spcFirstLastPara="0" vert="horz" wrap="square" lIns="45720" tIns="30480" rIns="45720" bIns="30480" numCol="1" spcCol="1270" anchor="ctr" anchorCtr="0">
+          <a:noAutofit/>
+        </a:bodyPr>
+        <a:lstStyle/>
+        <a:p>
+          <a:pPr marL="0" lvl="0" indent="0" algn="ctr" defTabSz="1066800">
+            <a:lnSpc>
+              <a:spcPct val="90000"/>
+            </a:lnSpc>
+            <a:spcBef>
+              <a:spcPct val="0"/>
+            </a:spcBef>
+            <a:spcAft>
+              <a:spcPct val="35000"/>
+            </a:spcAft>
+            <a:buNone/>
+          </a:pPr>
+          <a:r>
+            <a:rPr lang="en-US" sz="2400" kern="1200"/>
+            <a:t>Human Resources Director</a:t>
+          </a:r>
+        </a:p>
+      </dsp:txBody>
+      <dsp:txXfrm>
+        <a:off x="895481" y="2803966"/>
+        <a:ext cx="1708148" cy="1043250"/>
+      </dsp:txXfrm>
+    </dsp:sp>
+    <dsp:sp modelId="{D1E5B0C2-D8E0-46CE-B11A-7E487BA21377}">
+      <dsp:nvSpPr>
+        <dsp:cNvPr id="0" name=""/>
+        <dsp:cNvSpPr/>
+      </dsp:nvSpPr>
+      <dsp:spPr>
+        <a:xfrm>
+          <a:off x="3190169" y="1099"/>
+          <a:ext cx="2216328" cy="1108164"/>
+        </a:xfrm>
+        <a:prstGeom prst="roundRect">
+          <a:avLst>
+            <a:gd name="adj" fmla="val 10000"/>
+          </a:avLst>
+        </a:prstGeom>
+        <a:gradFill rotWithShape="0">
+          <a:gsLst>
+            <a:gs pos="0">
+              <a:schemeClr val="accent3">
+                <a:hueOff val="-140419"/>
+                <a:satOff val="-3796"/>
+                <a:lumOff val="-7844"/>
+                <a:alphaOff val="0"/>
+                <a:tint val="96000"/>
+                <a:lumMod val="100000"/>
+              </a:schemeClr>
+            </a:gs>
+            <a:gs pos="78000">
+              <a:schemeClr val="accent3">
+                <a:hueOff val="-140419"/>
+                <a:satOff val="-3796"/>
+                <a:lumOff val="-7844"/>
+                <a:alphaOff val="0"/>
+                <a:shade val="94000"/>
+                <a:lumMod val="94000"/>
+              </a:schemeClr>
+            </a:gs>
+          </a:gsLst>
+          <a:lin ang="5400000" scaled="0"/>
+        </a:gradFill>
+        <a:ln>
+          <a:noFill/>
+        </a:ln>
+        <a:effectLst>
+          <a:outerShdw blurRad="38100" dist="25400" dir="5400000" rotWithShape="0">
+            <a:srgbClr val="000000">
+              <a:alpha val="35000"/>
+            </a:srgbClr>
+          </a:outerShdw>
+        </a:effectLst>
+        <a:scene3d>
+          <a:camera prst="orthographicFront"/>
+          <a:lightRig rig="threePt" dir="t">
+            <a:rot lat="0" lon="0" rev="7500000"/>
+          </a:lightRig>
+        </a:scene3d>
+        <a:sp3d prstMaterial="plastic">
+          <a:bevelT w="127000" h="25400" prst="relaxedInset"/>
+        </a:sp3d>
+      </dsp:spPr>
+      <dsp:style>
+        <a:lnRef idx="0">
+          <a:scrgbClr r="0" g="0" b="0"/>
+        </a:lnRef>
+        <a:fillRef idx="3">
+          <a:scrgbClr r="0" g="0" b="0"/>
+        </a:fillRef>
+        <a:effectRef idx="2">
+          <a:scrgbClr r="0" g="0" b="0"/>
+        </a:effectRef>
+        <a:fontRef idx="minor">
+          <a:schemeClr val="lt1"/>
+        </a:fontRef>
+      </dsp:style>
+      <dsp:txBody>
+        <a:bodyPr spcFirstLastPara="0" vert="horz" wrap="square" lIns="66675" tIns="44450" rIns="66675" bIns="44450" numCol="1" spcCol="1270" anchor="ctr" anchorCtr="0">
+          <a:noAutofit/>
+        </a:bodyPr>
+        <a:lstStyle/>
+        <a:p>
+          <a:pPr marL="0" lvl="0" indent="0" algn="ctr" defTabSz="1555750">
+            <a:lnSpc>
+              <a:spcPct val="90000"/>
+            </a:lnSpc>
+            <a:spcBef>
+              <a:spcPct val="0"/>
+            </a:spcBef>
+            <a:spcAft>
+              <a:spcPct val="35000"/>
+            </a:spcAft>
+            <a:buNone/>
+          </a:pPr>
+          <a:r>
+            <a:rPr lang="en-US" sz="3500" kern="1200"/>
+            <a:t>Day Two</a:t>
+          </a:r>
+        </a:p>
+      </dsp:txBody>
+      <dsp:txXfrm>
+        <a:off x="3222626" y="33556"/>
+        <a:ext cx="2151414" cy="1043250"/>
+      </dsp:txXfrm>
+    </dsp:sp>
+    <dsp:sp modelId="{713CEBAF-A1E8-4963-AD04-54DA32F2EB8B}">
+      <dsp:nvSpPr>
+        <dsp:cNvPr id="0" name=""/>
+        <dsp:cNvSpPr/>
+      </dsp:nvSpPr>
+      <dsp:spPr>
+        <a:xfrm>
+          <a:off x="3411802" y="1109263"/>
+          <a:ext cx="221632" cy="831123"/>
+        </a:xfrm>
+        <a:custGeom>
+          <a:avLst/>
+          <a:gdLst/>
+          <a:ahLst/>
+          <a:cxnLst/>
+          <a:rect l="0" t="0" r="0" b="0"/>
+          <a:pathLst>
+            <a:path>
+              <a:moveTo>
+                <a:pt x="0" y="0"/>
+              </a:moveTo>
+              <a:lnTo>
+                <a:pt x="0" y="831123"/>
+              </a:lnTo>
+              <a:lnTo>
+                <a:pt x="221632" y="831123"/>
+              </a:lnTo>
+            </a:path>
+          </a:pathLst>
+        </a:custGeom>
+        <a:noFill/>
+        <a:ln w="19050" cap="rnd" cmpd="sng" algn="ctr">
+          <a:solidFill>
+            <a:schemeClr val="accent4">
+              <a:hueOff val="0"/>
+              <a:satOff val="0"/>
+              <a:lumOff val="0"/>
+              <a:alphaOff val="0"/>
+            </a:schemeClr>
+          </a:solidFill>
+          <a:prstDash val="solid"/>
+        </a:ln>
+        <a:effectLst/>
+        <a:scene3d>
+          <a:camera prst="orthographicFront"/>
+          <a:lightRig rig="threePt" dir="t">
+            <a:rot lat="0" lon="0" rev="7500000"/>
+          </a:lightRig>
+        </a:scene3d>
+        <a:sp3d z="-40000" prstMaterial="matte"/>
+      </dsp:spPr>
+      <dsp:style>
+        <a:lnRef idx="2">
+          <a:scrgbClr r="0" g="0" b="0"/>
+        </a:lnRef>
+        <a:fillRef idx="0">
+          <a:scrgbClr r="0" g="0" b="0"/>
+        </a:fillRef>
+        <a:effectRef idx="0">
+          <a:scrgbClr r="0" g="0" b="0"/>
+        </a:effectRef>
+        <a:fontRef idx="minor"/>
+      </dsp:style>
+    </dsp:sp>
+    <dsp:sp modelId="{1B8667FB-337D-49EF-A785-46B38D8F4B9E}">
+      <dsp:nvSpPr>
+        <dsp:cNvPr id="0" name=""/>
+        <dsp:cNvSpPr/>
+      </dsp:nvSpPr>
+      <dsp:spPr>
+        <a:xfrm>
+          <a:off x="3633435" y="1386304"/>
+          <a:ext cx="1773062" cy="1108164"/>
+        </a:xfrm>
+        <a:prstGeom prst="roundRect">
+          <a:avLst>
+            <a:gd name="adj" fmla="val 10000"/>
+          </a:avLst>
+        </a:prstGeom>
+        <a:solidFill>
+          <a:schemeClr val="lt1">
+            <a:alpha val="90000"/>
+            <a:hueOff val="0"/>
+            <a:satOff val="0"/>
+            <a:lumOff val="0"/>
+            <a:alphaOff val="0"/>
+          </a:schemeClr>
+        </a:solidFill>
+        <a:ln w="12700" cap="rnd" cmpd="sng" algn="ctr">
+          <a:solidFill>
+            <a:schemeClr val="accent3">
+              <a:hueOff val="-112335"/>
+              <a:satOff val="-3037"/>
+              <a:lumOff val="-6275"/>
+              <a:alphaOff val="0"/>
+            </a:schemeClr>
+          </a:solidFill>
+          <a:prstDash val="solid"/>
+        </a:ln>
+        <a:effectLst/>
+        <a:scene3d>
+          <a:camera prst="orthographicFront"/>
+          <a:lightRig rig="threePt" dir="t">
+            <a:rot lat="0" lon="0" rev="7500000"/>
+          </a:lightRig>
+        </a:scene3d>
+        <a:sp3d z="-152400" extrusionH="63500" prstMaterial="dkEdge">
+          <a:bevelT w="124450" h="16350" prst="relaxedInset"/>
+          <a:contourClr>
+            <a:schemeClr val="bg1"/>
+          </a:contourClr>
+        </a:sp3d>
+      </dsp:spPr>
+      <dsp:style>
+        <a:lnRef idx="1">
+          <a:scrgbClr r="0" g="0" b="0"/>
+        </a:lnRef>
+        <a:fillRef idx="1">
+          <a:scrgbClr r="0" g="0" b="0"/>
+        </a:fillRef>
+        <a:effectRef idx="0">
+          <a:scrgbClr r="0" g="0" b="0"/>
+        </a:effectRef>
+        <a:fontRef idx="minor"/>
+      </dsp:style>
+      <dsp:txBody>
+        <a:bodyPr spcFirstLastPara="0" vert="horz" wrap="square" lIns="45720" tIns="30480" rIns="45720" bIns="30480" numCol="1" spcCol="1270" anchor="ctr" anchorCtr="0">
+          <a:noAutofit/>
+        </a:bodyPr>
+        <a:lstStyle/>
+        <a:p>
+          <a:pPr marL="0" lvl="0" indent="0" algn="ctr" defTabSz="1066800">
+            <a:lnSpc>
+              <a:spcPct val="90000"/>
+            </a:lnSpc>
+            <a:spcBef>
+              <a:spcPct val="0"/>
+            </a:spcBef>
+            <a:spcAft>
+              <a:spcPct val="35000"/>
+            </a:spcAft>
+            <a:buNone/>
+          </a:pPr>
+          <a:r>
+            <a:rPr lang="en-US" sz="2400" kern="1200"/>
+            <a:t>David Jensen</a:t>
+          </a:r>
+        </a:p>
+      </dsp:txBody>
+      <dsp:txXfrm>
+        <a:off x="3665892" y="1418761"/>
+        <a:ext cx="1708148" cy="1043250"/>
+      </dsp:txXfrm>
+    </dsp:sp>
+    <dsp:sp modelId="{B65F1D1F-AB85-445D-BE32-1F7266314353}">
+      <dsp:nvSpPr>
+        <dsp:cNvPr id="0" name=""/>
+        <dsp:cNvSpPr/>
+      </dsp:nvSpPr>
+      <dsp:spPr>
+        <a:xfrm>
+          <a:off x="3411802" y="1109263"/>
+          <a:ext cx="221632" cy="2216328"/>
+        </a:xfrm>
+        <a:custGeom>
+          <a:avLst/>
+          <a:gdLst/>
+          <a:ahLst/>
+          <a:cxnLst/>
+          <a:rect l="0" t="0" r="0" b="0"/>
+          <a:pathLst>
+            <a:path>
+              <a:moveTo>
+                <a:pt x="0" y="0"/>
+              </a:moveTo>
+              <a:lnTo>
+                <a:pt x="0" y="2216328"/>
+              </a:lnTo>
+              <a:lnTo>
+                <a:pt x="221632" y="2216328"/>
+              </a:lnTo>
+            </a:path>
+          </a:pathLst>
+        </a:custGeom>
+        <a:noFill/>
+        <a:ln w="19050" cap="rnd" cmpd="sng" algn="ctr">
+          <a:solidFill>
+            <a:schemeClr val="accent4">
+              <a:hueOff val="0"/>
+              <a:satOff val="0"/>
+              <a:lumOff val="0"/>
+              <a:alphaOff val="0"/>
+            </a:schemeClr>
+          </a:solidFill>
+          <a:prstDash val="solid"/>
+        </a:ln>
+        <a:effectLst/>
+        <a:scene3d>
+          <a:camera prst="orthographicFront"/>
+          <a:lightRig rig="threePt" dir="t">
+            <a:rot lat="0" lon="0" rev="7500000"/>
+          </a:lightRig>
+        </a:scene3d>
+        <a:sp3d z="-40000" prstMaterial="matte"/>
+      </dsp:spPr>
+      <dsp:style>
+        <a:lnRef idx="2">
+          <a:scrgbClr r="0" g="0" b="0"/>
+        </a:lnRef>
+        <a:fillRef idx="0">
+          <a:scrgbClr r="0" g="0" b="0"/>
+        </a:fillRef>
+        <a:effectRef idx="0">
+          <a:scrgbClr r="0" g="0" b="0"/>
+        </a:effectRef>
+        <a:fontRef idx="minor"/>
+      </dsp:style>
+    </dsp:sp>
+    <dsp:sp modelId="{7407D5C2-B86B-4576-BCA3-B0E4FB850A92}">
+      <dsp:nvSpPr>
+        <dsp:cNvPr id="0" name=""/>
+        <dsp:cNvSpPr/>
+      </dsp:nvSpPr>
+      <dsp:spPr>
+        <a:xfrm>
+          <a:off x="3633435" y="2771509"/>
+          <a:ext cx="1773062" cy="1108164"/>
+        </a:xfrm>
+        <a:prstGeom prst="roundRect">
+          <a:avLst>
+            <a:gd name="adj" fmla="val 10000"/>
+          </a:avLst>
+        </a:prstGeom>
+        <a:solidFill>
+          <a:schemeClr val="lt1">
+            <a:alpha val="90000"/>
+            <a:hueOff val="0"/>
+            <a:satOff val="0"/>
+            <a:lumOff val="0"/>
+            <a:alphaOff val="0"/>
+          </a:schemeClr>
+        </a:solidFill>
+        <a:ln w="12700" cap="rnd" cmpd="sng" algn="ctr">
+          <a:solidFill>
+            <a:schemeClr val="accent3">
+              <a:hueOff val="-168502"/>
+              <a:satOff val="-4555"/>
+              <a:lumOff val="-9412"/>
+              <a:alphaOff val="0"/>
+            </a:schemeClr>
+          </a:solidFill>
+          <a:prstDash val="solid"/>
+        </a:ln>
+        <a:effectLst/>
+        <a:scene3d>
+          <a:camera prst="orthographicFront"/>
+          <a:lightRig rig="threePt" dir="t">
+            <a:rot lat="0" lon="0" rev="7500000"/>
+          </a:lightRig>
+        </a:scene3d>
+        <a:sp3d z="-152400" extrusionH="63500" prstMaterial="dkEdge">
+          <a:bevelT w="124450" h="16350" prst="relaxedInset"/>
+          <a:contourClr>
+            <a:schemeClr val="bg1"/>
+          </a:contourClr>
+        </a:sp3d>
+      </dsp:spPr>
+      <dsp:style>
+        <a:lnRef idx="1">
+          <a:scrgbClr r="0" g="0" b="0"/>
+        </a:lnRef>
+        <a:fillRef idx="1">
+          <a:scrgbClr r="0" g="0" b="0"/>
+        </a:fillRef>
+        <a:effectRef idx="0">
+          <a:scrgbClr r="0" g="0" b="0"/>
+        </a:effectRef>
+        <a:fontRef idx="minor"/>
+      </dsp:style>
+      <dsp:txBody>
+        <a:bodyPr spcFirstLastPara="0" vert="horz" wrap="square" lIns="45720" tIns="30480" rIns="45720" bIns="30480" numCol="1" spcCol="1270" anchor="ctr" anchorCtr="0">
+          <a:noAutofit/>
+        </a:bodyPr>
+        <a:lstStyle/>
+        <a:p>
+          <a:pPr marL="0" lvl="0" indent="0" algn="ctr" defTabSz="1066800">
+            <a:lnSpc>
+              <a:spcPct val="90000"/>
+            </a:lnSpc>
+            <a:spcBef>
+              <a:spcPct val="0"/>
+            </a:spcBef>
+            <a:spcAft>
+              <a:spcPct val="35000"/>
+            </a:spcAft>
+            <a:buNone/>
+          </a:pPr>
+          <a:r>
+            <a:rPr lang="en-US" sz="2400" kern="1200"/>
+            <a:t>Resort Operations Director</a:t>
+          </a:r>
+        </a:p>
+      </dsp:txBody>
+      <dsp:txXfrm>
+        <a:off x="3665892" y="2803966"/>
+        <a:ext cx="1708148" cy="1043250"/>
+      </dsp:txXfrm>
+    </dsp:sp>
+    <dsp:sp modelId="{FD70A21F-0E54-4D13-924C-10305F0E168C}">
+      <dsp:nvSpPr>
+        <dsp:cNvPr id="0" name=""/>
+        <dsp:cNvSpPr/>
+      </dsp:nvSpPr>
+      <dsp:spPr>
+        <a:xfrm>
+          <a:off x="5960580" y="1099"/>
+          <a:ext cx="2216328" cy="1108164"/>
+        </a:xfrm>
+        <a:prstGeom prst="roundRect">
+          <a:avLst>
+            <a:gd name="adj" fmla="val 10000"/>
+          </a:avLst>
+        </a:prstGeom>
+        <a:gradFill rotWithShape="0">
+          <a:gsLst>
+            <a:gs pos="0">
+              <a:schemeClr val="accent3">
+                <a:hueOff val="-280837"/>
+                <a:satOff val="-7592"/>
+                <a:lumOff val="-15687"/>
+                <a:alphaOff val="0"/>
+                <a:tint val="96000"/>
+                <a:lumMod val="100000"/>
+              </a:schemeClr>
+            </a:gs>
+            <a:gs pos="78000">
+              <a:schemeClr val="accent3">
+                <a:hueOff val="-280837"/>
+                <a:satOff val="-7592"/>
+                <a:lumOff val="-15687"/>
+                <a:alphaOff val="0"/>
+                <a:shade val="94000"/>
+                <a:lumMod val="94000"/>
+              </a:schemeClr>
+            </a:gs>
+          </a:gsLst>
+          <a:lin ang="5400000" scaled="0"/>
+        </a:gradFill>
+        <a:ln>
+          <a:noFill/>
+        </a:ln>
+        <a:effectLst>
+          <a:outerShdw blurRad="38100" dist="25400" dir="5400000" rotWithShape="0">
+            <a:srgbClr val="000000">
+              <a:alpha val="35000"/>
+            </a:srgbClr>
+          </a:outerShdw>
+        </a:effectLst>
+        <a:scene3d>
+          <a:camera prst="orthographicFront"/>
+          <a:lightRig rig="threePt" dir="t">
+            <a:rot lat="0" lon="0" rev="7500000"/>
+          </a:lightRig>
+        </a:scene3d>
+        <a:sp3d prstMaterial="plastic">
+          <a:bevelT w="127000" h="25400" prst="relaxedInset"/>
+        </a:sp3d>
+      </dsp:spPr>
+      <dsp:style>
+        <a:lnRef idx="0">
+          <a:scrgbClr r="0" g="0" b="0"/>
+        </a:lnRef>
+        <a:fillRef idx="3">
+          <a:scrgbClr r="0" g="0" b="0"/>
+        </a:fillRef>
+        <a:effectRef idx="2">
+          <a:scrgbClr r="0" g="0" b="0"/>
+        </a:effectRef>
+        <a:fontRef idx="minor">
+          <a:schemeClr val="lt1"/>
+        </a:fontRef>
+      </dsp:style>
+      <dsp:txBody>
+        <a:bodyPr spcFirstLastPara="0" vert="horz" wrap="square" lIns="66675" tIns="44450" rIns="66675" bIns="44450" numCol="1" spcCol="1270" anchor="ctr" anchorCtr="0">
+          <a:noAutofit/>
+        </a:bodyPr>
+        <a:lstStyle/>
+        <a:p>
+          <a:pPr marL="0" lvl="0" indent="0" algn="ctr" defTabSz="1555750">
+            <a:lnSpc>
+              <a:spcPct val="90000"/>
+            </a:lnSpc>
+            <a:spcBef>
+              <a:spcPct val="0"/>
+            </a:spcBef>
+            <a:spcAft>
+              <a:spcPct val="35000"/>
+            </a:spcAft>
+            <a:buNone/>
+          </a:pPr>
+          <a:r>
+            <a:rPr lang="en-US" sz="3500" kern="1200"/>
+            <a:t>Day Three</a:t>
+          </a:r>
+        </a:p>
+      </dsp:txBody>
+      <dsp:txXfrm>
+        <a:off x="5993037" y="33556"/>
+        <a:ext cx="2151414" cy="1043250"/>
+      </dsp:txXfrm>
+    </dsp:sp>
+    <dsp:sp modelId="{34A9B0FA-BD48-4F0E-9F58-CF87FE63D4EF}">
+      <dsp:nvSpPr>
+        <dsp:cNvPr id="0" name=""/>
+        <dsp:cNvSpPr/>
+      </dsp:nvSpPr>
+      <dsp:spPr>
+        <a:xfrm>
+          <a:off x="6182213" y="1109263"/>
+          <a:ext cx="221632" cy="831123"/>
+        </a:xfrm>
+        <a:custGeom>
+          <a:avLst/>
+          <a:gdLst/>
+          <a:ahLst/>
+          <a:cxnLst/>
+          <a:rect l="0" t="0" r="0" b="0"/>
+          <a:pathLst>
+            <a:path>
+              <a:moveTo>
+                <a:pt x="0" y="0"/>
+              </a:moveTo>
+              <a:lnTo>
+                <a:pt x="0" y="831123"/>
+              </a:lnTo>
+              <a:lnTo>
+                <a:pt x="221632" y="831123"/>
+              </a:lnTo>
+            </a:path>
+          </a:pathLst>
+        </a:custGeom>
+        <a:noFill/>
+        <a:ln w="19050" cap="rnd" cmpd="sng" algn="ctr">
+          <a:solidFill>
+            <a:schemeClr val="accent4">
+              <a:hueOff val="0"/>
+              <a:satOff val="0"/>
+              <a:lumOff val="0"/>
+              <a:alphaOff val="0"/>
+            </a:schemeClr>
+          </a:solidFill>
+          <a:prstDash val="solid"/>
+        </a:ln>
+        <a:effectLst/>
+        <a:scene3d>
+          <a:camera prst="orthographicFront"/>
+          <a:lightRig rig="threePt" dir="t">
+            <a:rot lat="0" lon="0" rev="7500000"/>
+          </a:lightRig>
+        </a:scene3d>
+        <a:sp3d z="-40000" prstMaterial="matte"/>
+      </dsp:spPr>
+      <dsp:style>
+        <a:lnRef idx="2">
+          <a:scrgbClr r="0" g="0" b="0"/>
+        </a:lnRef>
+        <a:fillRef idx="0">
+          <a:scrgbClr r="0" g="0" b="0"/>
+        </a:fillRef>
+        <a:effectRef idx="0">
+          <a:scrgbClr r="0" g="0" b="0"/>
+        </a:effectRef>
+        <a:fontRef idx="minor"/>
+      </dsp:style>
+    </dsp:sp>
+    <dsp:sp modelId="{585D2916-80BC-491B-9C04-70D865CBF33A}">
+      <dsp:nvSpPr>
+        <dsp:cNvPr id="0" name=""/>
+        <dsp:cNvSpPr/>
+      </dsp:nvSpPr>
+      <dsp:spPr>
+        <a:xfrm>
+          <a:off x="6403846" y="1386304"/>
+          <a:ext cx="1773062" cy="1108164"/>
+        </a:xfrm>
+        <a:prstGeom prst="roundRect">
+          <a:avLst>
+            <a:gd name="adj" fmla="val 10000"/>
+          </a:avLst>
+        </a:prstGeom>
+        <a:solidFill>
+          <a:schemeClr val="lt1">
+            <a:alpha val="90000"/>
+            <a:hueOff val="0"/>
+            <a:satOff val="0"/>
+            <a:lumOff val="0"/>
+            <a:alphaOff val="0"/>
+          </a:schemeClr>
+        </a:solidFill>
+        <a:ln w="12700" cap="rnd" cmpd="sng" algn="ctr">
+          <a:solidFill>
+            <a:schemeClr val="accent3">
+              <a:hueOff val="-224670"/>
+              <a:satOff val="-6074"/>
+              <a:lumOff val="-12550"/>
+              <a:alphaOff val="0"/>
+            </a:schemeClr>
+          </a:solidFill>
+          <a:prstDash val="solid"/>
+        </a:ln>
+        <a:effectLst/>
+        <a:scene3d>
+          <a:camera prst="orthographicFront"/>
+          <a:lightRig rig="threePt" dir="t">
+            <a:rot lat="0" lon="0" rev="7500000"/>
+          </a:lightRig>
+        </a:scene3d>
+        <a:sp3d z="-152400" extrusionH="63500" prstMaterial="dkEdge">
+          <a:bevelT w="124450" h="16350" prst="relaxedInset"/>
+          <a:contourClr>
+            <a:schemeClr val="bg1"/>
+          </a:contourClr>
+        </a:sp3d>
+      </dsp:spPr>
+      <dsp:style>
+        <a:lnRef idx="1">
+          <a:scrgbClr r="0" g="0" b="0"/>
+        </a:lnRef>
+        <a:fillRef idx="1">
+          <a:scrgbClr r="0" g="0" b="0"/>
+        </a:fillRef>
+        <a:effectRef idx="0">
+          <a:scrgbClr r="0" g="0" b="0"/>
+        </a:effectRef>
+        <a:fontRef idx="minor"/>
+      </dsp:style>
+      <dsp:txBody>
+        <a:bodyPr spcFirstLastPara="0" vert="horz" wrap="square" lIns="45720" tIns="30480" rIns="45720" bIns="30480" numCol="1" spcCol="1270" anchor="ctr" anchorCtr="0">
+          <a:noAutofit/>
+        </a:bodyPr>
+        <a:lstStyle/>
+        <a:p>
+          <a:pPr marL="0" lvl="0" indent="0" algn="ctr" defTabSz="1066800">
+            <a:lnSpc>
+              <a:spcPct val="90000"/>
+            </a:lnSpc>
+            <a:spcBef>
+              <a:spcPct val="0"/>
+            </a:spcBef>
+            <a:spcAft>
+              <a:spcPct val="35000"/>
+            </a:spcAft>
+            <a:buNone/>
+          </a:pPr>
+          <a:r>
+            <a:rPr lang="en-US" sz="2400" kern="1200"/>
+            <a:t>Ken Lee</a:t>
+          </a:r>
+        </a:p>
+      </dsp:txBody>
+      <dsp:txXfrm>
+        <a:off x="6436303" y="1418761"/>
+        <a:ext cx="1708148" cy="1043250"/>
+      </dsp:txXfrm>
+    </dsp:sp>
+    <dsp:sp modelId="{3AB641FA-F7A0-4564-AD9C-8824B81219B4}">
+      <dsp:nvSpPr>
+        <dsp:cNvPr id="0" name=""/>
+        <dsp:cNvSpPr/>
+      </dsp:nvSpPr>
+      <dsp:spPr>
+        <a:xfrm>
+          <a:off x="6182213" y="1109263"/>
+          <a:ext cx="221632" cy="2216328"/>
+        </a:xfrm>
+        <a:custGeom>
+          <a:avLst/>
+          <a:gdLst/>
+          <a:ahLst/>
+          <a:cxnLst/>
+          <a:rect l="0" t="0" r="0" b="0"/>
+          <a:pathLst>
+            <a:path>
+              <a:moveTo>
+                <a:pt x="0" y="0"/>
+              </a:moveTo>
+              <a:lnTo>
+                <a:pt x="0" y="2216328"/>
+              </a:lnTo>
+              <a:lnTo>
+                <a:pt x="221632" y="2216328"/>
+              </a:lnTo>
+            </a:path>
+          </a:pathLst>
+        </a:custGeom>
+        <a:noFill/>
+        <a:ln w="19050" cap="rnd" cmpd="sng" algn="ctr">
+          <a:solidFill>
+            <a:schemeClr val="accent4">
+              <a:hueOff val="0"/>
+              <a:satOff val="0"/>
+              <a:lumOff val="0"/>
+              <a:alphaOff val="0"/>
+            </a:schemeClr>
+          </a:solidFill>
+          <a:prstDash val="solid"/>
+        </a:ln>
+        <a:effectLst/>
+        <a:scene3d>
+          <a:camera prst="orthographicFront"/>
+          <a:lightRig rig="threePt" dir="t">
+            <a:rot lat="0" lon="0" rev="7500000"/>
+          </a:lightRig>
+        </a:scene3d>
+        <a:sp3d z="-40000" prstMaterial="matte"/>
+      </dsp:spPr>
+      <dsp:style>
+        <a:lnRef idx="2">
+          <a:scrgbClr r="0" g="0" b="0"/>
+        </a:lnRef>
+        <a:fillRef idx="0">
+          <a:scrgbClr r="0" g="0" b="0"/>
+        </a:fillRef>
+        <a:effectRef idx="0">
+          <a:scrgbClr r="0" g="0" b="0"/>
+        </a:effectRef>
+        <a:fontRef idx="minor"/>
+      </dsp:style>
+    </dsp:sp>
+    <dsp:sp modelId="{DB320430-CCCF-4F4E-A6BA-984D169FE04C}">
+      <dsp:nvSpPr>
+        <dsp:cNvPr id="0" name=""/>
+        <dsp:cNvSpPr/>
+      </dsp:nvSpPr>
+      <dsp:spPr>
+        <a:xfrm>
+          <a:off x="6403846" y="2771509"/>
+          <a:ext cx="1773062" cy="1108164"/>
+        </a:xfrm>
+        <a:prstGeom prst="roundRect">
+          <a:avLst>
+            <a:gd name="adj" fmla="val 10000"/>
+          </a:avLst>
+        </a:prstGeom>
+        <a:solidFill>
+          <a:schemeClr val="lt1">
+            <a:alpha val="90000"/>
+            <a:hueOff val="0"/>
+            <a:satOff val="0"/>
+            <a:lumOff val="0"/>
+            <a:alphaOff val="0"/>
+          </a:schemeClr>
+        </a:solidFill>
+        <a:ln w="12700" cap="rnd" cmpd="sng" algn="ctr">
+          <a:solidFill>
+            <a:schemeClr val="accent3">
+              <a:hueOff val="-280837"/>
+              <a:satOff val="-7592"/>
+              <a:lumOff val="-15687"/>
+              <a:alphaOff val="0"/>
+            </a:schemeClr>
+          </a:solidFill>
+          <a:prstDash val="solid"/>
+        </a:ln>
+        <a:effectLst/>
+        <a:scene3d>
+          <a:camera prst="orthographicFront"/>
+          <a:lightRig rig="threePt" dir="t">
+            <a:rot lat="0" lon="0" rev="7500000"/>
+          </a:lightRig>
+        </a:scene3d>
+        <a:sp3d z="-152400" extrusionH="63500" prstMaterial="dkEdge">
+          <a:bevelT w="124450" h="16350" prst="relaxedInset"/>
+          <a:contourClr>
+            <a:schemeClr val="bg1"/>
+          </a:contourClr>
+        </a:sp3d>
+      </dsp:spPr>
+      <dsp:style>
+        <a:lnRef idx="1">
+          <a:scrgbClr r="0" g="0" b="0"/>
+        </a:lnRef>
+        <a:fillRef idx="1">
+          <a:scrgbClr r="0" g="0" b="0"/>
+        </a:fillRef>
+        <a:effectRef idx="0">
+          <a:scrgbClr r="0" g="0" b="0"/>
+        </a:effectRef>
+        <a:fontRef idx="minor"/>
+      </dsp:style>
+      <dsp:txBody>
+        <a:bodyPr spcFirstLastPara="0" vert="horz" wrap="square" lIns="45720" tIns="30480" rIns="45720" bIns="30480" numCol="1" spcCol="1270" anchor="ctr" anchorCtr="0">
+          <a:noAutofit/>
+        </a:bodyPr>
+        <a:lstStyle/>
+        <a:p>
+          <a:pPr marL="0" lvl="0" indent="0" algn="ctr" defTabSz="1066800">
+            <a:lnSpc>
+              <a:spcPct val="90000"/>
+            </a:lnSpc>
+            <a:spcBef>
+              <a:spcPct val="0"/>
+            </a:spcBef>
+            <a:spcAft>
+              <a:spcPct val="35000"/>
+            </a:spcAft>
+            <a:buNone/>
+          </a:pPr>
+          <a:r>
+            <a:rPr lang="en-US" sz="2400" kern="1200"/>
+            <a:t>Safety Director</a:t>
+          </a:r>
+        </a:p>
+      </dsp:txBody>
+      <dsp:txXfrm>
+        <a:off x="6436303" y="2803966"/>
+        <a:ext cx="1708148" cy="1043250"/>
+      </dsp:txXfrm>
+    </dsp:sp>
+  </dsp:spTree>
+</dsp:drawing>
+</file>
+
+<file path=ppt/diagrams/layout1.xml><?xml version="1.0" encoding="utf-8"?>
+<dgm:layoutDef xmlns:dgm="http://schemas.openxmlformats.org/drawingml/2006/diagram" xmlns:a="http://schemas.openxmlformats.org/drawingml/2006/main" uniqueId="urn:microsoft.com/office/officeart/2005/8/layout/hierarchy3">
+  <dgm:title val=""/>
+  <dgm:desc val=""/>
+  <dgm:catLst>
+    <dgm:cat type="hierarchy" pri="7000"/>
+    <dgm:cat type="list" pri="23000"/>
+    <dgm:cat type="relationship" pri="15000"/>
+    <dgm:cat type="convert" pri="7000"/>
+  </dgm:catLst>
+  <dgm:sampData>
+    <dgm:dataModel>
+      <dgm:ptLst>
+        <dgm:pt modelId="0" type="doc"/>
+        <dgm:pt modelId="1">
+          <dgm:prSet phldr="1"/>
+        </dgm:pt>
+        <dgm:pt modelId="11">
+          <dgm:prSet phldr="1"/>
+        </dgm:pt>
+        <dgm:pt modelId="12">
+          <dgm:prSet phldr="1"/>
+        </dgm:pt>
+        <dgm:pt modelId="2">
+          <dgm:prSet phldr="1"/>
+        </dgm:pt>
+        <dgm:pt modelId="21">
+          <dgm:prSet phldr="1"/>
+        </dgm:pt>
+        <dgm:pt modelId="22">
+          <dgm:prSet phldr="1"/>
+        </dgm:pt>
+      </dgm:ptLst>
+      <dgm:cxnLst>
+        <dgm:cxn modelId="4" srcId="0" destId="1" srcOrd="0" destOrd="0"/>
+        <dgm:cxn modelId="5" srcId="1" destId="11" srcOrd="0" destOrd="0"/>
+        <dgm:cxn modelId="6" srcId="1" destId="12" srcOrd="1" destOrd="0"/>
+        <dgm:cxn modelId="7" srcId="0" destId="2" srcOrd="1" destOrd="0"/>
+        <dgm:cxn modelId="8" srcId="2" destId="21" srcOrd="0" destOrd="0"/>
+        <dgm:cxn modelId="9" srcId="2" destId="22" srcOrd="1" destOrd="0"/>
+      </dgm:cxnLst>
+      <dgm:bg/>
+      <dgm:whole/>
+    </dgm:dataModel>
+  </dgm:sampData>
+  <dgm:styleData>
+    <dgm:dataModel>
+      <dgm:ptLst>
+        <dgm:pt modelId="0" type="doc"/>
+        <dgm:pt modelId="1"/>
+        <dgm:pt modelId="11"/>
+        <dgm:pt modelId="2"/>
+        <dgm:pt modelId="21"/>
+      </dgm:ptLst>
+      <dgm:cxnLst>
+        <dgm:cxn modelId="4" srcId="0" destId="1" srcOrd="0" destOrd="0"/>
+        <dgm:cxn modelId="5" srcId="0" destId="2" srcOrd="1" destOrd="0"/>
+        <dgm:cxn modelId="13" srcId="1" destId="11" srcOrd="0" destOrd="0"/>
+        <dgm:cxn modelId="23" srcId="2" destId="21" srcOrd="0" destOrd="0"/>
+      </dgm:cxnLst>
+      <dgm:bg/>
+      <dgm:whole/>
+    </dgm:dataModel>
+  </dgm:styleData>
+  <dgm:clrData>
+    <dgm:dataModel>
+      <dgm:ptLst>
+        <dgm:pt modelId="0" type="doc"/>
+        <dgm:pt modelId="1"/>
+        <dgm:pt modelId="11"/>
+        <dgm:pt modelId="2"/>
+        <dgm:pt modelId="21"/>
+        <dgm:pt modelId="3"/>
+        <dgm:pt modelId="31"/>
+        <dgm:pt modelId="4"/>
+        <dgm:pt modelId="41"/>
+      </dgm:ptLst>
+      <dgm:cxnLst>
+        <dgm:cxn modelId="5" srcId="0" destId="1" srcOrd="0" destOrd="0"/>
+        <dgm:cxn modelId="6" srcId="0" destId="2" srcOrd="1" destOrd="0"/>
+        <dgm:cxn modelId="7" srcId="0" destId="3" srcOrd="2" destOrd="0"/>
+        <dgm:cxn modelId="8" srcId="0" destId="4" srcOrd="3" destOrd="0"/>
+        <dgm:cxn modelId="13" srcId="1" destId="11" srcOrd="0" destOrd="0"/>
+        <dgm:cxn modelId="23" srcId="2" destId="21" srcOrd="0" destOrd="0"/>
+        <dgm:cxn modelId="33" srcId="3" destId="31" srcOrd="0" destOrd="0"/>
+        <dgm:cxn modelId="43" srcId="4" destId="41" srcOrd="0" destOrd="0"/>
+      </dgm:cxnLst>
+      <dgm:bg/>
+      <dgm:whole/>
+    </dgm:dataModel>
+  </dgm:clrData>
+  <dgm:layoutNode name="diagram">
+    <dgm:varLst>
+      <dgm:chPref val="1"/>
+      <dgm:dir/>
+      <dgm:animOne val="branch"/>
+      <dgm:animLvl val="lvl"/>
+      <dgm:resizeHandles/>
+    </dgm:varLst>
+    <dgm:choose name="Name0">
+      <dgm:if name="Name1" func="var" arg="dir" op="equ" val="norm">
+        <dgm:alg type="hierChild">
+          <dgm:param type="linDir" val="fromL"/>
+        </dgm:alg>
+      </dgm:if>
+      <dgm:else name="Name2">
+        <dgm:alg type="hierChild">
+          <dgm:param type="linDir" val="fromR"/>
+        </dgm:alg>
+      </dgm:else>
+    </dgm:choose>
+    <dgm:shape xmlns:r="http://schemas.openxmlformats.org/officeDocument/2006/relationships" r:blip="">
+      <dgm:adjLst/>
+    </dgm:shape>
+    <dgm:presOf/>
+    <dgm:constrLst>
+      <dgm:constr type="primFontSz" for="des" forName="rootText" op="equ" val="65"/>
+      <dgm:constr type="primFontSz" for="des" forName="childText" op="equ" val="65"/>
+      <dgm:constr type="w" for="des" forName="rootComposite" refType="w"/>
+      <dgm:constr type="h" for="des" forName="rootComposite" refType="w" fact="0.5"/>
+      <dgm:constr type="w" for="des" forName="childText" refType="w" refFor="des" refForName="rootComposite" fact="0.8"/>
+      <dgm:constr type="h" for="des" forName="childText" refType="h" refFor="des" refForName="rootComposite"/>
+      <dgm:constr type="sibSp" refType="w" refFor="des" refForName="rootComposite" fact="0.25"/>
+      <dgm:constr type="sibSp" for="des" forName="childShape" refType="h" refFor="des" refForName="childText" fact="0.25"/>
+      <dgm:constr type="sp" for="des" forName="root" refType="h" refFor="des" refForName="childText" fact="0.25"/>
+    </dgm:constrLst>
+    <dgm:ruleLst/>
+    <dgm:forEach name="Name3" axis="ch">
+      <dgm:forEach name="Name4" axis="self" ptType="node" cnt="1">
+        <dgm:layoutNode name="root">
+          <dgm:choose name="Name5">
+            <dgm:if name="Name6" func="var" arg="dir" op="equ" val="norm">
+              <dgm:alg type="hierRoot">
+                <dgm:param type="hierAlign" val="tL"/>
+              </dgm:alg>
+            </dgm:if>
+            <dgm:else name="Name7">
+              <dgm:alg type="hierRoot">
+                <dgm:param type="hierAlign" val="tR"/>
+              </dgm:alg>
+            </dgm:else>
+          </dgm:choose>
+          <dgm:shape xmlns:r="http://schemas.openxmlformats.org/officeDocument/2006/relationships" r:blip="">
+            <dgm:adjLst/>
+          </dgm:shape>
+          <dgm:presOf/>
+          <dgm:constrLst>
+            <dgm:constr type="alignOff" val="0.2"/>
+          </dgm:constrLst>
+          <dgm:ruleLst/>
+          <dgm:layoutNode name="rootComposite">
+            <dgm:alg type="composite"/>
+            <dgm:shape xmlns:r="http://schemas.openxmlformats.org/officeDocument/2006/relationships" r:blip="">
+              <dgm:adjLst/>
+            </dgm:shape>
+            <dgm:presOf axis="self" ptType="node" cnt="1"/>
+            <dgm:choose name="Name8">
+              <dgm:if name="Name9" func="var" arg="dir" op="equ" val="norm">
+                <dgm:constrLst>
+                  <dgm:constr type="l" for="ch" forName="rootText"/>
+                  <dgm:constr type="t" for="ch" forName="rootText"/>
+                  <dgm:constr type="w" for="ch" forName="rootText" refType="w"/>
+                  <dgm:constr type="h" for="ch" forName="rootText" refType="h"/>
+                  <dgm:constr type="l" for="ch" forName="rootConnector"/>
+                  <dgm:constr type="t" for="ch" forName="rootConnector"/>
+                  <dgm:constr type="w" for="ch" forName="rootConnector" refType="w" refFor="ch" refForName="rootText" fact="0.2"/>
+                  <dgm:constr type="h" for="ch" forName="rootConnector" refType="h" refFor="ch" refForName="rootText"/>
+                </dgm:constrLst>
+              </dgm:if>
+              <dgm:else name="Name10">
+                <dgm:constrLst>
+                  <dgm:constr type="l" for="ch" forName="rootText"/>
+                  <dgm:constr type="t" for="ch" forName="rootText"/>
+                  <dgm:constr type="w" for="ch" forName="rootText" refType="w"/>
+                  <dgm:constr type="h" for="ch" forName="rootText" refType="h"/>
+                  <dgm:constr type="r" for="ch" forName="rootConnector" refType="w"/>
+                  <dgm:constr type="t" for="ch" forName="rootConnector"/>
+                  <dgm:constr type="w" for="ch" forName="rootConnector" refType="w" refFor="ch" refForName="rootText" fact="0.2"/>
+                  <dgm:constr type="h" for="ch" forName="rootConnector" refType="h" refFor="ch" refForName="rootText"/>
+                </dgm:constrLst>
+              </dgm:else>
+            </dgm:choose>
+            <dgm:ruleLst/>
+            <dgm:layoutNode name="rootText" styleLbl="node1">
+              <dgm:alg type="tx"/>
+              <dgm:shape xmlns:r="http://schemas.openxmlformats.org/officeDocument/2006/relationships" type="roundRect" r:blip="">
+                <dgm:adjLst>
+                  <dgm:adj idx="1" val="0.1"/>
+                </dgm:adjLst>
+              </dgm:shape>
+              <dgm:presOf axis="self" ptType="node" cnt="1"/>
+              <dgm:constrLst>
+                <dgm:constr type="tMarg" refType="primFontSz" fact="0.1"/>
+                <dgm:constr type="bMarg" refType="primFontSz" fact="0.1"/>
+                <dgm:constr type="lMarg" refType="primFontSz" fact="0.15"/>
+                <dgm:constr type="rMarg" refType="primFontSz" fact="0.15"/>
+              </dgm:constrLst>
+              <dgm:ruleLst>
+                <dgm:rule type="primFontSz" val="5" fact="NaN" max="NaN"/>
+              </dgm:ruleLst>
+            </dgm:layoutNode>
+            <dgm:layoutNode name="rootConnector" moveWith="rootText">
+              <dgm:alg type="sp"/>
+              <dgm:shape xmlns:r="http://schemas.openxmlformats.org/officeDocument/2006/relationships" type="roundRect" r:blip="" hideGeom="1">
+                <dgm:adjLst>
+                  <dgm:adj idx="1" val="0.1"/>
+                </dgm:adjLst>
+              </dgm:shape>
+              <dgm:presOf axis="self" ptType="node" cnt="1"/>
+              <dgm:constrLst/>
+              <dgm:ruleLst/>
+            </dgm:layoutNode>
+          </dgm:layoutNode>
+          <dgm:layoutNode name="childShape">
+            <dgm:alg type="hierChild">
+              <dgm:param type="chAlign" val="l"/>
+              <dgm:param type="linDir" val="fromT"/>
+            </dgm:alg>
+            <dgm:shape xmlns:r="http://schemas.openxmlformats.org/officeDocument/2006/relationships" r:blip="">
+              <dgm:adjLst/>
+            </dgm:shape>
+            <dgm:presOf/>
+            <dgm:constrLst/>
+            <dgm:ruleLst/>
+            <dgm:forEach name="Name11" axis="ch">
+              <dgm:forEach name="Name12" axis="self" ptType="parTrans" cnt="1">
+                <dgm:layoutNode name="Name13">
+                  <dgm:choose name="Name14">
+                    <dgm:if name="Name15" func="var" arg="dir" op="equ" val="norm">
+                      <dgm:alg type="conn">
+                        <dgm:param type="dim" val="1D"/>
+                        <dgm:param type="endSty" val="noArr"/>
+                        <dgm:param type="connRout" val="bend"/>
+                        <dgm:param type="srcNode" val="rootConnector"/>
+                        <dgm:param type="begPts" val="bCtr"/>
+                        <dgm:param type="endPts" val="midL"/>
+                      </dgm:alg>
+                    </dgm:if>
+                    <dgm:else name="Name16">
+                      <dgm:alg type="conn">
+                        <dgm:param type="dim" val="1D"/>
+                        <dgm:param type="endSty" val="noArr"/>
+                        <dgm:param type="connRout" val="bend"/>
+                        <dgm:param type="srcNode" val="rootConnector"/>
+                        <dgm:param type="begPts" val="bCtr"/>
+                        <dgm:param type="endPts" val="midR"/>
+                      </dgm:alg>
+                    </dgm:else>
+                  </dgm:choose>
+                  <dgm:shape xmlns:r="http://schemas.openxmlformats.org/officeDocument/2006/relationships" type="conn" r:blip="">
+                    <dgm:adjLst/>
+                  </dgm:shape>
+                  <dgm:presOf axis="self"/>
+                  <dgm:constrLst>
+                    <dgm:constr type="begPad"/>
+                    <dgm:constr type="endPad"/>
+                  </dgm:constrLst>
+                  <dgm:ruleLst/>
+                </dgm:layoutNode>
+              </dgm:forEach>
+              <dgm:forEach name="Name17" axis="self" ptType="node">
+                <dgm:layoutNode name="childText" styleLbl="bgAcc1">
+                  <dgm:varLst>
+                    <dgm:bulletEnabled val="1"/>
+                  </dgm:varLst>
+                  <dgm:alg type="tx"/>
+                  <dgm:shape xmlns:r="http://schemas.openxmlformats.org/officeDocument/2006/relationships" type="roundRect" r:blip="">
+                    <dgm:adjLst>
+                      <dgm:adj idx="1" val="0.1"/>
+                    </dgm:adjLst>
+                  </dgm:shape>
+                  <dgm:presOf axis="self desOrSelf" ptType="node node" st="1 1" cnt="1 0"/>
+                  <dgm:constrLst>
+                    <dgm:constr type="tMarg" refType="primFontSz" fact="0.1"/>
+                    <dgm:constr type="bMarg" refType="primFontSz" fact="0.1"/>
+                    <dgm:constr type="lMarg" refType="primFontSz" fact="0.15"/>
+                    <dgm:constr type="rMarg" refType="primFontSz" fact="0.15"/>
+                  </dgm:constrLst>
+                  <dgm:ruleLst>
+                    <dgm:rule type="primFontSz" val="5" fact="NaN" max="NaN"/>
+                  </dgm:ruleLst>
+                </dgm:layoutNode>
+              </dgm:forEach>
+            </dgm:forEach>
+          </dgm:layoutNode>
+        </dgm:layoutNode>
+      </dgm:forEach>
+    </dgm:forEach>
+  </dgm:layoutNode>
+</dgm:layoutDef>
+</file>
+
+<file path=ppt/diagrams/quickStyle1.xml><?xml version="1.0" encoding="utf-8"?>
+<dgm:styleDef xmlns:dgm="http://schemas.openxmlformats.org/drawingml/2006/diagram" xmlns:a="http://schemas.openxmlformats.org/drawingml/2006/main" uniqueId="urn:microsoft.com/office/officeart/2005/8/quickstyle/3d2">
+  <dgm:title val=""/>
+  <dgm:desc val=""/>
+  <dgm:catLst>
+    <dgm:cat type="3D" pri="11200"/>
+  </dgm:catLst>
+  <dgm:scene3d>
+    <a:camera prst="orthographicFront"/>
+    <a:lightRig rig="threePt" dir="t"/>
+  </dgm:scene3d>
+  <dgm:styleLbl name="node0">
+    <dgm:scene3d>
+      <a:camera prst="orthographicFront"/>
+      <a:lightRig rig="threePt" dir="t">
+        <a:rot lat="0" lon="0" rev="7500000"/>
+      </a:lightRig>
+    </dgm:scene3d>
+    <dgm:sp3d prstMaterial="plastic">
+      <a:bevelT w="127000" h="25400" prst="relaxedInset"/>
+    </dgm:sp3d>
+    <dgm:txPr/>
+    <dgm:style>
+      <a:lnRef idx="0">
+        <a:scrgbClr r="0" g="0" b="0"/>
+      </a:lnRef>
+      <a:fillRef idx="3">
+        <a:scrgbClr r="0" g="0" b="0"/>
+      </a:fillRef>
+      <a:effectRef idx="2">
+        <a:scrgbClr r="0" g="0" b="0"/>
+      </a:effectRef>
+      <a:fontRef idx="minor">
+        <a:schemeClr val="lt1"/>
+      </a:fontRef>
+    </dgm:style>
+  </dgm:styleLbl>
+  <dgm:styleLbl name="lnNode1">
+    <dgm:scene3d>
+      <a:camera prst="orthographicFront"/>
+      <a:lightRig rig="threePt" dir="t">
+        <a:rot lat="0" lon="0" rev="7500000"/>
+      </a:lightRig>
+    </dgm:scene3d>
+    <dgm:sp3d prstMaterial="plastic">
+      <a:bevelT w="127000" h="25400" prst="relaxedInset"/>
+    </dgm:sp3d>
+    <dgm:txPr/>
+    <dgm:style>
+      <a:lnRef idx="1">
+        <a:scrgbClr r="0" g="0" b="0"/>
+      </a:lnRef>
+      <a:fillRef idx="3">
+        <a:scrgbClr r="0" g="0" b="0"/>
+      </a:fillRef>
+      <a:effectRef idx="2">
+        <a:scrgbClr r="0" g="0" b="0"/>
+      </a:effectRef>
+      <a:fontRef idx="minor">
+        <a:schemeClr val="lt1"/>
+      </a:fontRef>
+    </dgm:style>
+  </dgm:styleLbl>
+  <dgm:styleLbl name="vennNode1">
+    <dgm:scene3d>
+      <a:camera prst="orthographicFront"/>
+      <a:lightRig rig="threePt" dir="t">
+        <a:rot lat="0" lon="0" rev="7500000"/>
+      </a:lightRig>
+    </dgm:scene3d>
+    <dgm:sp3d prstMaterial="plastic">
+      <a:bevelT w="127000" h="25400" prst="relaxedInset"/>
+    </dgm:sp3d>
+    <dgm:txPr/>
+    <dgm:style>
+      <a:lnRef idx="0">
+        <a:scrgbClr r="0" g="0" b="0"/>
+      </a:lnRef>
+      <a:fillRef idx="3">
+        <a:scrgbClr r="0" g="0" b="0"/>
+      </a:fillRef>
+      <a:effectRef idx="2">
+        <a:scrgbClr r="0" g="0" b="0"/>
+      </a:effectRef>
+      <a:fontRef idx="minor">
+        <a:schemeClr val="tx1"/>
+      </a:fontRef>
+    </dgm:style>
+  </dgm:styleLbl>
+  <dgm:styleLbl name="alingNode1">
+    <dgm:scene3d>
+      <a:camera prst="orthographicFront"/>
+      <a:lightRig rig="threePt" dir="t">
+        <a:rot lat="0" lon="0" rev="7500000"/>
+      </a:lightRig>
+    </dgm:scene3d>
+    <dgm:sp3d prstMaterial="plastic">
+      <a:bevelT w="127000" h="25400" prst="relaxedInset"/>
+    </dgm:sp3d>
+    <dgm:txPr/>
+    <dgm:style>
+      <a:lnRef idx="0">
+        <a:scrgbClr r="0" g="0" b="0"/>
+      </a:lnRef>
+      <a:fillRef idx="3">
+        <a:scrgbClr r="0" g="0" b="0"/>
+      </a:fillRef>
+      <a:effectRef idx="2">
+        <a:scrgbClr r="0" g="0" b="0"/>
+      </a:effectRef>
+      <a:fontRef idx="minor">
+        <a:schemeClr val="lt1"/>
+      </a:fontRef>
+    </dgm:style>
+  </dgm:styleLbl>
+  <dgm:styleLbl name="node1">
+    <dgm:scene3d>
+      <a:camera prst="orthographicFront"/>
+      <a:lightRig rig="threePt" dir="t">
+        <a:rot lat="0" lon="0" rev="7500000"/>
+      </a:lightRig>
+    </dgm:scene3d>
+    <dgm:sp3d prstMaterial="plastic">
+      <a:bevelT w="127000" h="25400" prst="relaxedInset"/>
+    </dgm:sp3d>
+    <dgm:txPr/>
+    <dgm:style>
+      <a:lnRef idx="0">
+        <a:scrgbClr r="0" g="0" b="0"/>
+      </a:lnRef>
+      <a:fillRef idx="3">
+        <a:scrgbClr r="0" g="0" b="0"/>
+      </a:fillRef>
+      <a:effectRef idx="2">
+        <a:scrgbClr r="0" g="0" b="0"/>
+      </a:effectRef>
+      <a:fontRef idx="minor">
+        <a:schemeClr val="lt1"/>
+      </a:fontRef>
+    </dgm:style>
+  </dgm:styleLbl>
+  <dgm:styleLbl name="node2">
+    <dgm:scene3d>
+      <a:camera prst="orthographicFront"/>
+      <a:lightRig rig="threePt" dir="t">
+        <a:rot lat="0" lon="0" rev="7500000"/>
+      </a:lightRig>
+    </dgm:scene3d>
+    <dgm:sp3d prstMaterial="plastic">
+      <a:bevelT w="127000" h="25400" prst="relaxedInset"/>
+    </dgm:sp3d>
+    <dgm:txPr/>
+    <dgm:style>
+      <a:lnRef idx="0">
+        <a:scrgbClr r="0" g="0" b="0"/>
+      </a:lnRef>
+      <a:fillRef idx="3">
+        <a:scrgbClr r="0" g="0" b="0"/>
+      </a:fillRef>
+      <a:effectRef idx="2">
+        <a:scrgbClr r="0" g="0" b="0"/>
+      </a:effectRef>
+      <a:fontRef idx="minor">
+        <a:schemeClr val="lt1"/>
+      </a:fontRef>
+    </dgm:style>
+  </dgm:styleLbl>
+  <dgm:styleLbl name="node3">
+    <dgm:scene3d>
+      <a:camera prst="orthographicFront"/>
+      <a:lightRig rig="threePt" dir="t">
+        <a:rot lat="0" lon="0" rev="7500000"/>
+      </a:lightRig>
+    </dgm:scene3d>
+    <dgm:sp3d prstMaterial="plastic">
+      <a:bevelT w="127000" h="25400" prst="relaxedInset"/>
+    </dgm:sp3d>
+    <dgm:txPr/>
+    <dgm:style>
+      <a:lnRef idx="0">
+        <a:scrgbClr r="0" g="0" b="0"/>
+      </a:lnRef>
+      <a:fillRef idx="3">
+        <a:scrgbClr r="0" g="0" b="0"/>
+      </a:fillRef>
+      <a:effectRef idx="2">
+        <a:scrgbClr r="0" g="0" b="0"/>
+      </a:effectRef>
+      <a:fontRef idx="minor">
+        <a:schemeClr val="lt1"/>
+      </a:fontRef>
+    </dgm:style>
+  </dgm:styleLbl>
+  <dgm:styleLbl name="node4">
+    <dgm:scene3d>
+      <a:camera prst="orthographicFront"/>
+      <a:lightRig rig="threePt" dir="t">
+        <a:rot lat="0" lon="0" rev="7500000"/>
+      </a:lightRig>
+    </dgm:scene3d>
+    <dgm:sp3d prstMaterial="plastic">
+      <a:bevelT w="127000" h="25400" prst="relaxedInset"/>
+    </dgm:sp3d>
+    <dgm:txPr/>
+    <dgm:style>
+      <a:lnRef idx="0">
+        <a:scrgbClr r="0" g="0" b="0"/>
+      </a:lnRef>
+      <a:fillRef idx="3">
+        <a:scrgbClr r="0" g="0" b="0"/>
+      </a:fillRef>
+      <a:effectRef idx="2">
+        <a:scrgbClr r="0" g="0" b="0"/>
+      </a:effectRef>
+      <a:fontRef idx="minor">
+        <a:schemeClr val="lt1"/>
+      </a:fontRef>
+    </dgm:style>
+  </dgm:styleLbl>
+  <dgm:styleLbl name="fgImgPlace1">
+    <dgm:scene3d>
+      <a:camera prst="orthographicFront"/>
+      <a:lightRig rig="threePt" dir="t">
+        <a:rot lat="0" lon="0" rev="7500000"/>
+      </a:lightRig>
+    </dgm:scene3d>
+    <dgm:sp3d z="152400" extrusionH="63500" prstMaterial="matte">
+      <a:bevelT w="50800" h="19050" prst="relaxedInset"/>
+      <a:contourClr>
+        <a:schemeClr val="bg1"/>
+      </a:contourClr>
+    </dgm:sp3d>
+    <dgm:txPr/>
+    <dgm:style>
+      <a:lnRef idx="0">
+        <a:scrgbClr r="0" g="0" b="0"/>
+      </a:lnRef>
+      <a:fillRef idx="1">
+        <a:scrgbClr r="0" g="0" b="0"/>
+      </a:fillRef>
+      <a:effectRef idx="0">
+        <a:scrgbClr r="0" g="0" b="0"/>
+      </a:effectRef>
+      <a:fontRef idx="minor"/>
+    </dgm:style>
+  </dgm:styleLbl>
+  <dgm:styleLbl name="alignImgPlace1">
+    <dgm:scene3d>
+      <a:camera prst="orthographicFront"/>
+      <a:lightRig rig="threePt" dir="t">
+        <a:rot lat="0" lon="0" rev="7500000"/>
+      </a:lightRig>
+    </dgm:scene3d>
+    <dgm:sp3d z="254000" extrusionH="63500" contourW="12700" prstMaterial="matte">
+      <a:contourClr>
+        <a:schemeClr val="lt1"/>
+      </a:contourClr>
+    </dgm:sp3d>
+    <dgm:txPr/>
+    <dgm:style>
+      <a:lnRef idx="0">
+        <a:scrgbClr r="0" g="0" b="0"/>
+      </a:lnRef>
+      <a:fillRef idx="1">
+        <a:scrgbClr r="0" g="0" b="0"/>
+      </a:fillRef>
+      <a:effectRef idx="0">
+        <a:scrgbClr r="0" g="0" b="0"/>
+      </a:effectRef>
+      <a:fontRef idx="minor"/>
+    </dgm:style>
+  </dgm:styleLbl>
+  <dgm:styleLbl name="bgImgPlace1">
+    <dgm:scene3d>
+      <a:camera prst="orthographicFront"/>
+      <a:lightRig rig="threePt" dir="t">
+        <a:rot lat="0" lon="0" rev="7500000"/>
+      </a:lightRig>
+    </dgm:scene3d>
+    <dgm:sp3d z="-152400" extrusionH="63500" contourW="12700" prstMaterial="matte">
+      <a:contourClr>
+        <a:schemeClr val="lt1"/>
+      </a:contourClr>
+    </dgm:sp3d>
+    <dgm:txPr/>
+    <dgm:style>
+      <a:lnRef idx="0">
+        <a:scrgbClr r="0" g="0" b="0"/>
+      </a:lnRef>
+      <a:fillRef idx="1">
+        <a:scrgbClr r="0" g="0" b="0"/>
+      </a:fillRef>
+      <a:effectRef idx="0">
+        <a:scrgbClr r="0" g="0" b="0"/>
+      </a:effectRef>
+      <a:fontRef idx="minor"/>
+    </dgm:style>
+  </dgm:styleLbl>
+  <dgm:styleLbl name="sibTrans2D1">
+    <dgm:scene3d>
+      <a:camera prst="orthographicFront"/>
+      <a:lightRig rig="threePt" dir="t">
+        <a:rot lat="0" lon="0" rev="7500000"/>
+      </a:lightRig>
+    </dgm:scene3d>
+    <dgm:sp3d z="-70000" extrusionH="63500" prstMaterial="matte">
+      <a:bevelT w="25400" h="6350" prst="relaxedInset"/>
+      <a:contourClr>
+        <a:schemeClr val="bg1"/>
+      </a:contourClr>
+    </dgm:sp3d>
+    <dgm:txPr/>
+    <dgm:style>
+      <a:lnRef idx="0">
+        <a:scrgbClr r="0" g="0" b="0"/>
+      </a:lnRef>
+      <a:fillRef idx="1">
+        <a:scrgbClr r="0" g="0" b="0"/>
+      </a:fillRef>
+      <a:effectRef idx="2">
+        <a:scrgbClr r="0" g="0" b="0"/>
+      </a:effectRef>
+      <a:fontRef idx="minor">
+        <a:schemeClr val="lt1"/>
+      </a:fontRef>
+    </dgm:style>
+  </dgm:styleLbl>
+  <dgm:styleLbl name="fgSibTrans2D1">
+    <dgm:scene3d>
+      <a:camera prst="orthographicFront"/>
+      <a:lightRig rig="threePt" dir="t">
+        <a:rot lat="0" lon="0" rev="7500000"/>
+      </a:lightRig>
+    </dgm:scene3d>
+    <dgm:sp3d z="152400" extrusionH="63500" prstMaterial="matte">
+      <a:bevelT w="25400" h="6350" prst="relaxedInset"/>
+      <a:contourClr>
+        <a:schemeClr val="bg1"/>
+      </a:contourClr>
+    </dgm:sp3d>
+    <dgm:txPr/>
+    <dgm:style>
+      <a:lnRef idx="0">
+        <a:scrgbClr r="0" g="0" b="0"/>
+      </a:lnRef>
+      <a:fillRef idx="1">
+        <a:scrgbClr r="0" g="0" b="0"/>
+      </a:fillRef>
+      <a:effectRef idx="2">
+        <a:scrgbClr r="0" g="0" b="0"/>
+      </a:effectRef>
+      <a:fontRef idx="minor">
+        <a:schemeClr val="lt1"/>
+      </a:fontRef>
+    </dgm:style>
+  </dgm:styleLbl>
+  <dgm:styleLbl name="bgSibTrans2D1">
+    <dgm:scene3d>
+      <a:camera prst="orthographicFront"/>
+      <a:lightRig rig="threePt" dir="t">
+        <a:rot lat="0" lon="0" rev="7500000"/>
+      </a:lightRig>
+    </dgm:scene3d>
+    <dgm:sp3d z="-152400" extrusionH="63500" prstMaterial="matte">
+      <a:bevelT w="25400" h="6350" prst="relaxedInset"/>
+      <a:contourClr>
+        <a:schemeClr val="bg1"/>
+      </a:contourClr>
+    </dgm:sp3d>
+    <dgm:txPr/>
+    <dgm:style>
+      <a:lnRef idx="0">
+        <a:scrgbClr r="0" g="0" b="0"/>
+      </a:lnRef>
+      <a:fillRef idx="1">
+        <a:scrgbClr r="0" g="0" b="0"/>
+      </a:fillRef>
+      <a:effectRef idx="2">
+        <a:scrgbClr r="0" g="0" b="0"/>
+      </a:effectRef>
+      <a:fontRef idx="minor">
+        <a:schemeClr val="lt1"/>
+      </a:fontRef>
+    </dgm:style>
+  </dgm:styleLbl>
+  <dgm:styleLbl name="sibTrans1D1">
+    <dgm:scene3d>
+      <a:camera prst="orthographicFront"/>
+      <a:lightRig rig="threePt" dir="t">
+        <a:rot lat="0" lon="0" rev="7500000"/>
+      </a:lightRig>
+    </dgm:scene3d>
+    <dgm:sp3d z="-40000" prstMaterial="matte"/>
+    <dgm:txPr/>
+    <dgm:style>
+      <a:lnRef idx="1">
+        <a:scrgbClr r="0" g="0" b="0"/>
+      </a:lnRef>
+      <a:fillRef idx="0">
+        <a:scrgbClr r="0" g="0" b="0"/>
+      </a:fillRef>
+      <a:effectRef idx="0">
+        <a:scrgbClr r="0" g="0" b="0"/>
+      </a:effectRef>
+      <a:fontRef idx="minor"/>
+    </dgm:style>
+  </dgm:styleLbl>
+  <dgm:styleLbl name="callout">
+    <dgm:scene3d>
+      <a:camera prst="orthographicFront"/>
+      <a:lightRig rig="threePt" dir="t">
+        <a:rot lat="0" lon="0" rev="7500000"/>
+      </a:lightRig>
+    </dgm:scene3d>
+    <dgm:sp3d z="127000" prstMaterial="matte"/>
+    <dgm:txPr/>
+    <dgm:style>
+      <a:lnRef idx="2">
+        <a:scrgbClr r="0" g="0" b="0"/>
+      </a:lnRef>
+      <a:fillRef idx="1">
+        <a:scrgbClr r="0" g="0" b="0"/>
+      </a:fillRef>
+      <a:effectRef idx="0">
+        <a:scrgbClr r="0" g="0" b="0"/>
+      </a:effectRef>
+      <a:fontRef idx="minor"/>
+    </dgm:style>
+  </dgm:styleLbl>
+  <dgm:styleLbl name="asst0">
+    <dgm:scene3d>
+      <a:camera prst="orthographicFront"/>
+      <a:lightRig rig="threePt" dir="t">
+        <a:rot lat="0" lon="0" rev="7500000"/>
+      </a:lightRig>
+    </dgm:scene3d>
+    <dgm:sp3d prstMaterial="plastic">
+      <a:bevelT w="127000" h="25400" prst="relaxedInset"/>
+    </dgm:sp3d>
+    <dgm:txPr/>
+    <dgm:style>
+      <a:lnRef idx="0">
+        <a:scrgbClr r="0" g="0" b="0"/>
+      </a:lnRef>
+      <a:fillRef idx="3">
+        <a:scrgbClr r="0" g="0" b="0"/>
+      </a:fillRef>
+      <a:effectRef idx="2">
+        <a:scrgbClr r="0" g="0" b="0"/>
+      </a:effectRef>
+      <a:fontRef idx="minor">
+        <a:schemeClr val="lt1"/>
+      </a:fontRef>
+    </dgm:style>
+  </dgm:styleLbl>
+  <dgm:styleLbl name="asst1">
+    <dgm:scene3d>
+      <a:camera prst="orthographicFront"/>
+      <a:lightRig rig="threePt" dir="t">
+        <a:rot lat="0" lon="0" rev="7500000"/>
+      </a:lightRig>
+    </dgm:scene3d>
+    <dgm:sp3d prstMaterial="plastic">
+      <a:bevelT w="127000" h="25400" prst="relaxedInset"/>
+    </dgm:sp3d>
+    <dgm:txPr/>
+    <dgm:style>
+      <a:lnRef idx="0">
+        <a:scrgbClr r="0" g="0" b="0"/>
+      </a:lnRef>
+      <a:fillRef idx="3">
+        <a:scrgbClr r="0" g="0" b="0"/>
+      </a:fillRef>
+      <a:effectRef idx="2">
+        <a:scrgbClr r="0" g="0" b="0"/>
+      </a:effectRef>
+      <a:fontRef idx="minor">
+        <a:schemeClr val="lt1"/>
+      </a:fontRef>
+    </dgm:style>
+  </dgm:styleLbl>
+  <dgm:styleLbl name="asst2">
+    <dgm:scene3d>
+      <a:camera prst="orthographicFront"/>
+      <a:lightRig rig="threePt" dir="t">
+        <a:rot lat="0" lon="0" rev="7500000"/>
+      </a:lightRig>
+    </dgm:scene3d>
+    <dgm:sp3d prstMaterial="plastic">
+      <a:bevelT w="127000" h="25400" prst="relaxedInset"/>
+    </dgm:sp3d>
+    <dgm:txPr/>
+    <dgm:style>
+      <a:lnRef idx="0">
+        <a:scrgbClr r="0" g="0" b="0"/>
+      </a:lnRef>
+      <a:fillRef idx="3">
+        <a:scrgbClr r="0" g="0" b="0"/>
+      </a:fillRef>
+      <a:effectRef idx="2">
+        <a:scrgbClr r="0" g="0" b="0"/>
+      </a:effectRef>
+      <a:fontRef idx="minor">
+        <a:schemeClr val="lt1"/>
+      </a:fontRef>
+    </dgm:style>
+  </dgm:styleLbl>
+  <dgm:styleLbl name="asst3">
+    <dgm:scene3d>
+      <a:camera prst="orthographicFront"/>
+      <a:lightRig rig="threePt" dir="t">
+        <a:rot lat="0" lon="0" rev="7500000"/>
+      </a:lightRig>
+    </dgm:scene3d>
+    <dgm:sp3d prstMaterial="plastic">
+      <a:bevelT w="127000" h="25400" prst="relaxedInset"/>
+    </dgm:sp3d>
+    <dgm:txPr/>
+    <dgm:style>
+      <a:lnRef idx="0">
+        <a:scrgbClr r="0" g="0" b="0"/>
+      </a:lnRef>
+      <a:fillRef idx="3">
+        <a:scrgbClr r="0" g="0" b="0"/>
+      </a:fillRef>
+      <a:effectRef idx="2">
+        <a:scrgbClr r="0" g="0" b="0"/>
+      </a:effectRef>
+      <a:fontRef idx="minor">
+        <a:schemeClr val="lt1"/>
+      </a:fontRef>
+    </dgm:style>
+  </dgm:styleLbl>
+  <dgm:styleLbl name="parChTrans2D1">
+    <dgm:scene3d>
+      <a:camera prst="orthographicFront"/>
+      <a:lightRig rig="threePt" dir="t">
+        <a:rot lat="0" lon="0" rev="7500000"/>
+      </a:lightRig>
+    </dgm:scene3d>
+    <dgm:sp3d extrusionH="63500" prstMaterial="matte">
+      <a:bevelT w="50800" h="19050" prst="relaxedInset"/>
+      <a:contourClr>
+        <a:schemeClr val="bg1"/>
+      </a:contourClr>
+    </dgm:sp3d>
+    <dgm:txPr/>
+    <dgm:style>
+      <a:lnRef idx="0">
+        <a:scrgbClr r="0" g="0" b="0"/>
+      </a:lnRef>
+      <a:fillRef idx="1">
+        <a:scrgbClr r="0" g="0" b="0"/>
+      </a:fillRef>
+      <a:effectRef idx="2">
+        <a:scrgbClr r="0" g="0" b="0"/>
+      </a:effectRef>
+      <a:fontRef idx="minor">
+        <a:schemeClr val="lt1"/>
+      </a:fontRef>
+    </dgm:style>
+  </dgm:styleLbl>
+  <dgm:styleLbl name="parChTrans2D2">
+    <dgm:scene3d>
+      <a:camera prst="orthographicFront"/>
+      <a:lightRig rig="threePt" dir="t">
+        <a:rot lat="0" lon="0" rev="7500000"/>
+      </a:lightRig>
+    </dgm:scene3d>
+    <dgm:sp3d extrusionH="63500" prstMaterial="matte">
+      <a:bevelT w="50800" h="19050" prst="relaxedInset"/>
+      <a:contourClr>
+        <a:schemeClr val="bg1"/>
+      </a:contourClr>
+    </dgm:sp3d>
+    <dgm:txPr/>
+    <dgm:style>
+      <a:lnRef idx="0">
+        <a:scrgbClr r="0" g="0" b="0"/>
+      </a:lnRef>
+      <a:fillRef idx="1">
+        <a:scrgbClr r="0" g="0" b="0"/>
+      </a:fillRef>
+      <a:effectRef idx="0">
+        <a:scrgbClr r="0" g="0" b="0"/>
+      </a:effectRef>
+      <a:fontRef idx="minor">
+        <a:schemeClr val="lt1"/>
+      </a:fontRef>
+    </dgm:style>
+  </dgm:styleLbl>
+  <dgm:styleLbl name="parChTrans2D3">
+    <dgm:scene3d>
+      <a:camera prst="orthographicFront"/>
+      <a:lightRig rig="threePt" dir="t">
+        <a:rot lat="0" lon="0" rev="7500000"/>
+      </a:lightRig>
+    </dgm:scene3d>
+    <dgm:sp3d z="60000" prstMaterial="flat">
+      <a:bevelT w="120900" h="88900"/>
+    </dgm:sp3d>
+    <dgm:txPr/>
+    <dgm:style>
+      <a:lnRef idx="0">
+        <a:scrgbClr r="0" g="0" b="0"/>
+      </a:lnRef>
+      <a:fillRef idx="3">
+        <a:scrgbClr r="0" g="0" b="0"/>
+      </a:fillRef>
+      <a:effectRef idx="1">
+        <a:scrgbClr r="0" g="0" b="0"/>
+      </a:effectRef>
+      <a:fontRef idx="minor">
+        <a:schemeClr val="lt1"/>
+      </a:fontRef>
+    </dgm:style>
+  </dgm:styleLbl>
+  <dgm:styleLbl name="parChTrans2D4">
+    <dgm:scene3d>
+      <a:camera prst="orthographicFront"/>
+      <a:lightRig rig="threePt" dir="t">
+        <a:rot lat="0" lon="0" rev="7500000"/>
+      </a:lightRig>
+    </dgm:scene3d>
+    <dgm:sp3d z="60000" prstMaterial="flat">
+      <a:bevelT w="120900" h="88900"/>
+    </dgm:sp3d>
+    <dgm:txPr/>
+    <dgm:style>
+      <a:lnRef idx="0">
+        <a:scrgbClr r="0" g="0" b="0"/>
+      </a:lnRef>
+      <a:fillRef idx="3">
+        <a:scrgbClr r="0" g="0" b="0"/>
+      </a:fillRef>
+      <a:effectRef idx="1">
+        <a:scrgbClr r="0" g="0" b="0"/>
+      </a:effectRef>
+      <a:fontRef idx="minor">
+        <a:schemeClr val="lt1"/>
+      </a:fontRef>
+    </dgm:style>
+  </dgm:styleLbl>
+  <dgm:styleLbl name="parChTrans1D1">
+    <dgm:scene3d>
+      <a:camera prst="orthographicFront"/>
+      <a:lightRig rig="threePt" dir="t">
+        <a:rot lat="0" lon="0" rev="7500000"/>
+      </a:lightRig>
+    </dgm:scene3d>
+    <dgm:sp3d z="-40000" prstMaterial="matte"/>
+    <dgm:txPr/>
+    <dgm:style>
+      <a:lnRef idx="2">
+        <a:scrgbClr r="0" g="0" b="0"/>
+      </a:lnRef>
+      <a:fillRef idx="0">
+        <a:scrgbClr r="0" g="0" b="0"/>
+      </a:fillRef>
+      <a:effectRef idx="0">
+        <a:scrgbClr r="0" g="0" b="0"/>
+      </a:effectRef>
+      <a:fontRef idx="minor"/>
+    </dgm:style>
+  </dgm:styleLbl>
+  <dgm:styleLbl name="parChTrans1D2">
+    <dgm:scene3d>
+      <a:camera prst="orthographicFront"/>
+      <a:lightRig rig="threePt" dir="t">
+        <a:rot lat="0" lon="0" rev="7500000"/>
+      </a:lightRig>
+    </dgm:scene3d>
+    <dgm:sp3d z="-40000" prstMaterial="matte"/>
+    <dgm:txPr/>
+    <dgm:style>
+      <a:lnRef idx="2">
+        <a:scrgbClr r="0" g="0" b="0"/>
+      </a:lnRef>
+      <a:fillRef idx="0">
+        <a:scrgbClr r="0" g="0" b="0"/>
+      </a:fillRef>
+      <a:effectRef idx="0">
+        <a:scrgbClr r="0" g="0" b="0"/>
+      </a:effectRef>
+      <a:fontRef idx="minor"/>
+    </dgm:style>
+  </dgm:styleLbl>
+  <dgm:styleLbl name="parChTrans1D3">
+    <dgm:scene3d>
+      <a:camera prst="orthographicFront"/>
+      <a:lightRig rig="threePt" dir="t">
+        <a:rot lat="0" lon="0" rev="7500000"/>
+      </a:lightRig>
+    </dgm:scene3d>
+    <dgm:sp3d z="-40000" prstMaterial="matte"/>
+    <dgm:txPr/>
+    <dgm:style>
+      <a:lnRef idx="2">
+        <a:scrgbClr r="0" g="0" b="0"/>
+      </a:lnRef>
+      <a:fillRef idx="0">
+        <a:scrgbClr r="0" g="0" b="0"/>
+      </a:fillRef>
+      <a:effectRef idx="0">
+        <a:scrgbClr r="0" g="0" b="0"/>
+      </a:effectRef>
+      <a:fontRef idx="minor"/>
+    </dgm:style>
+  </dgm:styleLbl>
+  <dgm:styleLbl name="parChTrans1D4">
+    <dgm:scene3d>
+      <a:camera prst="orthographicFront"/>
+      <a:lightRig rig="threePt" dir="t">
+        <a:rot lat="0" lon="0" rev="7500000"/>
+      </a:lightRig>
+    </dgm:scene3d>
+    <dgm:sp3d z="-40000" prstMaterial="matte"/>
+    <dgm:txPr/>
+    <dgm:style>
+      <a:lnRef idx="2">
+        <a:scrgbClr r="0" g="0" b="0"/>
+      </a:lnRef>
+      <a:fillRef idx="0">
+        <a:scrgbClr r="0" g="0" b="0"/>
+      </a:fillRef>
+      <a:effectRef idx="0">
+        <a:scrgbClr r="0" g="0" b="0"/>
+      </a:effectRef>
+      <a:fontRef idx="minor"/>
+    </dgm:style>
+  </dgm:styleLbl>
+  <dgm:styleLbl name="fgAcc1">
+    <dgm:scene3d>
+      <a:camera prst="orthographicFront"/>
+      <a:lightRig rig="threePt" dir="t">
+        <a:rot lat="0" lon="0" rev="7500000"/>
+      </a:lightRig>
+    </dgm:scene3d>
+    <dgm:sp3d z="152400" extrusionH="63500" prstMaterial="dkEdge">
+      <a:bevelT w="135400" h="16350" prst="relaxedInset"/>
+      <a:contourClr>
+        <a:schemeClr val="bg1"/>
+      </a:contourClr>
+    </dgm:sp3d>
+    <dgm:txPr/>
+    <dgm:style>
+      <a:lnRef idx="1">
+        <a:scrgbClr r="0" g="0" b="0"/>
+      </a:lnRef>
+      <a:fillRef idx="1">
+        <a:scrgbClr r="0" g="0" b="0"/>
+      </a:fillRef>
+      <a:effectRef idx="2">
+        <a:scrgbClr r="0" g="0" b="0"/>
+      </a:effectRef>
+      <a:fontRef idx="minor"/>
+    </dgm:style>
+  </dgm:styleLbl>
+  <dgm:styleLbl name="conFgAcc1">
+    <dgm:scene3d>
+      <a:camera prst="orthographicFront"/>
+      <a:lightRig rig="threePt" dir="t">
+        <a:rot lat="0" lon="0" rev="7500000"/>
+      </a:lightRig>
+    </dgm:scene3d>
+    <dgm:sp3d z="152400" extrusionH="63500" prstMaterial="dkEdge">
+      <a:bevelT w="135400" h="16350" prst="relaxedInset"/>
+      <a:contourClr>
+        <a:schemeClr val="bg1"/>
+      </a:contourClr>
+    </dgm:sp3d>
+    <dgm:txPr/>
+    <dgm:style>
+      <a:lnRef idx="1">
+        <a:scrgbClr r="0" g="0" b="0"/>
+      </a:lnRef>
+      <a:fillRef idx="1">
+        <a:scrgbClr r="0" g="0" b="0"/>
+      </a:fillRef>
+      <a:effectRef idx="2">
+        <a:scrgbClr r="0" g="0" b="0"/>
+      </a:effectRef>
+      <a:fontRef idx="minor"/>
+    </dgm:style>
+  </dgm:styleLbl>
+  <dgm:styleLbl name="alignAcc1">
+    <dgm:scene3d>
+      <a:camera prst="orthographicFront"/>
+      <a:lightRig rig="threePt" dir="t">
+        <a:rot lat="0" lon="0" rev="7500000"/>
+      </a:lightRig>
+    </dgm:scene3d>
+    <dgm:sp3d extrusionH="190500" prstMaterial="dkEdge">
+      <a:bevelT w="135400" h="16350" prst="relaxedInset"/>
+      <a:contourClr>
+        <a:schemeClr val="bg1"/>
+      </a:contourClr>
+    </dgm:sp3d>
+    <dgm:txPr/>
+    <dgm:style>
+      <a:lnRef idx="1">
+        <a:scrgbClr r="0" g="0" b="0"/>
+      </a:lnRef>
+      <a:fillRef idx="1">
+        <a:scrgbClr r="0" g="0" b="0"/>
+      </a:fillRef>
+      <a:effectRef idx="2">
+        <a:scrgbClr r="0" g="0" b="0"/>
+      </a:effectRef>
+      <a:fontRef idx="minor"/>
+    </dgm:style>
+  </dgm:styleLbl>
+  <dgm:styleLbl name="trAlignAcc1">
+    <dgm:scene3d>
+      <a:camera prst="orthographicFront"/>
+      <a:lightRig rig="threePt" dir="t">
+        <a:rot lat="0" lon="0" rev="7500000"/>
+      </a:lightRig>
+    </dgm:scene3d>
+    <dgm:sp3d prstMaterial="plastic">
+      <a:bevelT w="127000" h="35400"/>
+    </dgm:sp3d>
+    <dgm:txPr/>
+    <dgm:style>
+      <a:lnRef idx="1">
+        <a:scrgbClr r="0" g="0" b="0"/>
+      </a:lnRef>
+      <a:fillRef idx="1">
+        <a:scrgbClr r="0" g="0" b="0"/>
+      </a:fillRef>
+      <a:effectRef idx="2">
+        <a:scrgbClr r="0" g="0" b="0"/>
+      </a:effectRef>
+      <a:fontRef idx="minor">
+        <a:schemeClr val="lt1"/>
+      </a:fontRef>
+    </dgm:style>
+  </dgm:styleLbl>
+  <dgm:styleLbl name="bgAcc1">
+    <dgm:scene3d>
+      <a:camera prst="orthographicFront"/>
+      <a:lightRig rig="threePt" dir="t">
+        <a:rot lat="0" lon="0" rev="7500000"/>
+      </a:lightRig>
+    </dgm:scene3d>
+    <dgm:sp3d z="-152400" extrusionH="63500" prstMaterial="dkEdge">
+      <a:bevelT w="124450" h="16350" prst="relaxedInset"/>
+      <a:contourClr>
+        <a:schemeClr val="bg1"/>
+      </a:contourClr>
+    </dgm:sp3d>
+    <dgm:txPr/>
+    <dgm:style>
+      <a:lnRef idx="1">
+        <a:scrgbClr r="0" g="0" b="0"/>
+      </a:lnRef>
+      <a:fillRef idx="1">
+        <a:scrgbClr r="0" g="0" b="0"/>
+      </a:fillRef>
+      <a:effectRef idx="0">
+        <a:scrgbClr r="0" g="0" b="0"/>
+      </a:effectRef>
+      <a:fontRef idx="minor"/>
+    </dgm:style>
+  </dgm:styleLbl>
+  <dgm:styleLbl name="solidFgAcc1">
+    <dgm:scene3d>
+      <a:camera prst="orthographicFront"/>
+      <a:lightRig rig="threePt" dir="t">
+        <a:rot lat="0" lon="0" rev="7500000"/>
+      </a:lightRig>
+    </dgm:scene3d>
+    <dgm:sp3d z="152400" extrusionH="63500" prstMaterial="dkEdge">
+      <a:bevelT w="120800" h="19050" prst="relaxedInset"/>
+      <a:contourClr>
+        <a:schemeClr val="bg1"/>
+      </a:contourClr>
+    </dgm:sp3d>
+    <dgm:txPr/>
+    <dgm:style>
+      <a:lnRef idx="1">
+        <a:scrgbClr r="0" g="0" b="0"/>
+      </a:lnRef>
+      <a:fillRef idx="1">
+        <a:scrgbClr r="0" g="0" b="0"/>
+      </a:fillRef>
+      <a:effectRef idx="2">
+        <a:scrgbClr r="0" g="0" b="0"/>
+      </a:effectRef>
+      <a:fontRef idx="minor"/>
+    </dgm:style>
+  </dgm:styleLbl>
+  <dgm:styleLbl name="solidAlignAcc1">
+    <dgm:scene3d>
+      <a:camera prst="orthographicFront"/>
+      <a:lightRig rig="threePt" dir="t">
+        <a:rot lat="0" lon="0" rev="7500000"/>
+      </a:lightRig>
+    </dgm:scene3d>
+    <dgm:sp3d extrusionH="190500" prstMaterial="dkEdge">
+      <a:bevelT w="120650" h="38100" prst="relaxedInset"/>
+      <a:contourClr>
+        <a:schemeClr val="bg1"/>
+      </a:contourClr>
+    </dgm:sp3d>
+    <dgm:txPr/>
+    <dgm:style>
+      <a:lnRef idx="1">
+        <a:scrgbClr r="0" g="0" b="0"/>
+      </a:lnRef>
+      <a:fillRef idx="1">
+        <a:scrgbClr r="0" g="0" b="0"/>
+      </a:fillRef>
+      <a:effectRef idx="2">
+        <a:scrgbClr r="0" g="0" b="0"/>
+      </a:effectRef>
+      <a:fontRef idx="minor"/>
+    </dgm:style>
+  </dgm:styleLbl>
+  <dgm:styleLbl name="solidBgAcc1">
+    <dgm:scene3d>
+      <a:camera prst="orthographicFront"/>
+      <a:lightRig rig="threePt" dir="t">
+        <a:rot lat="0" lon="0" rev="7500000"/>
+      </a:lightRig>
+    </dgm:scene3d>
+    <dgm:sp3d z="-152400" extrusionH="63500" prstMaterial="dkEdge">
+      <a:bevelT w="144450" h="36350" prst="relaxedInset"/>
+      <a:contourClr>
+        <a:schemeClr val="bg1"/>
+      </a:contourClr>
+    </dgm:sp3d>
+    <dgm:txPr/>
+    <dgm:style>
+      <a:lnRef idx="1">
+        <a:scrgbClr r="0" g="0" b="0"/>
+      </a:lnRef>
+      <a:fillRef idx="1">
+        <a:scrgbClr r="0" g="0" b="0"/>
+      </a:fillRef>
+      <a:effectRef idx="0">
+        <a:scrgbClr r="0" g="0" b="0"/>
+      </a:effectRef>
+      <a:fontRef idx="minor"/>
+    </dgm:style>
+  </dgm:styleLbl>
+  <dgm:styleLbl name="fgAccFollowNode1">
+    <dgm:scene3d>
+      <a:camera prst="orthographicFront"/>
+      <a:lightRig rig="threePt" dir="t">
+        <a:rot lat="0" lon="0" rev="7500000"/>
+      </a:lightRig>
+    </dgm:scene3d>
+    <dgm:sp3d z="152400" extrusionH="63500" prstMaterial="dkEdge">
+      <a:bevelT w="125400" h="36350" prst="relaxedInset"/>
+      <a:contourClr>
+        <a:schemeClr val="bg1"/>
+      </a:contourClr>
+    </dgm:sp3d>
+    <dgm:txPr/>
+    <dgm:style>
+      <a:lnRef idx="1">
+        <a:scrgbClr r="0" g="0" b="0"/>
+      </a:lnRef>
+      <a:fillRef idx="1">
+        <a:scrgbClr r="0" g="0" b="0"/>
+      </a:fillRef>
+      <a:effectRef idx="0">
+        <a:scrgbClr r="0" g="0" b="0"/>
+      </a:effectRef>
+      <a:fontRef idx="minor"/>
+    </dgm:style>
+  </dgm:styleLbl>
+  <dgm:styleLbl name="alignAccFollowNode1">
+    <dgm:scene3d>
+      <a:camera prst="orthographicFront"/>
+      <a:lightRig rig="threePt" dir="t">
+        <a:rot lat="0" lon="0" rev="7500000"/>
+      </a:lightRig>
+    </dgm:scene3d>
+    <dgm:sp3d extrusionH="190500" prstMaterial="dkEdge">
+      <a:bevelT w="120650" h="38100" prst="relaxedInset"/>
+      <a:bevelB w="120650" h="57150" prst="relaxedInset"/>
+      <a:contourClr>
+        <a:schemeClr val="bg1"/>
+      </a:contourClr>
+    </dgm:sp3d>
+    <dgm:txPr/>
+    <dgm:style>
+      <a:lnRef idx="1">
+        <a:scrgbClr r="0" g="0" b="0"/>
+      </a:lnRef>
+      <a:fillRef idx="1">
+        <a:scrgbClr r="0" g="0" b="0"/>
+      </a:fillRef>
+      <a:effectRef idx="2">
+        <a:scrgbClr r="0" g="0" b="0"/>
+      </a:effectRef>
+      <a:fontRef idx="minor"/>
+    </dgm:style>
+  </dgm:styleLbl>
+  <dgm:styleLbl name="bgAccFollowNode1">
+    <dgm:scene3d>
+      <a:camera prst="orthographicFront"/>
+      <a:lightRig rig="threePt" dir="t">
+        <a:rot lat="0" lon="0" rev="7500000"/>
+      </a:lightRig>
+    </dgm:scene3d>
+    <dgm:sp3d z="-152400" extrusionH="63500" prstMaterial="dkEdge">
+      <a:bevelT w="144450" h="36350" prst="relaxedInset"/>
+      <a:contourClr>
+        <a:schemeClr val="bg1"/>
+      </a:contourClr>
+    </dgm:sp3d>
+    <dgm:txPr/>
+    <dgm:style>
+      <a:lnRef idx="1">
+        <a:scrgbClr r="0" g="0" b="0"/>
+      </a:lnRef>
+      <a:fillRef idx="1">
+        <a:scrgbClr r="0" g="0" b="0"/>
+      </a:fillRef>
+      <a:effectRef idx="2">
+        <a:scrgbClr r="0" g="0" b="0"/>
+      </a:effectRef>
+      <a:fontRef idx="minor"/>
+    </dgm:style>
+  </dgm:styleLbl>
+  <dgm:styleLbl name="fgAcc0">
+    <dgm:scene3d>
+      <a:camera prst="orthographicFront"/>
+      <a:lightRig rig="threePt" dir="t">
+        <a:rot lat="0" lon="0" rev="7500000"/>
+      </a:lightRig>
+    </dgm:scene3d>
+    <dgm:sp3d z="152400" extrusionH="63500" prstMaterial="dkEdge">
+      <a:bevelT w="125400" h="36350" prst="relaxedInset"/>
+      <a:contourClr>
+        <a:schemeClr val="bg1"/>
+      </a:contourClr>
+    </dgm:sp3d>
+    <dgm:txPr/>
+    <dgm:style>
+      <a:lnRef idx="1">
+        <a:scrgbClr r="0" g="0" b="0"/>
+      </a:lnRef>
+      <a:fillRef idx="1">
+        <a:scrgbClr r="0" g="0" b="0"/>
+      </a:fillRef>
+      <a:effectRef idx="2">
+        <a:scrgbClr r="0" g="0" b="0"/>
+      </a:effectRef>
+      <a:fontRef idx="minor"/>
+    </dgm:style>
+  </dgm:styleLbl>
+  <dgm:styleLbl name="fgAcc2">
+    <dgm:scene3d>
+      <a:camera prst="orthographicFront"/>
+      <a:lightRig rig="threePt" dir="t">
+        <a:rot lat="0" lon="0" rev="7500000"/>
+      </a:lightRig>
+    </dgm:scene3d>
+    <dgm:sp3d z="152400" extrusionH="63500" prstMaterial="dkEdge">
+      <a:bevelT w="125400" h="36350" prst="relaxedInset"/>
+      <a:contourClr>
+        <a:schemeClr val="bg1"/>
+      </a:contourClr>
+    </dgm:sp3d>
+    <dgm:txPr/>
+    <dgm:style>
+      <a:lnRef idx="1">
+        <a:scrgbClr r="0" g="0" b="0"/>
+      </a:lnRef>
+      <a:fillRef idx="1">
+        <a:scrgbClr r="0" g="0" b="0"/>
+      </a:fillRef>
+      <a:effectRef idx="2">
+        <a:scrgbClr r="0" g="0" b="0"/>
+      </a:effectRef>
+      <a:fontRef idx="minor"/>
+    </dgm:style>
+  </dgm:styleLbl>
+  <dgm:styleLbl name="fgAcc3">
+    <dgm:scene3d>
+      <a:camera prst="orthographicFront"/>
+      <a:lightRig rig="threePt" dir="t">
+        <a:rot lat="0" lon="0" rev="7500000"/>
+      </a:lightRig>
+    </dgm:scene3d>
+    <dgm:sp3d z="152400" extrusionH="63500" prstMaterial="dkEdge">
+      <a:bevelT w="125400" h="36350" prst="relaxedInset"/>
+      <a:contourClr>
+        <a:schemeClr val="bg1"/>
+      </a:contourClr>
+    </dgm:sp3d>
+    <dgm:txPr/>
+    <dgm:style>
+      <a:lnRef idx="1">
+        <a:scrgbClr r="0" g="0" b="0"/>
+      </a:lnRef>
+      <a:fillRef idx="1">
+        <a:scrgbClr r="0" g="0" b="0"/>
+      </a:fillRef>
+      <a:effectRef idx="2">
+        <a:scrgbClr r="0" g="0" b="0"/>
+      </a:effectRef>
+      <a:fontRef idx="minor"/>
+    </dgm:style>
+  </dgm:styleLbl>
+  <dgm:styleLbl name="fgAcc4">
+    <dgm:scene3d>
+      <a:camera prst="orthographicFront"/>
+      <a:lightRig rig="threePt" dir="t">
+        <a:rot lat="0" lon="0" rev="7500000"/>
+      </a:lightRig>
+    </dgm:scene3d>
+    <dgm:sp3d z="152400" extrusionH="63500" prstMaterial="dkEdge">
+      <a:bevelT w="125400" h="36350" prst="relaxedInset"/>
+      <a:contourClr>
+        <a:schemeClr val="bg1"/>
+      </a:contourClr>
+    </dgm:sp3d>
+    <dgm:txPr/>
+    <dgm:style>
+      <a:lnRef idx="1">
+        <a:scrgbClr r="0" g="0" b="0"/>
+      </a:lnRef>
+      <a:fillRef idx="1">
+        <a:scrgbClr r="0" g="0" b="0"/>
+      </a:fillRef>
+      <a:effectRef idx="2">
+        <a:scrgbClr r="0" g="0" b="0"/>
+      </a:effectRef>
+      <a:fontRef idx="minor"/>
+    </dgm:style>
+  </dgm:styleLbl>
+  <dgm:styleLbl name="bgShp">
+    <dgm:scene3d>
+      <a:camera prst="orthographicFront"/>
+      <a:lightRig rig="threePt" dir="t">
+        <a:rot lat="0" lon="0" rev="7500000"/>
+      </a:lightRig>
+    </dgm:scene3d>
+    <dgm:sp3d z="-152400" extrusionH="63500" prstMaterial="matte">
+      <a:bevelT w="144450" h="6350" prst="relaxedInset"/>
+      <a:contourClr>
+        <a:schemeClr val="bg1"/>
+      </a:contourClr>
+    </dgm:sp3d>
+    <dgm:txPr/>
+    <dgm:style>
+      <a:lnRef idx="0">
+        <a:scrgbClr r="0" g="0" b="0"/>
+      </a:lnRef>
+      <a:fillRef idx="3">
+        <a:scrgbClr r="0" g="0" b="0"/>
+      </a:fillRef>
+      <a:effectRef idx="0">
+        <a:scrgbClr r="0" g="0" b="0"/>
+      </a:effectRef>
+      <a:fontRef idx="minor"/>
+    </dgm:style>
+  </dgm:styleLbl>
+  <dgm:styleLbl name="dkBgShp">
+    <dgm:scene3d>
+      <a:camera prst="orthographicFront"/>
+      <a:lightRig rig="threePt" dir="t">
+        <a:rot lat="0" lon="0" rev="7500000"/>
+      </a:lightRig>
+    </dgm:scene3d>
+    <dgm:sp3d prstMaterial="plastic">
+      <a:bevelT w="127000" h="25400" prst="relaxedInset"/>
+      <a:bevelB w="88900" h="121750" prst="angle"/>
+    </dgm:sp3d>
+    <dgm:txPr/>
+    <dgm:style>
+      <a:lnRef idx="0">
+        <a:scrgbClr r="0" g="0" b="0"/>
+      </a:lnRef>
+      <a:fillRef idx="1">
+        <a:scrgbClr r="0" g="0" b="0"/>
+      </a:fillRef>
+      <a:effectRef idx="2">
+        <a:scrgbClr r="0" g="0" b="0"/>
+      </a:effectRef>
+      <a:fontRef idx="minor">
+        <a:schemeClr val="lt1"/>
+      </a:fontRef>
+    </dgm:style>
+  </dgm:styleLbl>
+  <dgm:styleLbl name="trBgShp">
+    <dgm:scene3d>
+      <a:camera prst="orthographicFront"/>
+      <a:lightRig rig="threePt" dir="t"/>
+    </dgm:scene3d>
+    <dgm:sp3d z="-152400" prstMaterial="matte"/>
+    <dgm:txPr/>
+    <dgm:style>
+      <a:lnRef idx="0">
+        <a:scrgbClr r="0" g="0" b="0"/>
+      </a:lnRef>
+      <a:fillRef idx="1">
+        <a:scrgbClr r="0" g="0" b="0"/>
+      </a:fillRef>
+      <a:effectRef idx="0">
+        <a:scrgbClr r="0" g="0" b="0"/>
+      </a:effectRef>
+      <a:fontRef idx="minor"/>
+    </dgm:style>
+  </dgm:styleLbl>
+  <dgm:styleLbl name="fgShp">
+    <dgm:scene3d>
+      <a:camera prst="orthographicFront"/>
+      <a:lightRig rig="threePt" dir="t">
+        <a:rot lat="0" lon="0" rev="7500000"/>
+      </a:lightRig>
+    </dgm:scene3d>
+    <dgm:sp3d z="152400" extrusionH="63500" prstMaterial="matte">
+      <a:bevelT w="50800" h="19050" prst="relaxedInset"/>
+      <a:contourClr>
+        <a:schemeClr val="bg1"/>
+      </a:contourClr>
+    </dgm:sp3d>
+    <dgm:txPr/>
+    <dgm:style>
+      <a:lnRef idx="0">
+        <a:scrgbClr r="0" g="0" b="0"/>
+      </a:lnRef>
+      <a:fillRef idx="1">
+        <a:scrgbClr r="0" g="0" b="0"/>
+      </a:fillRef>
+      <a:effectRef idx="2">
+        <a:scrgbClr r="0" g="0" b="0"/>
+      </a:effectRef>
+      <a:fontRef idx="minor">
+        <a:schemeClr val="lt1"/>
+      </a:fontRef>
+    </dgm:style>
+  </dgm:styleLbl>
+  <dgm:styleLbl name="revTx">
+    <dgm:scene3d>
+      <a:camera prst="orthographicFront"/>
+      <a:lightRig rig="threePt" dir="t"/>
+    </dgm:scene3d>
+    <dgm:sp3d/>
+    <dgm:txPr/>
+    <dgm:style>
+      <a:lnRef idx="0">
+        <a:scrgbClr r="0" g="0" b="0"/>
+      </a:lnRef>
+      <a:fillRef idx="0">
+        <a:scrgbClr r="0" g="0" b="0"/>
+      </a:fillRef>
+      <a:effectRef idx="0">
+        <a:scrgbClr r="0" g="0" b="0"/>
+      </a:effectRef>
+      <a:fontRef idx="minor"/>
+    </dgm:style>
+  </dgm:styleLbl>
+</dgm:styleDef>
+</file>
+
 <file path=ppt/notesMasters/notesMaster1.xml><?xml version="1.0" encoding="utf-8"?>
 <p:notesMaster xmlns:a="http://schemas.openxmlformats.org/drawingml/2006/main" xmlns:r="http://schemas.openxmlformats.org/officeDocument/2006/relationships" xmlns:p="http://schemas.openxmlformats.org/presentationml/2006/main">
   <p:cSld>
@@ -202,7 +4333,7 @@
           <a:p>
             <a:fld id="{0677EE9E-6704-488E-A7E6-4DC81BC40DD9}" type="datetimeFigureOut">
               <a:rPr lang="en-US" smtClean="0"/>
-              <a:t>4/7/2021</a:t>
+              <a:t>04/19/2026</a:t>
             </a:fld>
             <a:endParaRPr lang="en-US"/>
           </a:p>
@@ -713,6 +4844,13 @@
               <a:schemeClr val="lt1"/>
             </a:fontRef>
           </p:style>
+          <p:txBody>
+            <a:bodyPr/>
+            <a:lstStyle/>
+            <a:p>
+              <a:endParaRPr lang="en-US"/>
+            </a:p>
+          </p:txBody>
         </p:sp>
         <p:cxnSp>
           <p:nvCxnSpPr>
@@ -850,6 +4988,13 @@
               <a:schemeClr val="lt1"/>
             </a:fontRef>
           </p:style>
+          <p:txBody>
+            <a:bodyPr/>
+            <a:lstStyle/>
+            <a:p>
+              <a:endParaRPr lang="en-US"/>
+            </a:p>
+          </p:txBody>
         </p:sp>
         <p:sp>
           <p:nvSpPr>
@@ -913,6 +5058,13 @@
               <a:schemeClr val="lt1"/>
             </a:fontRef>
           </p:style>
+          <p:txBody>
+            <a:bodyPr/>
+            <a:lstStyle/>
+            <a:p>
+              <a:endParaRPr lang="en-US"/>
+            </a:p>
+          </p:txBody>
         </p:sp>
         <p:sp>
           <p:nvSpPr>
@@ -955,6 +5107,13 @@
               <a:schemeClr val="lt1"/>
             </a:fontRef>
           </p:style>
+          <p:txBody>
+            <a:bodyPr/>
+            <a:lstStyle/>
+            <a:p>
+              <a:endParaRPr lang="en-US"/>
+            </a:p>
+          </p:txBody>
         </p:sp>
         <p:sp>
           <p:nvSpPr>
@@ -1019,6 +5178,13 @@
               <a:schemeClr val="lt1"/>
             </a:fontRef>
           </p:style>
+          <p:txBody>
+            <a:bodyPr/>
+            <a:lstStyle/>
+            <a:p>
+              <a:endParaRPr lang="en-US"/>
+            </a:p>
+          </p:txBody>
         </p:sp>
         <p:sp>
           <p:nvSpPr>
@@ -1082,6 +5248,13 @@
               <a:schemeClr val="lt1"/>
             </a:fontRef>
           </p:style>
+          <p:txBody>
+            <a:bodyPr/>
+            <a:lstStyle/>
+            <a:p>
+              <a:endParaRPr lang="en-US"/>
+            </a:p>
+          </p:txBody>
         </p:sp>
         <p:sp>
           <p:nvSpPr>
@@ -1146,6 +5319,13 @@
               <a:schemeClr val="lt1"/>
             </a:fontRef>
           </p:style>
+          <p:txBody>
+            <a:bodyPr/>
+            <a:lstStyle/>
+            <a:p>
+              <a:endParaRPr lang="en-US"/>
+            </a:p>
+          </p:txBody>
         </p:sp>
         <p:sp>
           <p:nvSpPr>
@@ -1188,6 +5368,13 @@
               <a:schemeClr val="lt1"/>
             </a:fontRef>
           </p:style>
+          <p:txBody>
+            <a:bodyPr/>
+            <a:lstStyle/>
+            <a:p>
+              <a:endParaRPr lang="en-US"/>
+            </a:p>
+          </p:txBody>
         </p:sp>
       </p:grpSp>
       <p:sp>
@@ -1380,7 +5567,7 @@
               <a:tabLst/>
               <a:defRPr/>
             </a:pPr>
-            <a:fld id="{B9A0AC62-E1C0-4AE5-A698-82AABA5C2E10}" type="datetimeFigureOut">
+            <a:fld id="{86D3B134-AB8F-41D1-91F7-986C5F99328D}" type="datetime1">
               <a:rPr kumimoji="0" lang="en-US" sz="900" b="0" i="0" u="none" strike="noStrike" kern="1200" cap="none" spc="0" normalizeH="0" baseline="0" noProof="0" smtClean="0">
                 <a:ln>
                   <a:noFill/>
@@ -1397,24 +5584,7 @@
                 <a:ea typeface="+mn-ea"/>
                 <a:cs typeface="+mn-cs"/>
               </a:rPr>
-              <a:pPr marL="0" marR="0" lvl="0" indent="0" algn="r" defTabSz="914400" rtl="0" eaLnBrk="1" fontAlgn="auto" latinLnBrk="0" hangingPunct="1">
-                <a:lnSpc>
-                  <a:spcPct val="100000"/>
-                </a:lnSpc>
-                <a:spcBef>
-                  <a:spcPts val="0"/>
-                </a:spcBef>
-                <a:spcAft>
-                  <a:spcPts val="0"/>
-                </a:spcAft>
-                <a:buClrTx/>
-                <a:buSzTx/>
-                <a:buFontTx/>
-                <a:buNone/>
-                <a:tabLst/>
-                <a:defRPr/>
-              </a:pPr>
-              <a:t>4/7/2021</a:t>
+              <a:t>04/19/2026</a:t>
             </a:fld>
             <a:endParaRPr kumimoji="0" lang="en-US" sz="900" b="0" i="0" u="none" strike="noStrike" kern="1200" cap="none" spc="0" normalizeH="0" baseline="0" noProof="0">
               <a:ln>
@@ -1467,22 +5637,25 @@
               <a:tabLst/>
               <a:defRPr/>
             </a:pPr>
-            <a:endParaRPr kumimoji="0" lang="en-US" sz="900" b="0" i="0" u="none" strike="noStrike" kern="1200" cap="none" spc="0" normalizeH="0" baseline="0" noProof="0">
-              <a:ln>
-                <a:noFill/>
-              </a:ln>
-              <a:solidFill>
-                <a:prstClr val="black">
-                  <a:tint val="75000"/>
-                </a:prstClr>
-              </a:solidFill>
-              <a:effectLst/>
-              <a:uLnTx/>
-              <a:uFillTx/>
-              <a:latin typeface="Trebuchet MS" panose="020B0603020202020204"/>
-              <a:ea typeface="+mn-ea"/>
-              <a:cs typeface="+mn-cs"/>
-            </a:endParaRPr>
+            <a:r>
+              <a:rPr kumimoji="0" lang="en-US" sz="900" b="0" i="0" u="none" strike="noStrike" kern="1200" cap="none" spc="0" normalizeH="0" baseline="0" noProof="0">
+                <a:ln>
+                  <a:noFill/>
+                </a:ln>
+                <a:solidFill>
+                  <a:prstClr val="black">
+                    <a:tint val="75000"/>
+                  </a:prstClr>
+                </a:solidFill>
+                <a:effectLst/>
+                <a:uLnTx/>
+                <a:uFillTx/>
+                <a:latin typeface="Trebuchet MS" panose="020B0603020202020204"/>
+                <a:ea typeface="+mn-ea"/>
+                <a:cs typeface="+mn-cs"/>
+              </a:rPr>
+              <a:t>2G_Orientation</a:t>
+            </a:r>
           </a:p>
         </p:txBody>
       </p:sp>
@@ -1790,7 +5963,7 @@
               <a:tabLst/>
               <a:defRPr/>
             </a:pPr>
-            <a:fld id="{B9A0AC62-E1C0-4AE5-A698-82AABA5C2E10}" type="datetimeFigureOut">
+            <a:fld id="{1366ACD8-A7A3-4F9C-B63A-EA666BDCE030}" type="datetime1">
               <a:rPr kumimoji="0" lang="en-US" sz="900" b="0" i="0" u="none" strike="noStrike" kern="1200" cap="none" spc="0" normalizeH="0" baseline="0" noProof="0" smtClean="0">
                 <a:ln>
                   <a:noFill/>
@@ -1807,24 +5980,7 @@
                 <a:ea typeface="+mn-ea"/>
                 <a:cs typeface="+mn-cs"/>
               </a:rPr>
-              <a:pPr marL="0" marR="0" lvl="0" indent="0" algn="r" defTabSz="914400" rtl="0" eaLnBrk="1" fontAlgn="auto" latinLnBrk="0" hangingPunct="1">
-                <a:lnSpc>
-                  <a:spcPct val="100000"/>
-                </a:lnSpc>
-                <a:spcBef>
-                  <a:spcPts val="0"/>
-                </a:spcBef>
-                <a:spcAft>
-                  <a:spcPts val="0"/>
-                </a:spcAft>
-                <a:buClrTx/>
-                <a:buSzTx/>
-                <a:buFontTx/>
-                <a:buNone/>
-                <a:tabLst/>
-                <a:defRPr/>
-              </a:pPr>
-              <a:t>4/7/2021</a:t>
+              <a:t>04/19/2026</a:t>
             </a:fld>
             <a:endParaRPr kumimoji="0" lang="en-US" sz="900" b="0" i="0" u="none" strike="noStrike" kern="1200" cap="none" spc="0" normalizeH="0" baseline="0" noProof="0">
               <a:ln>
@@ -1877,22 +6033,25 @@
               <a:tabLst/>
               <a:defRPr/>
             </a:pPr>
-            <a:endParaRPr kumimoji="0" lang="en-US" sz="900" b="0" i="0" u="none" strike="noStrike" kern="1200" cap="none" spc="0" normalizeH="0" baseline="0" noProof="0">
-              <a:ln>
-                <a:noFill/>
-              </a:ln>
-              <a:solidFill>
-                <a:prstClr val="black">
-                  <a:tint val="75000"/>
-                </a:prstClr>
-              </a:solidFill>
-              <a:effectLst/>
-              <a:uLnTx/>
-              <a:uFillTx/>
-              <a:latin typeface="Trebuchet MS" panose="020B0603020202020204"/>
-              <a:ea typeface="+mn-ea"/>
-              <a:cs typeface="+mn-cs"/>
-            </a:endParaRPr>
+            <a:r>
+              <a:rPr kumimoji="0" lang="en-US" sz="900" b="0" i="0" u="none" strike="noStrike" kern="1200" cap="none" spc="0" normalizeH="0" baseline="0" noProof="0">
+                <a:ln>
+                  <a:noFill/>
+                </a:ln>
+                <a:solidFill>
+                  <a:prstClr val="black">
+                    <a:tint val="75000"/>
+                  </a:prstClr>
+                </a:solidFill>
+                <a:effectLst/>
+                <a:uLnTx/>
+                <a:uFillTx/>
+                <a:latin typeface="Trebuchet MS" panose="020B0603020202020204"/>
+                <a:ea typeface="+mn-ea"/>
+                <a:cs typeface="+mn-cs"/>
+              </a:rPr>
+              <a:t>2G_Orientation</a:t>
+            </a:r>
           </a:p>
         </p:txBody>
       </p:sp>
@@ -2260,7 +6419,7 @@
               <a:tabLst/>
               <a:defRPr/>
             </a:pPr>
-            <a:fld id="{B9A0AC62-E1C0-4AE5-A698-82AABA5C2E10}" type="datetimeFigureOut">
+            <a:fld id="{DB947333-1EE6-4645-A5AB-FFDE21629629}" type="datetime1">
               <a:rPr kumimoji="0" lang="en-US" sz="900" b="0" i="0" u="none" strike="noStrike" kern="1200" cap="none" spc="0" normalizeH="0" baseline="0" noProof="0" smtClean="0">
                 <a:ln>
                   <a:noFill/>
@@ -2277,24 +6436,7 @@
                 <a:ea typeface="+mn-ea"/>
                 <a:cs typeface="+mn-cs"/>
               </a:rPr>
-              <a:pPr marL="0" marR="0" lvl="0" indent="0" algn="r" defTabSz="914400" rtl="0" eaLnBrk="1" fontAlgn="auto" latinLnBrk="0" hangingPunct="1">
-                <a:lnSpc>
-                  <a:spcPct val="100000"/>
-                </a:lnSpc>
-                <a:spcBef>
-                  <a:spcPts val="0"/>
-                </a:spcBef>
-                <a:spcAft>
-                  <a:spcPts val="0"/>
-                </a:spcAft>
-                <a:buClrTx/>
-                <a:buSzTx/>
-                <a:buFontTx/>
-                <a:buNone/>
-                <a:tabLst/>
-                <a:defRPr/>
-              </a:pPr>
-              <a:t>4/7/2021</a:t>
+              <a:t>04/19/2026</a:t>
             </a:fld>
             <a:endParaRPr kumimoji="0" lang="en-US" sz="900" b="0" i="0" u="none" strike="noStrike" kern="1200" cap="none" spc="0" normalizeH="0" baseline="0" noProof="0">
               <a:ln>
@@ -2347,22 +6489,25 @@
               <a:tabLst/>
               <a:defRPr/>
             </a:pPr>
-            <a:endParaRPr kumimoji="0" lang="en-US" sz="900" b="0" i="0" u="none" strike="noStrike" kern="1200" cap="none" spc="0" normalizeH="0" baseline="0" noProof="0">
-              <a:ln>
-                <a:noFill/>
-              </a:ln>
-              <a:solidFill>
-                <a:prstClr val="black">
-                  <a:tint val="75000"/>
-                </a:prstClr>
-              </a:solidFill>
-              <a:effectLst/>
-              <a:uLnTx/>
-              <a:uFillTx/>
-              <a:latin typeface="Trebuchet MS" panose="020B0603020202020204"/>
-              <a:ea typeface="+mn-ea"/>
-              <a:cs typeface="+mn-cs"/>
-            </a:endParaRPr>
+            <a:r>
+              <a:rPr kumimoji="0" lang="en-US" sz="900" b="0" i="0" u="none" strike="noStrike" kern="1200" cap="none" spc="0" normalizeH="0" baseline="0" noProof="0">
+                <a:ln>
+                  <a:noFill/>
+                </a:ln>
+                <a:solidFill>
+                  <a:prstClr val="black">
+                    <a:tint val="75000"/>
+                  </a:prstClr>
+                </a:solidFill>
+                <a:effectLst/>
+                <a:uLnTx/>
+                <a:uFillTx/>
+                <a:latin typeface="Trebuchet MS" panose="020B0603020202020204"/>
+                <a:ea typeface="+mn-ea"/>
+                <a:cs typeface="+mn-cs"/>
+              </a:rPr>
+              <a:t>2G_Orientation</a:t>
+            </a:r>
           </a:p>
         </p:txBody>
       </p:sp>
@@ -2749,7 +6894,7 @@
               <a:tabLst/>
               <a:defRPr/>
             </a:pPr>
-            <a:fld id="{B9A0AC62-E1C0-4AE5-A698-82AABA5C2E10}" type="datetimeFigureOut">
+            <a:fld id="{7027F9C7-D86D-495B-8677-D0FCAD57A2E4}" type="datetime1">
               <a:rPr kumimoji="0" lang="en-US" sz="900" b="0" i="0" u="none" strike="noStrike" kern="1200" cap="none" spc="0" normalizeH="0" baseline="0" noProof="0" smtClean="0">
                 <a:ln>
                   <a:noFill/>
@@ -2766,24 +6911,7 @@
                 <a:ea typeface="+mn-ea"/>
                 <a:cs typeface="+mn-cs"/>
               </a:rPr>
-              <a:pPr marL="0" marR="0" lvl="0" indent="0" algn="r" defTabSz="914400" rtl="0" eaLnBrk="1" fontAlgn="auto" latinLnBrk="0" hangingPunct="1">
-                <a:lnSpc>
-                  <a:spcPct val="100000"/>
-                </a:lnSpc>
-                <a:spcBef>
-                  <a:spcPts val="0"/>
-                </a:spcBef>
-                <a:spcAft>
-                  <a:spcPts val="0"/>
-                </a:spcAft>
-                <a:buClrTx/>
-                <a:buSzTx/>
-                <a:buFontTx/>
-                <a:buNone/>
-                <a:tabLst/>
-                <a:defRPr/>
-              </a:pPr>
-              <a:t>4/7/2021</a:t>
+              <a:t>04/19/2026</a:t>
             </a:fld>
             <a:endParaRPr kumimoji="0" lang="en-US" sz="900" b="0" i="0" u="none" strike="noStrike" kern="1200" cap="none" spc="0" normalizeH="0" baseline="0" noProof="0">
               <a:ln>
@@ -2836,22 +6964,25 @@
               <a:tabLst/>
               <a:defRPr/>
             </a:pPr>
-            <a:endParaRPr kumimoji="0" lang="en-US" sz="900" b="0" i="0" u="none" strike="noStrike" kern="1200" cap="none" spc="0" normalizeH="0" baseline="0" noProof="0">
-              <a:ln>
-                <a:noFill/>
-              </a:ln>
-              <a:solidFill>
-                <a:prstClr val="black">
-                  <a:tint val="75000"/>
-                </a:prstClr>
-              </a:solidFill>
-              <a:effectLst/>
-              <a:uLnTx/>
-              <a:uFillTx/>
-              <a:latin typeface="Trebuchet MS" panose="020B0603020202020204"/>
-              <a:ea typeface="+mn-ea"/>
-              <a:cs typeface="+mn-cs"/>
-            </a:endParaRPr>
+            <a:r>
+              <a:rPr kumimoji="0" lang="en-US" sz="900" b="0" i="0" u="none" strike="noStrike" kern="1200" cap="none" spc="0" normalizeH="0" baseline="0" noProof="0">
+                <a:ln>
+                  <a:noFill/>
+                </a:ln>
+                <a:solidFill>
+                  <a:prstClr val="black">
+                    <a:tint val="75000"/>
+                  </a:prstClr>
+                </a:solidFill>
+                <a:effectLst/>
+                <a:uLnTx/>
+                <a:uFillTx/>
+                <a:latin typeface="Trebuchet MS" panose="020B0603020202020204"/>
+                <a:ea typeface="+mn-ea"/>
+                <a:cs typeface="+mn-cs"/>
+              </a:rPr>
+              <a:t>2G_Orientation</a:t>
+            </a:r>
           </a:p>
         </p:txBody>
       </p:sp>
@@ -3219,7 +7350,7 @@
               <a:tabLst/>
               <a:defRPr/>
             </a:pPr>
-            <a:fld id="{B9A0AC62-E1C0-4AE5-A698-82AABA5C2E10}" type="datetimeFigureOut">
+            <a:fld id="{B791DA72-AAB6-431D-9694-5DE2D44AB267}" type="datetime1">
               <a:rPr kumimoji="0" lang="en-US" sz="900" b="0" i="0" u="none" strike="noStrike" kern="1200" cap="none" spc="0" normalizeH="0" baseline="0" noProof="0" smtClean="0">
                 <a:ln>
                   <a:noFill/>
@@ -3236,24 +7367,7 @@
                 <a:ea typeface="+mn-ea"/>
                 <a:cs typeface="+mn-cs"/>
               </a:rPr>
-              <a:pPr marL="0" marR="0" lvl="0" indent="0" algn="r" defTabSz="914400" rtl="0" eaLnBrk="1" fontAlgn="auto" latinLnBrk="0" hangingPunct="1">
-                <a:lnSpc>
-                  <a:spcPct val="100000"/>
-                </a:lnSpc>
-                <a:spcBef>
-                  <a:spcPts val="0"/>
-                </a:spcBef>
-                <a:spcAft>
-                  <a:spcPts val="0"/>
-                </a:spcAft>
-                <a:buClrTx/>
-                <a:buSzTx/>
-                <a:buFontTx/>
-                <a:buNone/>
-                <a:tabLst/>
-                <a:defRPr/>
-              </a:pPr>
-              <a:t>4/7/2021</a:t>
+              <a:t>04/19/2026</a:t>
             </a:fld>
             <a:endParaRPr kumimoji="0" lang="en-US" sz="900" b="0" i="0" u="none" strike="noStrike" kern="1200" cap="none" spc="0" normalizeH="0" baseline="0" noProof="0">
               <a:ln>
@@ -3306,22 +7420,25 @@
               <a:tabLst/>
               <a:defRPr/>
             </a:pPr>
-            <a:endParaRPr kumimoji="0" lang="en-US" sz="900" b="0" i="0" u="none" strike="noStrike" kern="1200" cap="none" spc="0" normalizeH="0" baseline="0" noProof="0">
-              <a:ln>
-                <a:noFill/>
-              </a:ln>
-              <a:solidFill>
-                <a:prstClr val="black">
-                  <a:tint val="75000"/>
-                </a:prstClr>
-              </a:solidFill>
-              <a:effectLst/>
-              <a:uLnTx/>
-              <a:uFillTx/>
-              <a:latin typeface="Trebuchet MS" panose="020B0603020202020204"/>
-              <a:ea typeface="+mn-ea"/>
-              <a:cs typeface="+mn-cs"/>
-            </a:endParaRPr>
+            <a:r>
+              <a:rPr kumimoji="0" lang="en-US" sz="900" b="0" i="0" u="none" strike="noStrike" kern="1200" cap="none" spc="0" normalizeH="0" baseline="0" noProof="0">
+                <a:ln>
+                  <a:noFill/>
+                </a:ln>
+                <a:solidFill>
+                  <a:prstClr val="black">
+                    <a:tint val="75000"/>
+                  </a:prstClr>
+                </a:solidFill>
+                <a:effectLst/>
+                <a:uLnTx/>
+                <a:uFillTx/>
+                <a:latin typeface="Trebuchet MS" panose="020B0603020202020204"/>
+                <a:ea typeface="+mn-ea"/>
+                <a:cs typeface="+mn-cs"/>
+              </a:rPr>
+              <a:t>2G_Orientation</a:t>
+            </a:r>
           </a:p>
         </p:txBody>
       </p:sp>
@@ -3768,7 +7885,7 @@
               <a:tabLst/>
               <a:defRPr/>
             </a:pPr>
-            <a:fld id="{B9A0AC62-E1C0-4AE5-A698-82AABA5C2E10}" type="datetimeFigureOut">
+            <a:fld id="{52E9E89C-56F4-4B9A-BFFB-CBEAD601B834}" type="datetime1">
               <a:rPr kumimoji="0" lang="en-US" sz="900" b="0" i="0" u="none" strike="noStrike" kern="1200" cap="none" spc="0" normalizeH="0" baseline="0" noProof="0" smtClean="0">
                 <a:ln>
                   <a:noFill/>
@@ -3785,24 +7902,7 @@
                 <a:ea typeface="+mn-ea"/>
                 <a:cs typeface="+mn-cs"/>
               </a:rPr>
-              <a:pPr marL="0" marR="0" lvl="0" indent="0" algn="r" defTabSz="914400" rtl="0" eaLnBrk="1" fontAlgn="auto" latinLnBrk="0" hangingPunct="1">
-                <a:lnSpc>
-                  <a:spcPct val="100000"/>
-                </a:lnSpc>
-                <a:spcBef>
-                  <a:spcPts val="0"/>
-                </a:spcBef>
-                <a:spcAft>
-                  <a:spcPts val="0"/>
-                </a:spcAft>
-                <a:buClrTx/>
-                <a:buSzTx/>
-                <a:buFontTx/>
-                <a:buNone/>
-                <a:tabLst/>
-                <a:defRPr/>
-              </a:pPr>
-              <a:t>4/7/2021</a:t>
+              <a:t>04/19/2026</a:t>
             </a:fld>
             <a:endParaRPr kumimoji="0" lang="en-US" sz="900" b="0" i="0" u="none" strike="noStrike" kern="1200" cap="none" spc="0" normalizeH="0" baseline="0" noProof="0">
               <a:ln>
@@ -3855,22 +7955,25 @@
               <a:tabLst/>
               <a:defRPr/>
             </a:pPr>
-            <a:endParaRPr kumimoji="0" lang="en-US" sz="900" b="0" i="0" u="none" strike="noStrike" kern="1200" cap="none" spc="0" normalizeH="0" baseline="0" noProof="0">
-              <a:ln>
-                <a:noFill/>
-              </a:ln>
-              <a:solidFill>
-                <a:prstClr val="black">
-                  <a:tint val="75000"/>
-                </a:prstClr>
-              </a:solidFill>
-              <a:effectLst/>
-              <a:uLnTx/>
-              <a:uFillTx/>
-              <a:latin typeface="Trebuchet MS" panose="020B0603020202020204"/>
-              <a:ea typeface="+mn-ea"/>
-              <a:cs typeface="+mn-cs"/>
-            </a:endParaRPr>
+            <a:r>
+              <a:rPr kumimoji="0" lang="en-US" sz="900" b="0" i="0" u="none" strike="noStrike" kern="1200" cap="none" spc="0" normalizeH="0" baseline="0" noProof="0">
+                <a:ln>
+                  <a:noFill/>
+                </a:ln>
+                <a:solidFill>
+                  <a:prstClr val="black">
+                    <a:tint val="75000"/>
+                  </a:prstClr>
+                </a:solidFill>
+                <a:effectLst/>
+                <a:uLnTx/>
+                <a:uFillTx/>
+                <a:latin typeface="Trebuchet MS" panose="020B0603020202020204"/>
+                <a:ea typeface="+mn-ea"/>
+                <a:cs typeface="+mn-cs"/>
+              </a:rPr>
+              <a:t>2G_Orientation</a:t>
+            </a:r>
           </a:p>
         </p:txBody>
       </p:sp>
@@ -4094,7 +8197,7 @@
               <a:tabLst/>
               <a:defRPr/>
             </a:pPr>
-            <a:fld id="{B9A0AC62-E1C0-4AE5-A698-82AABA5C2E10}" type="datetimeFigureOut">
+            <a:fld id="{35060351-792C-446B-80A9-46D7C44B86D4}" type="datetime1">
               <a:rPr kumimoji="0" lang="en-US" sz="900" b="0" i="0" u="none" strike="noStrike" kern="1200" cap="none" spc="0" normalizeH="0" baseline="0" noProof="0" smtClean="0">
                 <a:ln>
                   <a:noFill/>
@@ -4111,24 +8214,7 @@
                 <a:ea typeface="+mn-ea"/>
                 <a:cs typeface="+mn-cs"/>
               </a:rPr>
-              <a:pPr marL="0" marR="0" lvl="0" indent="0" algn="r" defTabSz="914400" rtl="0" eaLnBrk="1" fontAlgn="auto" latinLnBrk="0" hangingPunct="1">
-                <a:lnSpc>
-                  <a:spcPct val="100000"/>
-                </a:lnSpc>
-                <a:spcBef>
-                  <a:spcPts val="0"/>
-                </a:spcBef>
-                <a:spcAft>
-                  <a:spcPts val="0"/>
-                </a:spcAft>
-                <a:buClrTx/>
-                <a:buSzTx/>
-                <a:buFontTx/>
-                <a:buNone/>
-                <a:tabLst/>
-                <a:defRPr/>
-              </a:pPr>
-              <a:t>4/7/2021</a:t>
+              <a:t>04/19/2026</a:t>
             </a:fld>
             <a:endParaRPr kumimoji="0" lang="en-US" sz="900" b="0" i="0" u="none" strike="noStrike" kern="1200" cap="none" spc="0" normalizeH="0" baseline="0" noProof="0">
               <a:ln>
@@ -4181,22 +8267,25 @@
               <a:tabLst/>
               <a:defRPr/>
             </a:pPr>
-            <a:endParaRPr kumimoji="0" lang="en-US" sz="900" b="0" i="0" u="none" strike="noStrike" kern="1200" cap="none" spc="0" normalizeH="0" baseline="0" noProof="0">
-              <a:ln>
-                <a:noFill/>
-              </a:ln>
-              <a:solidFill>
-                <a:prstClr val="black">
-                  <a:tint val="75000"/>
-                </a:prstClr>
-              </a:solidFill>
-              <a:effectLst/>
-              <a:uLnTx/>
-              <a:uFillTx/>
-              <a:latin typeface="Trebuchet MS" panose="020B0603020202020204"/>
-              <a:ea typeface="+mn-ea"/>
-              <a:cs typeface="+mn-cs"/>
-            </a:endParaRPr>
+            <a:r>
+              <a:rPr kumimoji="0" lang="en-US" sz="900" b="0" i="0" u="none" strike="noStrike" kern="1200" cap="none" spc="0" normalizeH="0" baseline="0" noProof="0">
+                <a:ln>
+                  <a:noFill/>
+                </a:ln>
+                <a:solidFill>
+                  <a:prstClr val="black">
+                    <a:tint val="75000"/>
+                  </a:prstClr>
+                </a:solidFill>
+                <a:effectLst/>
+                <a:uLnTx/>
+                <a:uFillTx/>
+                <a:latin typeface="Trebuchet MS" panose="020B0603020202020204"/>
+                <a:ea typeface="+mn-ea"/>
+                <a:cs typeface="+mn-cs"/>
+              </a:rPr>
+              <a:t>2G_Orientation</a:t>
+            </a:r>
           </a:p>
         </p:txBody>
       </p:sp>
@@ -4430,7 +8519,7 @@
               <a:tabLst/>
               <a:defRPr/>
             </a:pPr>
-            <a:fld id="{B9A0AC62-E1C0-4AE5-A698-82AABA5C2E10}" type="datetimeFigureOut">
+            <a:fld id="{8839D511-789C-43D4-9008-C3188F264771}" type="datetime1">
               <a:rPr kumimoji="0" lang="en-US" sz="900" b="0" i="0" u="none" strike="noStrike" kern="1200" cap="none" spc="0" normalizeH="0" baseline="0" noProof="0" smtClean="0">
                 <a:ln>
                   <a:noFill/>
@@ -4447,24 +8536,7 @@
                 <a:ea typeface="+mn-ea"/>
                 <a:cs typeface="+mn-cs"/>
               </a:rPr>
-              <a:pPr marL="0" marR="0" lvl="0" indent="0" algn="r" defTabSz="914400" rtl="0" eaLnBrk="1" fontAlgn="auto" latinLnBrk="0" hangingPunct="1">
-                <a:lnSpc>
-                  <a:spcPct val="100000"/>
-                </a:lnSpc>
-                <a:spcBef>
-                  <a:spcPts val="0"/>
-                </a:spcBef>
-                <a:spcAft>
-                  <a:spcPts val="0"/>
-                </a:spcAft>
-                <a:buClrTx/>
-                <a:buSzTx/>
-                <a:buFontTx/>
-                <a:buNone/>
-                <a:tabLst/>
-                <a:defRPr/>
-              </a:pPr>
-              <a:t>4/7/2021</a:t>
+              <a:t>04/19/2026</a:t>
             </a:fld>
             <a:endParaRPr kumimoji="0" lang="en-US" sz="900" b="0" i="0" u="none" strike="noStrike" kern="1200" cap="none" spc="0" normalizeH="0" baseline="0" noProof="0">
               <a:ln>
@@ -4517,22 +8589,25 @@
               <a:tabLst/>
               <a:defRPr/>
             </a:pPr>
-            <a:endParaRPr kumimoji="0" lang="en-US" sz="900" b="0" i="0" u="none" strike="noStrike" kern="1200" cap="none" spc="0" normalizeH="0" baseline="0" noProof="0">
-              <a:ln>
-                <a:noFill/>
-              </a:ln>
-              <a:solidFill>
-                <a:prstClr val="black">
-                  <a:tint val="75000"/>
-                </a:prstClr>
-              </a:solidFill>
-              <a:effectLst/>
-              <a:uLnTx/>
-              <a:uFillTx/>
-              <a:latin typeface="Trebuchet MS" panose="020B0603020202020204"/>
-              <a:ea typeface="+mn-ea"/>
-              <a:cs typeface="+mn-cs"/>
-            </a:endParaRPr>
+            <a:r>
+              <a:rPr kumimoji="0" lang="en-US" sz="900" b="0" i="0" u="none" strike="noStrike" kern="1200" cap="none" spc="0" normalizeH="0" baseline="0" noProof="0">
+                <a:ln>
+                  <a:noFill/>
+                </a:ln>
+                <a:solidFill>
+                  <a:prstClr val="black">
+                    <a:tint val="75000"/>
+                  </a:prstClr>
+                </a:solidFill>
+                <a:effectLst/>
+                <a:uLnTx/>
+                <a:uFillTx/>
+                <a:latin typeface="Trebuchet MS" panose="020B0603020202020204"/>
+                <a:ea typeface="+mn-ea"/>
+                <a:cs typeface="+mn-cs"/>
+              </a:rPr>
+              <a:t>2G_Orientation</a:t>
+            </a:r>
           </a:p>
         </p:txBody>
       </p:sp>
@@ -4756,7 +8831,7 @@
               <a:tabLst/>
               <a:defRPr/>
             </a:pPr>
-            <a:fld id="{B9A0AC62-E1C0-4AE5-A698-82AABA5C2E10}" type="datetimeFigureOut">
+            <a:fld id="{BF9EB05B-B917-477A-BCE3-78A3DD413742}" type="datetime1">
               <a:rPr kumimoji="0" lang="en-US" sz="900" b="0" i="0" u="none" strike="noStrike" kern="1200" cap="none" spc="0" normalizeH="0" baseline="0" noProof="0" smtClean="0">
                 <a:ln>
                   <a:noFill/>
@@ -4773,24 +8848,7 @@
                 <a:ea typeface="+mn-ea"/>
                 <a:cs typeface="+mn-cs"/>
               </a:rPr>
-              <a:pPr marL="0" marR="0" lvl="0" indent="0" algn="r" defTabSz="914400" rtl="0" eaLnBrk="1" fontAlgn="auto" latinLnBrk="0" hangingPunct="1">
-                <a:lnSpc>
-                  <a:spcPct val="100000"/>
-                </a:lnSpc>
-                <a:spcBef>
-                  <a:spcPts val="0"/>
-                </a:spcBef>
-                <a:spcAft>
-                  <a:spcPts val="0"/>
-                </a:spcAft>
-                <a:buClrTx/>
-                <a:buSzTx/>
-                <a:buFontTx/>
-                <a:buNone/>
-                <a:tabLst/>
-                <a:defRPr/>
-              </a:pPr>
-              <a:t>4/7/2021</a:t>
+              <a:t>04/19/2026</a:t>
             </a:fld>
             <a:endParaRPr kumimoji="0" lang="en-US" sz="900" b="0" i="0" u="none" strike="noStrike" kern="1200" cap="none" spc="0" normalizeH="0" baseline="0" noProof="0">
               <a:ln>
@@ -4843,22 +8901,25 @@
               <a:tabLst/>
               <a:defRPr/>
             </a:pPr>
-            <a:endParaRPr kumimoji="0" lang="en-US" sz="900" b="0" i="0" u="none" strike="noStrike" kern="1200" cap="none" spc="0" normalizeH="0" baseline="0" noProof="0">
-              <a:ln>
-                <a:noFill/>
-              </a:ln>
-              <a:solidFill>
-                <a:prstClr val="black">
-                  <a:tint val="75000"/>
-                </a:prstClr>
-              </a:solidFill>
-              <a:effectLst/>
-              <a:uLnTx/>
-              <a:uFillTx/>
-              <a:latin typeface="Trebuchet MS" panose="020B0603020202020204"/>
-              <a:ea typeface="+mn-ea"/>
-              <a:cs typeface="+mn-cs"/>
-            </a:endParaRPr>
+            <a:r>
+              <a:rPr kumimoji="0" lang="en-US" sz="900" b="0" i="0" u="none" strike="noStrike" kern="1200" cap="none" spc="0" normalizeH="0" baseline="0" noProof="0">
+                <a:ln>
+                  <a:noFill/>
+                </a:ln>
+                <a:solidFill>
+                  <a:prstClr val="black">
+                    <a:tint val="75000"/>
+                  </a:prstClr>
+                </a:solidFill>
+                <a:effectLst/>
+                <a:uLnTx/>
+                <a:uFillTx/>
+                <a:latin typeface="Trebuchet MS" panose="020B0603020202020204"/>
+                <a:ea typeface="+mn-ea"/>
+                <a:cs typeface="+mn-cs"/>
+              </a:rPr>
+              <a:t>2G_Orientation</a:t>
+            </a:r>
           </a:p>
         </p:txBody>
       </p:sp>
@@ -5162,7 +9223,7 @@
               <a:tabLst/>
               <a:defRPr/>
             </a:pPr>
-            <a:fld id="{B9A0AC62-E1C0-4AE5-A698-82AABA5C2E10}" type="datetimeFigureOut">
+            <a:fld id="{C6CED5E8-89ED-4AFD-8D45-2DD51A0D20DE}" type="datetime1">
               <a:rPr kumimoji="0" lang="en-US" sz="900" b="0" i="0" u="none" strike="noStrike" kern="1200" cap="none" spc="0" normalizeH="0" baseline="0" noProof="0" smtClean="0">
                 <a:ln>
                   <a:noFill/>
@@ -5179,24 +9240,7 @@
                 <a:ea typeface="+mn-ea"/>
                 <a:cs typeface="+mn-cs"/>
               </a:rPr>
-              <a:pPr marL="0" marR="0" lvl="0" indent="0" algn="r" defTabSz="914400" rtl="0" eaLnBrk="1" fontAlgn="auto" latinLnBrk="0" hangingPunct="1">
-                <a:lnSpc>
-                  <a:spcPct val="100000"/>
-                </a:lnSpc>
-                <a:spcBef>
-                  <a:spcPts val="0"/>
-                </a:spcBef>
-                <a:spcAft>
-                  <a:spcPts val="0"/>
-                </a:spcAft>
-                <a:buClrTx/>
-                <a:buSzTx/>
-                <a:buFontTx/>
-                <a:buNone/>
-                <a:tabLst/>
-                <a:defRPr/>
-              </a:pPr>
-              <a:t>4/7/2021</a:t>
+              <a:t>04/19/2026</a:t>
             </a:fld>
             <a:endParaRPr kumimoji="0" lang="en-US" sz="900" b="0" i="0" u="none" strike="noStrike" kern="1200" cap="none" spc="0" normalizeH="0" baseline="0" noProof="0">
               <a:ln>
@@ -5249,22 +9293,25 @@
               <a:tabLst/>
               <a:defRPr/>
             </a:pPr>
-            <a:endParaRPr kumimoji="0" lang="en-US" sz="900" b="0" i="0" u="none" strike="noStrike" kern="1200" cap="none" spc="0" normalizeH="0" baseline="0" noProof="0">
-              <a:ln>
-                <a:noFill/>
-              </a:ln>
-              <a:solidFill>
-                <a:prstClr val="black">
-                  <a:tint val="75000"/>
-                </a:prstClr>
-              </a:solidFill>
-              <a:effectLst/>
-              <a:uLnTx/>
-              <a:uFillTx/>
-              <a:latin typeface="Trebuchet MS" panose="020B0603020202020204"/>
-              <a:ea typeface="+mn-ea"/>
-              <a:cs typeface="+mn-cs"/>
-            </a:endParaRPr>
+            <a:r>
+              <a:rPr kumimoji="0" lang="en-US" sz="900" b="0" i="0" u="none" strike="noStrike" kern="1200" cap="none" spc="0" normalizeH="0" baseline="0" noProof="0">
+                <a:ln>
+                  <a:noFill/>
+                </a:ln>
+                <a:solidFill>
+                  <a:prstClr val="black">
+                    <a:tint val="75000"/>
+                  </a:prstClr>
+                </a:solidFill>
+                <a:effectLst/>
+                <a:uLnTx/>
+                <a:uFillTx/>
+                <a:latin typeface="Trebuchet MS" panose="020B0603020202020204"/>
+                <a:ea typeface="+mn-ea"/>
+                <a:cs typeface="+mn-cs"/>
+              </a:rPr>
+              <a:t>2G_Orientation</a:t>
+            </a:r>
           </a:p>
         </p:txBody>
       </p:sp>
@@ -5550,7 +9597,7 @@
               <a:tabLst/>
               <a:defRPr/>
             </a:pPr>
-            <a:fld id="{B9A0AC62-E1C0-4AE5-A698-82AABA5C2E10}" type="datetimeFigureOut">
+            <a:fld id="{C47AFB33-D634-4A02-99D3-B17684DE0E38}" type="datetime1">
               <a:rPr kumimoji="0" lang="en-US" sz="900" b="0" i="0" u="none" strike="noStrike" kern="1200" cap="none" spc="0" normalizeH="0" baseline="0" noProof="0" smtClean="0">
                 <a:ln>
                   <a:noFill/>
@@ -5567,24 +9614,7 @@
                 <a:ea typeface="+mn-ea"/>
                 <a:cs typeface="+mn-cs"/>
               </a:rPr>
-              <a:pPr marL="0" marR="0" lvl="0" indent="0" algn="r" defTabSz="914400" rtl="0" eaLnBrk="1" fontAlgn="auto" latinLnBrk="0" hangingPunct="1">
-                <a:lnSpc>
-                  <a:spcPct val="100000"/>
-                </a:lnSpc>
-                <a:spcBef>
-                  <a:spcPts val="0"/>
-                </a:spcBef>
-                <a:spcAft>
-                  <a:spcPts val="0"/>
-                </a:spcAft>
-                <a:buClrTx/>
-                <a:buSzTx/>
-                <a:buFontTx/>
-                <a:buNone/>
-                <a:tabLst/>
-                <a:defRPr/>
-              </a:pPr>
-              <a:t>4/7/2021</a:t>
+              <a:t>04/19/2026</a:t>
             </a:fld>
             <a:endParaRPr kumimoji="0" lang="en-US" sz="900" b="0" i="0" u="none" strike="noStrike" kern="1200" cap="none" spc="0" normalizeH="0" baseline="0" noProof="0">
               <a:ln>
@@ -5637,22 +9667,25 @@
               <a:tabLst/>
               <a:defRPr/>
             </a:pPr>
-            <a:endParaRPr kumimoji="0" lang="en-US" sz="900" b="0" i="0" u="none" strike="noStrike" kern="1200" cap="none" spc="0" normalizeH="0" baseline="0" noProof="0">
-              <a:ln>
-                <a:noFill/>
-              </a:ln>
-              <a:solidFill>
-                <a:prstClr val="black">
-                  <a:tint val="75000"/>
-                </a:prstClr>
-              </a:solidFill>
-              <a:effectLst/>
-              <a:uLnTx/>
-              <a:uFillTx/>
-              <a:latin typeface="Trebuchet MS" panose="020B0603020202020204"/>
-              <a:ea typeface="+mn-ea"/>
-              <a:cs typeface="+mn-cs"/>
-            </a:endParaRPr>
+            <a:r>
+              <a:rPr kumimoji="0" lang="en-US" sz="900" b="0" i="0" u="none" strike="noStrike" kern="1200" cap="none" spc="0" normalizeH="0" baseline="0" noProof="0">
+                <a:ln>
+                  <a:noFill/>
+                </a:ln>
+                <a:solidFill>
+                  <a:prstClr val="black">
+                    <a:tint val="75000"/>
+                  </a:prstClr>
+                </a:solidFill>
+                <a:effectLst/>
+                <a:uLnTx/>
+                <a:uFillTx/>
+                <a:latin typeface="Trebuchet MS" panose="020B0603020202020204"/>
+                <a:ea typeface="+mn-ea"/>
+                <a:cs typeface="+mn-cs"/>
+              </a:rPr>
+              <a:t>2G_Orientation</a:t>
+            </a:r>
           </a:p>
         </p:txBody>
       </p:sp>
@@ -6083,7 +10116,7 @@
               <a:tabLst/>
               <a:defRPr/>
             </a:pPr>
-            <a:fld id="{B9A0AC62-E1C0-4AE5-A698-82AABA5C2E10}" type="datetimeFigureOut">
+            <a:fld id="{0B6E675B-6B7D-4C55-BD17-4D9BEB4EDEF5}" type="datetime1">
               <a:rPr kumimoji="0" lang="en-US" sz="900" b="0" i="0" u="none" strike="noStrike" kern="1200" cap="none" spc="0" normalizeH="0" baseline="0" noProof="0" smtClean="0">
                 <a:ln>
                   <a:noFill/>
@@ -6100,24 +10133,7 @@
                 <a:ea typeface="+mn-ea"/>
                 <a:cs typeface="+mn-cs"/>
               </a:rPr>
-              <a:pPr marL="0" marR="0" lvl="0" indent="0" algn="r" defTabSz="914400" rtl="0" eaLnBrk="1" fontAlgn="auto" latinLnBrk="0" hangingPunct="1">
-                <a:lnSpc>
-                  <a:spcPct val="100000"/>
-                </a:lnSpc>
-                <a:spcBef>
-                  <a:spcPts val="0"/>
-                </a:spcBef>
-                <a:spcAft>
-                  <a:spcPts val="0"/>
-                </a:spcAft>
-                <a:buClrTx/>
-                <a:buSzTx/>
-                <a:buFontTx/>
-                <a:buNone/>
-                <a:tabLst/>
-                <a:defRPr/>
-              </a:pPr>
-              <a:t>4/7/2021</a:t>
+              <a:t>04/19/2026</a:t>
             </a:fld>
             <a:endParaRPr kumimoji="0" lang="en-US" sz="900" b="0" i="0" u="none" strike="noStrike" kern="1200" cap="none" spc="0" normalizeH="0" baseline="0" noProof="0">
               <a:ln>
@@ -6170,22 +10186,25 @@
               <a:tabLst/>
               <a:defRPr/>
             </a:pPr>
-            <a:endParaRPr kumimoji="0" lang="en-US" sz="900" b="0" i="0" u="none" strike="noStrike" kern="1200" cap="none" spc="0" normalizeH="0" baseline="0" noProof="0">
-              <a:ln>
-                <a:noFill/>
-              </a:ln>
-              <a:solidFill>
-                <a:prstClr val="black">
-                  <a:tint val="75000"/>
-                </a:prstClr>
-              </a:solidFill>
-              <a:effectLst/>
-              <a:uLnTx/>
-              <a:uFillTx/>
-              <a:latin typeface="Trebuchet MS" panose="020B0603020202020204"/>
-              <a:ea typeface="+mn-ea"/>
-              <a:cs typeface="+mn-cs"/>
-            </a:endParaRPr>
+            <a:r>
+              <a:rPr kumimoji="0" lang="en-US" sz="900" b="0" i="0" u="none" strike="noStrike" kern="1200" cap="none" spc="0" normalizeH="0" baseline="0" noProof="0">
+                <a:ln>
+                  <a:noFill/>
+                </a:ln>
+                <a:solidFill>
+                  <a:prstClr val="black">
+                    <a:tint val="75000"/>
+                  </a:prstClr>
+                </a:solidFill>
+                <a:effectLst/>
+                <a:uLnTx/>
+                <a:uFillTx/>
+                <a:latin typeface="Trebuchet MS" panose="020B0603020202020204"/>
+                <a:ea typeface="+mn-ea"/>
+                <a:cs typeface="+mn-cs"/>
+              </a:rPr>
+              <a:t>2G_Orientation</a:t>
+            </a:r>
           </a:p>
         </p:txBody>
       </p:sp>
@@ -6365,7 +10384,7 @@
               <a:tabLst/>
               <a:defRPr/>
             </a:pPr>
-            <a:fld id="{B9A0AC62-E1C0-4AE5-A698-82AABA5C2E10}" type="datetimeFigureOut">
+            <a:fld id="{A0A4B653-8D0B-4885-904A-A8D97EB139F3}" type="datetime1">
               <a:rPr kumimoji="0" lang="en-US" sz="900" b="0" i="0" u="none" strike="noStrike" kern="1200" cap="none" spc="0" normalizeH="0" baseline="0" noProof="0" smtClean="0">
                 <a:ln>
                   <a:noFill/>
@@ -6382,24 +10401,7 @@
                 <a:ea typeface="+mn-ea"/>
                 <a:cs typeface="+mn-cs"/>
               </a:rPr>
-              <a:pPr marL="0" marR="0" lvl="0" indent="0" algn="r" defTabSz="914400" rtl="0" eaLnBrk="1" fontAlgn="auto" latinLnBrk="0" hangingPunct="1">
-                <a:lnSpc>
-                  <a:spcPct val="100000"/>
-                </a:lnSpc>
-                <a:spcBef>
-                  <a:spcPts val="0"/>
-                </a:spcBef>
-                <a:spcAft>
-                  <a:spcPts val="0"/>
-                </a:spcAft>
-                <a:buClrTx/>
-                <a:buSzTx/>
-                <a:buFontTx/>
-                <a:buNone/>
-                <a:tabLst/>
-                <a:defRPr/>
-              </a:pPr>
-              <a:t>4/7/2021</a:t>
+              <a:t>04/19/2026</a:t>
             </a:fld>
             <a:endParaRPr kumimoji="0" lang="en-US" sz="900" b="0" i="0" u="none" strike="noStrike" kern="1200" cap="none" spc="0" normalizeH="0" baseline="0" noProof="0">
               <a:ln>
@@ -6452,22 +10454,25 @@
               <a:tabLst/>
               <a:defRPr/>
             </a:pPr>
-            <a:endParaRPr kumimoji="0" lang="en-US" sz="900" b="0" i="0" u="none" strike="noStrike" kern="1200" cap="none" spc="0" normalizeH="0" baseline="0" noProof="0">
-              <a:ln>
-                <a:noFill/>
-              </a:ln>
-              <a:solidFill>
-                <a:prstClr val="black">
-                  <a:tint val="75000"/>
-                </a:prstClr>
-              </a:solidFill>
-              <a:effectLst/>
-              <a:uLnTx/>
-              <a:uFillTx/>
-              <a:latin typeface="Trebuchet MS" panose="020B0603020202020204"/>
-              <a:ea typeface="+mn-ea"/>
-              <a:cs typeface="+mn-cs"/>
-            </a:endParaRPr>
+            <a:r>
+              <a:rPr kumimoji="0" lang="en-US" sz="900" b="0" i="0" u="none" strike="noStrike" kern="1200" cap="none" spc="0" normalizeH="0" baseline="0" noProof="0">
+                <a:ln>
+                  <a:noFill/>
+                </a:ln>
+                <a:solidFill>
+                  <a:prstClr val="black">
+                    <a:tint val="75000"/>
+                  </a:prstClr>
+                </a:solidFill>
+                <a:effectLst/>
+                <a:uLnTx/>
+                <a:uFillTx/>
+                <a:latin typeface="Trebuchet MS" panose="020B0603020202020204"/>
+                <a:ea typeface="+mn-ea"/>
+                <a:cs typeface="+mn-cs"/>
+              </a:rPr>
+              <a:t>2G_Orientation</a:t>
+            </a:r>
           </a:p>
         </p:txBody>
       </p:sp>
@@ -6616,7 +10621,7 @@
               <a:tabLst/>
               <a:defRPr/>
             </a:pPr>
-            <a:fld id="{B9A0AC62-E1C0-4AE5-A698-82AABA5C2E10}" type="datetimeFigureOut">
+            <a:fld id="{796C1F63-9A87-4E85-B162-A5216B7D2281}" type="datetime1">
               <a:rPr kumimoji="0" lang="en-US" sz="900" b="0" i="0" u="none" strike="noStrike" kern="1200" cap="none" spc="0" normalizeH="0" baseline="0" noProof="0" smtClean="0">
                 <a:ln>
                   <a:noFill/>
@@ -6633,24 +10638,7 @@
                 <a:ea typeface="+mn-ea"/>
                 <a:cs typeface="+mn-cs"/>
               </a:rPr>
-              <a:pPr marL="0" marR="0" lvl="0" indent="0" algn="r" defTabSz="914400" rtl="0" eaLnBrk="1" fontAlgn="auto" latinLnBrk="0" hangingPunct="1">
-                <a:lnSpc>
-                  <a:spcPct val="100000"/>
-                </a:lnSpc>
-                <a:spcBef>
-                  <a:spcPts val="0"/>
-                </a:spcBef>
-                <a:spcAft>
-                  <a:spcPts val="0"/>
-                </a:spcAft>
-                <a:buClrTx/>
-                <a:buSzTx/>
-                <a:buFontTx/>
-                <a:buNone/>
-                <a:tabLst/>
-                <a:defRPr/>
-              </a:pPr>
-              <a:t>4/7/2021</a:t>
+              <a:t>04/19/2026</a:t>
             </a:fld>
             <a:endParaRPr kumimoji="0" lang="en-US" sz="900" b="0" i="0" u="none" strike="noStrike" kern="1200" cap="none" spc="0" normalizeH="0" baseline="0" noProof="0">
               <a:ln>
@@ -6703,22 +10691,25 @@
               <a:tabLst/>
               <a:defRPr/>
             </a:pPr>
-            <a:endParaRPr kumimoji="0" lang="en-US" sz="900" b="0" i="0" u="none" strike="noStrike" kern="1200" cap="none" spc="0" normalizeH="0" baseline="0" noProof="0">
-              <a:ln>
-                <a:noFill/>
-              </a:ln>
-              <a:solidFill>
-                <a:prstClr val="black">
-                  <a:tint val="75000"/>
-                </a:prstClr>
-              </a:solidFill>
-              <a:effectLst/>
-              <a:uLnTx/>
-              <a:uFillTx/>
-              <a:latin typeface="Trebuchet MS" panose="020B0603020202020204"/>
-              <a:ea typeface="+mn-ea"/>
-              <a:cs typeface="+mn-cs"/>
-            </a:endParaRPr>
+            <a:r>
+              <a:rPr kumimoji="0" lang="en-US" sz="900" b="0" i="0" u="none" strike="noStrike" kern="1200" cap="none" spc="0" normalizeH="0" baseline="0" noProof="0">
+                <a:ln>
+                  <a:noFill/>
+                </a:ln>
+                <a:solidFill>
+                  <a:prstClr val="black">
+                    <a:tint val="75000"/>
+                  </a:prstClr>
+                </a:solidFill>
+                <a:effectLst/>
+                <a:uLnTx/>
+                <a:uFillTx/>
+                <a:latin typeface="Trebuchet MS" panose="020B0603020202020204"/>
+                <a:ea typeface="+mn-ea"/>
+                <a:cs typeface="+mn-cs"/>
+              </a:rPr>
+              <a:t>2G_Orientation</a:t>
+            </a:r>
           </a:p>
         </p:txBody>
       </p:sp>
@@ -7030,7 +11021,7 @@
               <a:tabLst/>
               <a:defRPr/>
             </a:pPr>
-            <a:fld id="{B9A0AC62-E1C0-4AE5-A698-82AABA5C2E10}" type="datetimeFigureOut">
+            <a:fld id="{96514D86-AB00-473B-876E-F1767B05D081}" type="datetime1">
               <a:rPr kumimoji="0" lang="en-US" sz="900" b="0" i="0" u="none" strike="noStrike" kern="1200" cap="none" spc="0" normalizeH="0" baseline="0" noProof="0" smtClean="0">
                 <a:ln>
                   <a:noFill/>
@@ -7047,24 +11038,7 @@
                 <a:ea typeface="+mn-ea"/>
                 <a:cs typeface="+mn-cs"/>
               </a:rPr>
-              <a:pPr marL="0" marR="0" lvl="0" indent="0" algn="r" defTabSz="914400" rtl="0" eaLnBrk="1" fontAlgn="auto" latinLnBrk="0" hangingPunct="1">
-                <a:lnSpc>
-                  <a:spcPct val="100000"/>
-                </a:lnSpc>
-                <a:spcBef>
-                  <a:spcPts val="0"/>
-                </a:spcBef>
-                <a:spcAft>
-                  <a:spcPts val="0"/>
-                </a:spcAft>
-                <a:buClrTx/>
-                <a:buSzTx/>
-                <a:buFontTx/>
-                <a:buNone/>
-                <a:tabLst/>
-                <a:defRPr/>
-              </a:pPr>
-              <a:t>4/7/2021</a:t>
+              <a:t>04/19/2026</a:t>
             </a:fld>
             <a:endParaRPr kumimoji="0" lang="en-US" sz="900" b="0" i="0" u="none" strike="noStrike" kern="1200" cap="none" spc="0" normalizeH="0" baseline="0" noProof="0">
               <a:ln>
@@ -7117,22 +11091,25 @@
               <a:tabLst/>
               <a:defRPr/>
             </a:pPr>
-            <a:endParaRPr kumimoji="0" lang="en-US" sz="900" b="0" i="0" u="none" strike="noStrike" kern="1200" cap="none" spc="0" normalizeH="0" baseline="0" noProof="0">
-              <a:ln>
-                <a:noFill/>
-              </a:ln>
-              <a:solidFill>
-                <a:prstClr val="black">
-                  <a:tint val="75000"/>
-                </a:prstClr>
-              </a:solidFill>
-              <a:effectLst/>
-              <a:uLnTx/>
-              <a:uFillTx/>
-              <a:latin typeface="Trebuchet MS" panose="020B0603020202020204"/>
-              <a:ea typeface="+mn-ea"/>
-              <a:cs typeface="+mn-cs"/>
-            </a:endParaRPr>
+            <a:r>
+              <a:rPr kumimoji="0" lang="en-US" sz="900" b="0" i="0" u="none" strike="noStrike" kern="1200" cap="none" spc="0" normalizeH="0" baseline="0" noProof="0">
+                <a:ln>
+                  <a:noFill/>
+                </a:ln>
+                <a:solidFill>
+                  <a:prstClr val="black">
+                    <a:tint val="75000"/>
+                  </a:prstClr>
+                </a:solidFill>
+                <a:effectLst/>
+                <a:uLnTx/>
+                <a:uFillTx/>
+                <a:latin typeface="Trebuchet MS" panose="020B0603020202020204"/>
+                <a:ea typeface="+mn-ea"/>
+                <a:cs typeface="+mn-cs"/>
+              </a:rPr>
+              <a:t>2G_Orientation</a:t>
+            </a:r>
           </a:p>
         </p:txBody>
       </p:sp>
@@ -7449,22 +11426,25 @@
               <a:tabLst/>
               <a:defRPr/>
             </a:pPr>
-            <a:endParaRPr kumimoji="0" lang="en-US" sz="900" b="0" i="0" u="none" strike="noStrike" kern="1200" cap="none" spc="0" normalizeH="0" baseline="0" noProof="0">
-              <a:ln>
-                <a:noFill/>
-              </a:ln>
-              <a:solidFill>
-                <a:prstClr val="black">
-                  <a:tint val="75000"/>
-                </a:prstClr>
-              </a:solidFill>
-              <a:effectLst/>
-              <a:uLnTx/>
-              <a:uFillTx/>
-              <a:latin typeface="Trebuchet MS" panose="020B0603020202020204"/>
-              <a:ea typeface="+mn-ea"/>
-              <a:cs typeface="+mn-cs"/>
-            </a:endParaRPr>
+            <a:r>
+              <a:rPr kumimoji="0" lang="en-US" sz="900" b="0" i="0" u="none" strike="noStrike" kern="1200" cap="none" spc="0" normalizeH="0" baseline="0" noProof="0">
+                <a:ln>
+                  <a:noFill/>
+                </a:ln>
+                <a:solidFill>
+                  <a:prstClr val="black">
+                    <a:tint val="75000"/>
+                  </a:prstClr>
+                </a:solidFill>
+                <a:effectLst/>
+                <a:uLnTx/>
+                <a:uFillTx/>
+                <a:latin typeface="Trebuchet MS" panose="020B0603020202020204"/>
+                <a:ea typeface="+mn-ea"/>
+                <a:cs typeface="+mn-cs"/>
+              </a:rPr>
+              <a:t>2G_Orientation</a:t>
+            </a:r>
           </a:p>
         </p:txBody>
       </p:sp>
@@ -7583,7 +11563,7 @@
               <a:tabLst/>
               <a:defRPr/>
             </a:pPr>
-            <a:fld id="{B9A0AC62-E1C0-4AE5-A698-82AABA5C2E10}" type="datetimeFigureOut">
+            <a:fld id="{8322FC2F-C589-4822-9743-232287C9D42B}" type="datetime1">
               <a:rPr kumimoji="0" lang="en-US" sz="900" b="0" i="0" u="none" strike="noStrike" kern="1200" cap="none" spc="0" normalizeH="0" baseline="0" noProof="0" smtClean="0">
                 <a:ln>
                   <a:noFill/>
@@ -7600,24 +11580,7 @@
                 <a:ea typeface="+mn-ea"/>
                 <a:cs typeface="+mn-cs"/>
               </a:rPr>
-              <a:pPr marL="0" marR="0" lvl="0" indent="0" algn="r" defTabSz="914400" rtl="0" eaLnBrk="1" fontAlgn="auto" latinLnBrk="0" hangingPunct="1">
-                <a:lnSpc>
-                  <a:spcPct val="100000"/>
-                </a:lnSpc>
-                <a:spcBef>
-                  <a:spcPts val="0"/>
-                </a:spcBef>
-                <a:spcAft>
-                  <a:spcPts val="0"/>
-                </a:spcAft>
-                <a:buClrTx/>
-                <a:buSzTx/>
-                <a:buFontTx/>
-                <a:buNone/>
-                <a:tabLst/>
-                <a:defRPr/>
-              </a:pPr>
-              <a:t>4/7/2021</a:t>
+              <a:t>04/19/2026</a:t>
             </a:fld>
             <a:endParaRPr kumimoji="0" lang="en-US" sz="900" b="0" i="0" u="none" strike="noStrike" kern="1200" cap="none" spc="0" normalizeH="0" baseline="0" noProof="0">
               <a:ln>
@@ -7823,6 +11786,13 @@
               <a:schemeClr val="lt1"/>
             </a:fontRef>
           </p:style>
+          <p:txBody>
+            <a:bodyPr/>
+            <a:lstStyle/>
+            <a:p>
+              <a:endParaRPr lang="en-US"/>
+            </a:p>
+          </p:txBody>
         </p:sp>
         <p:sp>
           <p:nvSpPr>
@@ -7886,6 +11856,13 @@
               <a:schemeClr val="lt1"/>
             </a:fontRef>
           </p:style>
+          <p:txBody>
+            <a:bodyPr/>
+            <a:lstStyle/>
+            <a:p>
+              <a:endParaRPr lang="en-US"/>
+            </a:p>
+          </p:txBody>
         </p:sp>
         <p:sp>
           <p:nvSpPr>
@@ -7928,6 +11905,13 @@
               <a:schemeClr val="lt1"/>
             </a:fontRef>
           </p:style>
+          <p:txBody>
+            <a:bodyPr/>
+            <a:lstStyle/>
+            <a:p>
+              <a:endParaRPr lang="en-US"/>
+            </a:p>
+          </p:txBody>
         </p:sp>
         <p:sp>
           <p:nvSpPr>
@@ -7992,6 +11976,13 @@
               <a:schemeClr val="lt1"/>
             </a:fontRef>
           </p:style>
+          <p:txBody>
+            <a:bodyPr/>
+            <a:lstStyle/>
+            <a:p>
+              <a:endParaRPr lang="en-US"/>
+            </a:p>
+          </p:txBody>
         </p:sp>
         <p:sp>
           <p:nvSpPr>
@@ -8055,6 +12046,13 @@
               <a:schemeClr val="lt1"/>
             </a:fontRef>
           </p:style>
+          <p:txBody>
+            <a:bodyPr/>
+            <a:lstStyle/>
+            <a:p>
+              <a:endParaRPr lang="en-US"/>
+            </a:p>
+          </p:txBody>
         </p:sp>
         <p:sp>
           <p:nvSpPr>
@@ -8119,6 +12117,13 @@
               <a:schemeClr val="lt1"/>
             </a:fontRef>
           </p:style>
+          <p:txBody>
+            <a:bodyPr/>
+            <a:lstStyle/>
+            <a:p>
+              <a:endParaRPr lang="en-US"/>
+            </a:p>
+          </p:txBody>
         </p:sp>
         <p:sp>
           <p:nvSpPr>
@@ -8161,6 +12166,13 @@
               <a:schemeClr val="lt1"/>
             </a:fontRef>
           </p:style>
+          <p:txBody>
+            <a:bodyPr/>
+            <a:lstStyle/>
+            <a:p>
+              <a:endParaRPr lang="en-US"/>
+            </a:p>
+          </p:txBody>
         </p:sp>
         <p:sp>
           <p:nvSpPr>
@@ -8202,6 +12214,13 @@
               <a:schemeClr val="lt1"/>
             </a:fontRef>
           </p:style>
+          <p:txBody>
+            <a:bodyPr/>
+            <a:lstStyle/>
+            <a:p>
+              <a:endParaRPr lang="en-US"/>
+            </a:p>
+          </p:txBody>
         </p:sp>
       </p:grpSp>
       <p:sp>
@@ -8349,7 +12368,7 @@
               <a:tabLst/>
               <a:defRPr/>
             </a:pPr>
-            <a:fld id="{B9A0AC62-E1C0-4AE5-A698-82AABA5C2E10}" type="datetimeFigureOut">
+            <a:fld id="{AEC37356-AFA6-4FF9-956A-63B718CE80FA}" type="datetime1">
               <a:rPr kumimoji="0" lang="en-US" sz="900" b="0" i="0" u="none" strike="noStrike" kern="1200" cap="none" spc="0" normalizeH="0" baseline="0" noProof="0" smtClean="0">
                 <a:ln>
                   <a:noFill/>
@@ -8366,24 +12385,7 @@
                 <a:ea typeface="+mn-ea"/>
                 <a:cs typeface="+mn-cs"/>
               </a:rPr>
-              <a:pPr marL="0" marR="0" lvl="0" indent="0" algn="r" defTabSz="914400" rtl="0" eaLnBrk="1" fontAlgn="auto" latinLnBrk="0" hangingPunct="1">
-                <a:lnSpc>
-                  <a:spcPct val="100000"/>
-                </a:lnSpc>
-                <a:spcBef>
-                  <a:spcPts val="0"/>
-                </a:spcBef>
-                <a:spcAft>
-                  <a:spcPts val="0"/>
-                </a:spcAft>
-                <a:buClrTx/>
-                <a:buSzTx/>
-                <a:buFontTx/>
-                <a:buNone/>
-                <a:tabLst/>
-                <a:defRPr/>
-              </a:pPr>
-              <a:t>4/7/2021</a:t>
+              <a:t>04/19/2026</a:t>
             </a:fld>
             <a:endParaRPr kumimoji="0" lang="en-US" sz="900" b="0" i="0" u="none" strike="noStrike" kern="1200" cap="none" spc="0" normalizeH="0" baseline="0" noProof="0">
               <a:ln>
@@ -8454,22 +12456,25 @@
               <a:tabLst/>
               <a:defRPr/>
             </a:pPr>
-            <a:endParaRPr kumimoji="0" lang="en-US" sz="900" b="0" i="0" u="none" strike="noStrike" kern="1200" cap="none" spc="0" normalizeH="0" baseline="0" noProof="0">
-              <a:ln>
-                <a:noFill/>
-              </a:ln>
-              <a:solidFill>
-                <a:prstClr val="black">
-                  <a:tint val="75000"/>
-                </a:prstClr>
-              </a:solidFill>
-              <a:effectLst/>
-              <a:uLnTx/>
-              <a:uFillTx/>
-              <a:latin typeface="Trebuchet MS" panose="020B0603020202020204"/>
-              <a:ea typeface="+mn-ea"/>
-              <a:cs typeface="+mn-cs"/>
-            </a:endParaRPr>
+            <a:r>
+              <a:rPr kumimoji="0" lang="en-US" sz="900" b="0" i="0" u="none" strike="noStrike" kern="1200" cap="none" spc="0" normalizeH="0" baseline="0" noProof="0">
+                <a:ln>
+                  <a:noFill/>
+                </a:ln>
+                <a:solidFill>
+                  <a:prstClr val="black">
+                    <a:tint val="75000"/>
+                  </a:prstClr>
+                </a:solidFill>
+                <a:effectLst/>
+                <a:uLnTx/>
+                <a:uFillTx/>
+                <a:latin typeface="Trebuchet MS" panose="020B0603020202020204"/>
+                <a:ea typeface="+mn-ea"/>
+                <a:cs typeface="+mn-cs"/>
+              </a:rPr>
+              <a:t>2G_Orientation</a:t>
+            </a:r>
           </a:p>
         </p:txBody>
       </p:sp>
@@ -8601,6 +12606,7 @@
   <p:transition spd="med">
     <p:wipe dir="r"/>
   </p:transition>
+  <p:hf hdr="0"/>
   <p:txStyles>
     <p:titleStyle>
       <a:lvl1pPr algn="l" defTabSz="457200" rtl="0" eaLnBrk="1" latinLnBrk="0" hangingPunct="1">
@@ -9027,7 +13033,7 @@
       </p:grpSpPr>
       <p:pic>
         <p:nvPicPr>
-          <p:cNvPr id="7" name="Picture 6#@#TpZ+vKllpUNkWegIuix5YO+ZVtkRRdK7Hlo2Vem9vHOi0xcoJj/VLoQPnY8oZFKIdnDC/jzs4D7D8yKCPXHd0z8aLRDl0CA3-~Xfv8U3bO7hQYunLY9b8P6Q==" descr=""/>
+          <p:cNvPr id="7" name="Picture 6#@#TpZ+vKllpUNkWegIuix5YO+ZVtkRRdK7Hlo2Vem9vHOi0xcoJj/VLoQPnY8oZFKIdnDC/jzs4D7D8yKCPXHd0z8aLRDl0CA3-~Xfv8U3bO7hQYunLY9b8P6Q=="/>
           <p:cNvPicPr>
             <a:picLocks noChangeAspect="1"/>
           </p:cNvPicPr>
@@ -9035,18 +13041,28 @@
         </p:nvPicPr>
         <p:blipFill>
           <a:blip r:embed="rId2"/>
-          <a:srcRect t="10655" b="10655"/>
-          <a:stretch/>
+          <a:srcRect l="5000" t="10655" b="10655"/>
+          <a:stretch>
+            <a:fillRect/>
+          </a:stretch>
         </p:blipFill>
         <p:spPr>
           <a:xfrm>
-            <a:off x="1" y="10"/>
-            <a:ext cx="12191999" cy="6857990"/>
+            <a:off x="609599" y="1828800"/>
+            <a:ext cx="5405128" cy="3200400"/>
           </a:xfrm>
           <a:prstGeom prst="rect">
             <a:avLst/>
           </a:prstGeom>
           <a:noFill/>
+          <a:effectLst>
+            <a:glow rad="101600">
+              <a:schemeClr val="accent1">
+                <a:satMod val="175000"/>
+                <a:alpha val="40000"/>
+              </a:schemeClr>
+            </a:glow>
+          </a:effectLst>
         </p:spPr>
       </p:pic>
       <p:sp>
@@ -9106,6 +13122,13 @@
             <a:schemeClr val="lt1"/>
           </a:fontRef>
         </p:style>
+        <p:txBody>
+          <a:bodyPr/>
+          <a:lstStyle/>
+          <a:p>
+            <a:endParaRPr lang="en-US"/>
+          </a:p>
+        </p:txBody>
       </p:sp>
       <p:sp>
         <p:nvSpPr>
@@ -9360,6 +13383,13 @@
             <a:schemeClr val="lt1"/>
           </a:fontRef>
         </p:style>
+        <p:txBody>
+          <a:bodyPr/>
+          <a:lstStyle/>
+          <a:p>
+            <a:endParaRPr lang="en-US"/>
+          </a:p>
+        </p:txBody>
       </p:sp>
       <p:sp>
         <p:nvSpPr>
@@ -9440,6 +13470,13 @@
             <a:schemeClr val="lt1"/>
           </a:fontRef>
         </p:style>
+        <p:txBody>
+          <a:bodyPr/>
+          <a:lstStyle/>
+          <a:p>
+            <a:endParaRPr lang="en-US"/>
+          </a:p>
+        </p:txBody>
       </p:sp>
       <p:sp>
         <p:nvSpPr>
@@ -9498,6 +13535,13 @@
             <a:schemeClr val="lt1"/>
           </a:fontRef>
         </p:style>
+        <p:txBody>
+          <a:bodyPr/>
+          <a:lstStyle/>
+          <a:p>
+            <a:endParaRPr lang="en-US"/>
+          </a:p>
+        </p:txBody>
       </p:sp>
       <p:sp>
         <p:nvSpPr>
@@ -9527,7 +13571,7 @@
               </a:lnSpc>
             </a:pPr>
             <a:r>
-              <a:rPr lang="en-US"/>
+              <a:rPr lang="en-US" dirty="0"/>
               <a:t>Welcome to Big Valley Ranch</a:t>
             </a:r>
           </a:p>
@@ -9552,11 +13596,25 @@
         <p:txBody>
           <a:bodyPr>
             <a:normAutofit/>
+            <a:scene3d>
+              <a:camera prst="orthographicFront"/>
+              <a:lightRig rig="soft" dir="t">
+                <a:rot lat="0" lon="0" rev="15600000"/>
+              </a:lightRig>
+            </a:scene3d>
+            <a:sp3d extrusionH="57150" prstMaterial="softEdge">
+              <a:bevelT w="25400" h="38100"/>
+            </a:sp3d>
           </a:bodyPr>
           <a:lstStyle/>
           <a:p>
             <a:r>
-              <a:rPr lang="en-US"/>
+              <a:rPr lang="en-US" b="1" dirty="0">
+                <a:ln/>
+                <a:solidFill>
+                  <a:schemeClr val="accent4"/>
+                </a:solidFill>
+              </a:rPr>
               <a:t>New Employee Orientation</a:t>
             </a:r>
           </a:p>
@@ -9642,6 +13700,13 @@
             <a:schemeClr val="lt1"/>
           </a:fontRef>
         </p:style>
+        <p:txBody>
+          <a:bodyPr/>
+          <a:lstStyle/>
+          <a:p>
+            <a:endParaRPr lang="en-US"/>
+          </a:p>
+        </p:txBody>
       </p:sp>
       <p:sp>
         <p:nvSpPr>
@@ -9724,6 +13789,13 @@
             <a:schemeClr val="lt1"/>
           </a:fontRef>
         </p:style>
+        <p:txBody>
+          <a:bodyPr/>
+          <a:lstStyle/>
+          <a:p>
+            <a:endParaRPr lang="en-US"/>
+          </a:p>
+        </p:txBody>
       </p:sp>
       <p:sp>
         <p:nvSpPr>
@@ -9804,6 +13876,13 @@
             <a:schemeClr val="lt1"/>
           </a:fontRef>
         </p:style>
+        <p:txBody>
+          <a:bodyPr/>
+          <a:lstStyle/>
+          <a:p>
+            <a:endParaRPr lang="en-US"/>
+          </a:p>
+        </p:txBody>
       </p:sp>
       <p:sp>
         <p:nvSpPr>
@@ -9862,6 +13941,238 @@
             <a:schemeClr val="lt1"/>
           </a:fontRef>
         </p:style>
+        <p:txBody>
+          <a:bodyPr/>
+          <a:lstStyle/>
+          <a:p>
+            <a:endParaRPr lang="en-US"/>
+          </a:p>
+        </p:txBody>
+      </p:sp>
+      <p:sp>
+        <p:nvSpPr>
+          <p:cNvPr id="4" name="Date Placeholder 3">
+            <a:extLst>
+              <a:ext uri="{FF2B5EF4-FFF2-40B4-BE49-F238E27FC236}">
+                <a16:creationId xmlns:a16="http://schemas.microsoft.com/office/drawing/2014/main" id="{17496ECA-3625-1006-B5D1-056AF1D68ACF}"/>
+              </a:ext>
+            </a:extLst>
+          </p:cNvPr>
+          <p:cNvSpPr>
+            <a:spLocks noGrp="1"/>
+          </p:cNvSpPr>
+          <p:nvPr>
+            <p:ph type="dt" sz="half" idx="10"/>
+          </p:nvPr>
+        </p:nvSpPr>
+        <p:spPr/>
+        <p:txBody>
+          <a:bodyPr/>
+          <a:lstStyle/>
+          <a:p>
+            <a:pPr marL="0" marR="0" lvl="0" indent="0" algn="r" defTabSz="914400" rtl="0" eaLnBrk="1" fontAlgn="auto" latinLnBrk="0" hangingPunct="1">
+              <a:lnSpc>
+                <a:spcPct val="100000"/>
+              </a:lnSpc>
+              <a:spcBef>
+                <a:spcPts val="0"/>
+              </a:spcBef>
+              <a:spcAft>
+                <a:spcPts val="0"/>
+              </a:spcAft>
+              <a:buClrTx/>
+              <a:buSzTx/>
+              <a:buFontTx/>
+              <a:buNone/>
+              <a:tabLst/>
+              <a:defRPr/>
+            </a:pPr>
+            <a:fld id="{95E21E0A-ACF0-4726-8BD6-09D7FEABC2C3}" type="datetime1">
+              <a:rPr kumimoji="0" lang="en-US" sz="900" b="0" i="0" u="none" strike="noStrike" kern="1200" cap="none" spc="0" normalizeH="0" baseline="0" noProof="0" smtClean="0">
+                <a:ln>
+                  <a:noFill/>
+                </a:ln>
+                <a:solidFill>
+                  <a:prstClr val="black">
+                    <a:tint val="75000"/>
+                  </a:prstClr>
+                </a:solidFill>
+                <a:effectLst/>
+                <a:uLnTx/>
+                <a:uFillTx/>
+                <a:latin typeface="Trebuchet MS" panose="020B0603020202020204"/>
+                <a:ea typeface="+mn-ea"/>
+                <a:cs typeface="+mn-cs"/>
+              </a:rPr>
+              <a:t>04/19/2026</a:t>
+            </a:fld>
+            <a:endParaRPr kumimoji="0" lang="en-US" sz="900" b="0" i="0" u="none" strike="noStrike" kern="1200" cap="none" spc="0" normalizeH="0" baseline="0" noProof="0">
+              <a:ln>
+                <a:noFill/>
+              </a:ln>
+              <a:solidFill>
+                <a:prstClr val="black">
+                  <a:tint val="75000"/>
+                </a:prstClr>
+              </a:solidFill>
+              <a:effectLst/>
+              <a:uLnTx/>
+              <a:uFillTx/>
+              <a:latin typeface="Trebuchet MS" panose="020B0603020202020204"/>
+              <a:ea typeface="+mn-ea"/>
+              <a:cs typeface="+mn-cs"/>
+            </a:endParaRPr>
+          </a:p>
+        </p:txBody>
+      </p:sp>
+      <p:sp>
+        <p:nvSpPr>
+          <p:cNvPr id="5" name="Footer Placeholder 4">
+            <a:extLst>
+              <a:ext uri="{FF2B5EF4-FFF2-40B4-BE49-F238E27FC236}">
+                <a16:creationId xmlns:a16="http://schemas.microsoft.com/office/drawing/2014/main" id="{9086F8CF-B1D9-7BB8-1772-BE4350BBD4DB}"/>
+              </a:ext>
+            </a:extLst>
+          </p:cNvPr>
+          <p:cNvSpPr>
+            <a:spLocks noGrp="1"/>
+          </p:cNvSpPr>
+          <p:nvPr>
+            <p:ph type="ftr" sz="quarter" idx="11"/>
+          </p:nvPr>
+        </p:nvSpPr>
+        <p:spPr/>
+        <p:txBody>
+          <a:bodyPr/>
+          <a:lstStyle/>
+          <a:p>
+            <a:pPr marL="0" marR="0" lvl="0" indent="0" algn="l" defTabSz="914400" rtl="0" eaLnBrk="1" fontAlgn="auto" latinLnBrk="0" hangingPunct="1">
+              <a:lnSpc>
+                <a:spcPct val="100000"/>
+              </a:lnSpc>
+              <a:spcBef>
+                <a:spcPts val="0"/>
+              </a:spcBef>
+              <a:spcAft>
+                <a:spcPts val="0"/>
+              </a:spcAft>
+              <a:buClrTx/>
+              <a:buSzTx/>
+              <a:buFontTx/>
+              <a:buNone/>
+              <a:tabLst/>
+              <a:defRPr/>
+            </a:pPr>
+            <a:r>
+              <a:rPr kumimoji="0" lang="en-US" sz="900" b="0" i="0" u="none" strike="noStrike" kern="1200" cap="none" spc="0" normalizeH="0" baseline="0" noProof="0">
+                <a:ln>
+                  <a:noFill/>
+                </a:ln>
+                <a:solidFill>
+                  <a:prstClr val="black">
+                    <a:tint val="75000"/>
+                  </a:prstClr>
+                </a:solidFill>
+                <a:effectLst/>
+                <a:uLnTx/>
+                <a:uFillTx/>
+                <a:latin typeface="Trebuchet MS" panose="020B0603020202020204"/>
+                <a:ea typeface="+mn-ea"/>
+                <a:cs typeface="+mn-cs"/>
+              </a:rPr>
+              <a:t>2G_Orientation</a:t>
+            </a:r>
+          </a:p>
+        </p:txBody>
+      </p:sp>
+      <p:sp>
+        <p:nvSpPr>
+          <p:cNvPr id="6" name="Slide Number Placeholder 5">
+            <a:extLst>
+              <a:ext uri="{FF2B5EF4-FFF2-40B4-BE49-F238E27FC236}">
+                <a16:creationId xmlns:a16="http://schemas.microsoft.com/office/drawing/2014/main" id="{81AEFADE-9108-54CA-7920-A53F4DD575F0}"/>
+              </a:ext>
+            </a:extLst>
+          </p:cNvPr>
+          <p:cNvSpPr>
+            <a:spLocks noGrp="1"/>
+          </p:cNvSpPr>
+          <p:nvPr>
+            <p:ph type="sldNum" sz="quarter" idx="12"/>
+          </p:nvPr>
+        </p:nvSpPr>
+        <p:spPr/>
+        <p:txBody>
+          <a:bodyPr/>
+          <a:lstStyle/>
+          <a:p>
+            <a:pPr marL="0" marR="0" lvl="0" indent="0" algn="r" defTabSz="914400" rtl="0" eaLnBrk="1" fontAlgn="auto" latinLnBrk="0" hangingPunct="1">
+              <a:lnSpc>
+                <a:spcPct val="100000"/>
+              </a:lnSpc>
+              <a:spcBef>
+                <a:spcPts val="0"/>
+              </a:spcBef>
+              <a:spcAft>
+                <a:spcPts val="0"/>
+              </a:spcAft>
+              <a:buClrTx/>
+              <a:buSzTx/>
+              <a:buFontTx/>
+              <a:buNone/>
+              <a:tabLst/>
+              <a:defRPr/>
+            </a:pPr>
+            <a:fld id="{DCED57B9-9E9A-4BC6-80A9-0D58715E11F6}" type="slidenum">
+              <a:rPr kumimoji="0" lang="en-US" sz="900" b="0" i="0" u="none" strike="noStrike" kern="1200" cap="none" spc="0" normalizeH="0" baseline="0" noProof="0" smtClean="0">
+                <a:ln>
+                  <a:noFill/>
+                </a:ln>
+                <a:solidFill>
+                  <a:srgbClr val="D34817"/>
+                </a:solidFill>
+                <a:effectLst/>
+                <a:uLnTx/>
+                <a:uFillTx/>
+                <a:latin typeface="Trebuchet MS" panose="020B0603020202020204"/>
+                <a:ea typeface="+mn-ea"/>
+                <a:cs typeface="+mn-cs"/>
+              </a:rPr>
+              <a:pPr marL="0" marR="0" lvl="0" indent="0" algn="r" defTabSz="914400" rtl="0" eaLnBrk="1" fontAlgn="auto" latinLnBrk="0" hangingPunct="1">
+                <a:lnSpc>
+                  <a:spcPct val="100000"/>
+                </a:lnSpc>
+                <a:spcBef>
+                  <a:spcPts val="0"/>
+                </a:spcBef>
+                <a:spcAft>
+                  <a:spcPts val="0"/>
+                </a:spcAft>
+                <a:buClrTx/>
+                <a:buSzTx/>
+                <a:buFontTx/>
+                <a:buNone/>
+                <a:tabLst/>
+                <a:defRPr/>
+              </a:pPr>
+              <a:t>1</a:t>
+            </a:fld>
+            <a:endParaRPr kumimoji="0" lang="en-US" sz="900" b="0" i="0" u="none" strike="noStrike" kern="1200" cap="none" spc="0" normalizeH="0" baseline="0" noProof="0">
+              <a:ln>
+                <a:noFill/>
+              </a:ln>
+              <a:solidFill>
+                <a:srgbClr val="D34817"/>
+              </a:solidFill>
+              <a:effectLst/>
+              <a:uLnTx/>
+              <a:uFillTx/>
+              <a:latin typeface="Trebuchet MS" panose="020B0603020202020204"/>
+              <a:ea typeface="+mn-ea"/>
+              <a:cs typeface="+mn-cs"/>
+            </a:endParaRPr>
+          </a:p>
+        </p:txBody>
       </p:sp>
     </p:spTree>
     <p:extLst>
@@ -9911,7 +14222,19 @@
             <a:off x="1797666" y="1752600"/>
             <a:ext cx="8596668" cy="3403600"/>
           </a:xfrm>
-          <a:noFill/>
+          <a:solidFill>
+            <a:schemeClr val="bg2">
+              <a:lumMod val="90000"/>
+            </a:schemeClr>
+          </a:solidFill>
+          <a:ln>
+            <a:solidFill>
+              <a:schemeClr val="tx1">
+                <a:lumMod val="50000"/>
+                <a:lumOff val="50000"/>
+              </a:schemeClr>
+            </a:solidFill>
+          </a:ln>
         </p:spPr>
         <p:style>
           <a:lnRef idx="0">
@@ -9933,12 +14256,10 @@
           </a:bodyPr>
           <a:lstStyle/>
           <a:p>
-            <a:pPr marL="457200" indent="-457200" algn="ctr">
+            <a:pPr algn="ctr">
               <a:lnSpc>
                 <a:spcPct val="150000"/>
               </a:lnSpc>
-              <a:buFont typeface="Arial" panose="020B0604020202020204" pitchFamily="34" charset="0"/>
-              <a:buChar char="•"/>
             </a:pPr>
             <a:r>
               <a:rPr lang="en-US" sz="2800" b="1" i="1" dirty="0">
@@ -9949,6 +14270,231 @@
               </a:rPr>
               <a:t>Our goal is to ensure that all employees of Big Valley Ranch Resorts are aware of our mission, values, and safety practices. </a:t>
             </a:r>
+          </a:p>
+        </p:txBody>
+      </p:sp>
+      <p:sp>
+        <p:nvSpPr>
+          <p:cNvPr id="2" name="Date Placeholder 1">
+            <a:extLst>
+              <a:ext uri="{FF2B5EF4-FFF2-40B4-BE49-F238E27FC236}">
+                <a16:creationId xmlns:a16="http://schemas.microsoft.com/office/drawing/2014/main" id="{3A2045FC-F0C8-AC02-B54A-8D959B9E1CF1}"/>
+              </a:ext>
+            </a:extLst>
+          </p:cNvPr>
+          <p:cNvSpPr>
+            <a:spLocks noGrp="1"/>
+          </p:cNvSpPr>
+          <p:nvPr>
+            <p:ph type="dt" sz="half" idx="10"/>
+          </p:nvPr>
+        </p:nvSpPr>
+        <p:spPr/>
+        <p:txBody>
+          <a:bodyPr/>
+          <a:lstStyle/>
+          <a:p>
+            <a:pPr marL="0" marR="0" lvl="0" indent="0" algn="r" defTabSz="914400" rtl="0" eaLnBrk="1" fontAlgn="auto" latinLnBrk="0" hangingPunct="1">
+              <a:lnSpc>
+                <a:spcPct val="100000"/>
+              </a:lnSpc>
+              <a:spcBef>
+                <a:spcPts val="0"/>
+              </a:spcBef>
+              <a:spcAft>
+                <a:spcPts val="0"/>
+              </a:spcAft>
+              <a:buClrTx/>
+              <a:buSzTx/>
+              <a:buFontTx/>
+              <a:buNone/>
+              <a:tabLst/>
+              <a:defRPr/>
+            </a:pPr>
+            <a:fld id="{638C7D24-ECC2-4845-B0FD-DA78F444429C}" type="datetime1">
+              <a:rPr kumimoji="0" lang="en-US" sz="900" b="0" i="0" u="none" strike="noStrike" kern="1200" cap="none" spc="0" normalizeH="0" baseline="0" noProof="0" smtClean="0">
+                <a:ln>
+                  <a:noFill/>
+                </a:ln>
+                <a:solidFill>
+                  <a:prstClr val="black">
+                    <a:tint val="75000"/>
+                  </a:prstClr>
+                </a:solidFill>
+                <a:effectLst/>
+                <a:uLnTx/>
+                <a:uFillTx/>
+                <a:latin typeface="Trebuchet MS" panose="020B0603020202020204"/>
+                <a:ea typeface="+mn-ea"/>
+                <a:cs typeface="+mn-cs"/>
+              </a:rPr>
+              <a:t>04/19/2026</a:t>
+            </a:fld>
+            <a:endParaRPr kumimoji="0" lang="en-US" sz="900" b="0" i="0" u="none" strike="noStrike" kern="1200" cap="none" spc="0" normalizeH="0" baseline="0" noProof="0">
+              <a:ln>
+                <a:noFill/>
+              </a:ln>
+              <a:solidFill>
+                <a:prstClr val="black">
+                  <a:tint val="75000"/>
+                </a:prstClr>
+              </a:solidFill>
+              <a:effectLst/>
+              <a:uLnTx/>
+              <a:uFillTx/>
+              <a:latin typeface="Trebuchet MS" panose="020B0603020202020204"/>
+              <a:ea typeface="+mn-ea"/>
+              <a:cs typeface="+mn-cs"/>
+            </a:endParaRPr>
+          </a:p>
+        </p:txBody>
+      </p:sp>
+      <p:sp>
+        <p:nvSpPr>
+          <p:cNvPr id="3" name="Footer Placeholder 2">
+            <a:extLst>
+              <a:ext uri="{FF2B5EF4-FFF2-40B4-BE49-F238E27FC236}">
+                <a16:creationId xmlns:a16="http://schemas.microsoft.com/office/drawing/2014/main" id="{45BFABC6-2A64-3D6B-4096-2DA9796160F0}"/>
+              </a:ext>
+            </a:extLst>
+          </p:cNvPr>
+          <p:cNvSpPr>
+            <a:spLocks noGrp="1"/>
+          </p:cNvSpPr>
+          <p:nvPr>
+            <p:ph type="ftr" sz="quarter" idx="11"/>
+          </p:nvPr>
+        </p:nvSpPr>
+        <p:spPr/>
+        <p:txBody>
+          <a:bodyPr/>
+          <a:lstStyle/>
+          <a:p>
+            <a:pPr marL="0" marR="0" lvl="0" indent="0" algn="l" defTabSz="914400" rtl="0" eaLnBrk="1" fontAlgn="auto" latinLnBrk="0" hangingPunct="1">
+              <a:lnSpc>
+                <a:spcPct val="100000"/>
+              </a:lnSpc>
+              <a:spcBef>
+                <a:spcPts val="0"/>
+              </a:spcBef>
+              <a:spcAft>
+                <a:spcPts val="0"/>
+              </a:spcAft>
+              <a:buClrTx/>
+              <a:buSzTx/>
+              <a:buFontTx/>
+              <a:buNone/>
+              <a:tabLst/>
+              <a:defRPr/>
+            </a:pPr>
+            <a:r>
+              <a:rPr kumimoji="0" lang="en-US" sz="900" b="0" i="0" u="none" strike="noStrike" kern="1200" cap="none" spc="0" normalizeH="0" baseline="0" noProof="0">
+                <a:ln>
+                  <a:noFill/>
+                </a:ln>
+                <a:solidFill>
+                  <a:prstClr val="black">
+                    <a:tint val="75000"/>
+                  </a:prstClr>
+                </a:solidFill>
+                <a:effectLst/>
+                <a:uLnTx/>
+                <a:uFillTx/>
+                <a:latin typeface="Trebuchet MS" panose="020B0603020202020204"/>
+                <a:ea typeface="+mn-ea"/>
+                <a:cs typeface="+mn-cs"/>
+              </a:rPr>
+              <a:t>2G_Orientation</a:t>
+            </a:r>
+          </a:p>
+        </p:txBody>
+      </p:sp>
+      <p:sp>
+        <p:nvSpPr>
+          <p:cNvPr id="5" name="Slide Number Placeholder 4">
+            <a:extLst>
+              <a:ext uri="{FF2B5EF4-FFF2-40B4-BE49-F238E27FC236}">
+                <a16:creationId xmlns:a16="http://schemas.microsoft.com/office/drawing/2014/main" id="{DF2F57CE-2F3D-D7FA-3166-2CDA35011487}"/>
+              </a:ext>
+            </a:extLst>
+          </p:cNvPr>
+          <p:cNvSpPr>
+            <a:spLocks noGrp="1"/>
+          </p:cNvSpPr>
+          <p:nvPr>
+            <p:ph type="sldNum" sz="quarter" idx="12"/>
+          </p:nvPr>
+        </p:nvSpPr>
+        <p:spPr/>
+        <p:txBody>
+          <a:bodyPr/>
+          <a:lstStyle/>
+          <a:p>
+            <a:pPr marL="0" marR="0" lvl="0" indent="0" algn="r" defTabSz="914400" rtl="0" eaLnBrk="1" fontAlgn="auto" latinLnBrk="0" hangingPunct="1">
+              <a:lnSpc>
+                <a:spcPct val="100000"/>
+              </a:lnSpc>
+              <a:spcBef>
+                <a:spcPts val="0"/>
+              </a:spcBef>
+              <a:spcAft>
+                <a:spcPts val="0"/>
+              </a:spcAft>
+              <a:buClrTx/>
+              <a:buSzTx/>
+              <a:buFontTx/>
+              <a:buNone/>
+              <a:tabLst/>
+              <a:defRPr/>
+            </a:pPr>
+            <a:fld id="{DCED57B9-9E9A-4BC6-80A9-0D58715E11F6}" type="slidenum">
+              <a:rPr kumimoji="0" lang="en-US" sz="900" b="0" i="0" u="none" strike="noStrike" kern="1200" cap="none" spc="0" normalizeH="0" baseline="0" noProof="0" smtClean="0">
+                <a:ln>
+                  <a:noFill/>
+                </a:ln>
+                <a:solidFill>
+                  <a:srgbClr val="D34817"/>
+                </a:solidFill>
+                <a:effectLst/>
+                <a:uLnTx/>
+                <a:uFillTx/>
+                <a:latin typeface="Trebuchet MS" panose="020B0603020202020204"/>
+                <a:ea typeface="+mn-ea"/>
+                <a:cs typeface="+mn-cs"/>
+              </a:rPr>
+              <a:pPr marL="0" marR="0" lvl="0" indent="0" algn="r" defTabSz="914400" rtl="0" eaLnBrk="1" fontAlgn="auto" latinLnBrk="0" hangingPunct="1">
+                <a:lnSpc>
+                  <a:spcPct val="100000"/>
+                </a:lnSpc>
+                <a:spcBef>
+                  <a:spcPts val="0"/>
+                </a:spcBef>
+                <a:spcAft>
+                  <a:spcPts val="0"/>
+                </a:spcAft>
+                <a:buClrTx/>
+                <a:buSzTx/>
+                <a:buFontTx/>
+                <a:buNone/>
+                <a:tabLst/>
+                <a:defRPr/>
+              </a:pPr>
+              <a:t>2</a:t>
+            </a:fld>
+            <a:endParaRPr kumimoji="0" lang="en-US" sz="900" b="0" i="0" u="none" strike="noStrike" kern="1200" cap="none" spc="0" normalizeH="0" baseline="0" noProof="0">
+              <a:ln>
+                <a:noFill/>
+              </a:ln>
+              <a:solidFill>
+                <a:srgbClr val="D34817"/>
+              </a:solidFill>
+              <a:effectLst/>
+              <a:uLnTx/>
+              <a:uFillTx/>
+              <a:latin typeface="Trebuchet MS" panose="020B0603020202020204"/>
+              <a:ea typeface="+mn-ea"/>
+              <a:cs typeface="+mn-cs"/>
+            </a:endParaRPr>
           </a:p>
         </p:txBody>
       </p:sp>
@@ -10014,81 +14560,259 @@
           </a:p>
         </p:txBody>
       </p:sp>
+      <p:graphicFrame>
+        <p:nvGraphicFramePr>
+          <p:cNvPr id="3" name="Content Placeholder 2">
+            <a:extLst>
+              <a:ext uri="{FF2B5EF4-FFF2-40B4-BE49-F238E27FC236}">
+                <a16:creationId xmlns:a16="http://schemas.microsoft.com/office/drawing/2014/main" id="{EB590927-82BA-B371-D5F9-01323D478CFD}"/>
+              </a:ext>
+            </a:extLst>
+          </p:cNvPr>
+          <p:cNvGraphicFramePr>
+            <a:graphicFrameLocks noGrp="1"/>
+          </p:cNvGraphicFramePr>
+          <p:nvPr>
+            <p:ph idx="1"/>
+            <p:extLst>
+              <p:ext uri="{D42A27DB-BD31-4B8C-83A1-F6EECF244321}">
+                <p14:modId xmlns:p14="http://schemas.microsoft.com/office/powerpoint/2010/main" val="4274321544"/>
+              </p:ext>
+            </p:extLst>
+          </p:nvPr>
+        </p:nvGraphicFramePr>
+        <p:xfrm>
+          <a:off x="677334" y="2160589"/>
+          <a:ext cx="8596668" cy="3880773"/>
+        </p:xfrm>
+        <a:graphic>
+          <a:graphicData uri="http://schemas.openxmlformats.org/drawingml/2006/diagram">
+            <dgm:relIds xmlns:dgm="http://schemas.openxmlformats.org/drawingml/2006/diagram" xmlns:r="http://schemas.openxmlformats.org/officeDocument/2006/relationships" r:dm="rId2" r:lo="rId3" r:qs="rId4" r:cs="rId5"/>
+          </a:graphicData>
+        </a:graphic>
+      </p:graphicFrame>
       <p:sp>
         <p:nvSpPr>
-          <p:cNvPr id="5" name="Content Placeholder 4" descr="HEJ6SlOwT+2SuM8rhgQNul46zVC0j5RNto24G0t84JsUrVTIB0S0GVOA03a4prPPhh1dS/Ba5ih0B+uZybtF9Zoc4n2zvUC4-~u9MoEArcwCKUVESIQRVLFQ=="/>
+          <p:cNvPr id="4" name="Date Placeholder 3">
+            <a:extLst>
+              <a:ext uri="{FF2B5EF4-FFF2-40B4-BE49-F238E27FC236}">
+                <a16:creationId xmlns:a16="http://schemas.microsoft.com/office/drawing/2014/main" id="{4AE3B7D6-BAB7-9FAF-7E0B-EB02F4C474BB}"/>
+              </a:ext>
+            </a:extLst>
+          </p:cNvPr>
           <p:cNvSpPr>
             <a:spLocks noGrp="1"/>
           </p:cNvSpPr>
           <p:nvPr>
-            <p:ph idx="1"/>
+            <p:ph type="dt" sz="half" idx="10"/>
           </p:nvPr>
         </p:nvSpPr>
         <p:spPr/>
         <p:txBody>
-          <a:bodyPr>
-            <a:normAutofit/>
-          </a:bodyPr>
+          <a:bodyPr/>
           <a:lstStyle/>
           <a:p>
+            <a:pPr marL="0" marR="0" lvl="0" indent="0" algn="r" defTabSz="914400" rtl="0" eaLnBrk="1" fontAlgn="auto" latinLnBrk="0" hangingPunct="1">
+              <a:lnSpc>
+                <a:spcPct val="100000"/>
+              </a:lnSpc>
+              <a:spcBef>
+                <a:spcPts val="0"/>
+              </a:spcBef>
+              <a:spcAft>
+                <a:spcPts val="0"/>
+              </a:spcAft>
+              <a:buClrTx/>
+              <a:buSzTx/>
+              <a:buFontTx/>
+              <a:buNone/>
+              <a:tabLst/>
+              <a:defRPr/>
+            </a:pPr>
+            <a:fld id="{FB8FB855-8578-4F25-A133-FC7827A6504F}" type="datetime1">
+              <a:rPr kumimoji="0" lang="en-US" sz="900" b="0" i="0" u="none" strike="noStrike" kern="1200" cap="none" spc="0" normalizeH="0" baseline="0" noProof="0" smtClean="0">
+                <a:ln>
+                  <a:noFill/>
+                </a:ln>
+                <a:solidFill>
+                  <a:prstClr val="black">
+                    <a:tint val="75000"/>
+                  </a:prstClr>
+                </a:solidFill>
+                <a:effectLst/>
+                <a:uLnTx/>
+                <a:uFillTx/>
+                <a:latin typeface="Trebuchet MS" panose="020B0603020202020204"/>
+                <a:ea typeface="+mn-ea"/>
+                <a:cs typeface="+mn-cs"/>
+              </a:rPr>
+              <a:t>04/19/2026</a:t>
+            </a:fld>
+            <a:endParaRPr kumimoji="0" lang="en-US" sz="900" b="0" i="0" u="none" strike="noStrike" kern="1200" cap="none" spc="0" normalizeH="0" baseline="0" noProof="0">
+              <a:ln>
+                <a:noFill/>
+              </a:ln>
+              <a:solidFill>
+                <a:prstClr val="black">
+                  <a:tint val="75000"/>
+                </a:prstClr>
+              </a:solidFill>
+              <a:effectLst/>
+              <a:uLnTx/>
+              <a:uFillTx/>
+              <a:latin typeface="Trebuchet MS" panose="020B0603020202020204"/>
+              <a:ea typeface="+mn-ea"/>
+              <a:cs typeface="+mn-cs"/>
+            </a:endParaRPr>
+          </a:p>
+        </p:txBody>
+      </p:sp>
+      <p:sp>
+        <p:nvSpPr>
+          <p:cNvPr id="6" name="Footer Placeholder 5">
+            <a:extLst>
+              <a:ext uri="{FF2B5EF4-FFF2-40B4-BE49-F238E27FC236}">
+                <a16:creationId xmlns:a16="http://schemas.microsoft.com/office/drawing/2014/main" id="{A34AFDD1-4847-48ED-2DA0-7E53D2886680}"/>
+              </a:ext>
+            </a:extLst>
+          </p:cNvPr>
+          <p:cNvSpPr>
+            <a:spLocks noGrp="1"/>
+          </p:cNvSpPr>
+          <p:nvPr>
+            <p:ph type="ftr" sz="quarter" idx="11"/>
+          </p:nvPr>
+        </p:nvSpPr>
+        <p:spPr/>
+        <p:txBody>
+          <a:bodyPr/>
+          <a:lstStyle/>
+          <a:p>
+            <a:pPr marL="0" marR="0" lvl="0" indent="0" algn="l" defTabSz="914400" rtl="0" eaLnBrk="1" fontAlgn="auto" latinLnBrk="0" hangingPunct="1">
+              <a:lnSpc>
+                <a:spcPct val="100000"/>
+              </a:lnSpc>
+              <a:spcBef>
+                <a:spcPts val="0"/>
+              </a:spcBef>
+              <a:spcAft>
+                <a:spcPts val="0"/>
+              </a:spcAft>
+              <a:buClrTx/>
+              <a:buSzTx/>
+              <a:buFontTx/>
+              <a:buNone/>
+              <a:tabLst/>
+              <a:defRPr/>
+            </a:pPr>
             <a:r>
-              <a:rPr lang="en-US" dirty="0"/>
-              <a:t>Day One</a:t>
+              <a:rPr kumimoji="0" lang="en-US" sz="900" b="0" i="0" u="none" strike="noStrike" kern="1200" cap="none" spc="0" normalizeH="0" baseline="0" noProof="0">
+                <a:ln>
+                  <a:noFill/>
+                </a:ln>
+                <a:solidFill>
+                  <a:prstClr val="black">
+                    <a:tint val="75000"/>
+                  </a:prstClr>
+                </a:solidFill>
+                <a:effectLst/>
+                <a:uLnTx/>
+                <a:uFillTx/>
+                <a:latin typeface="Trebuchet MS" panose="020B0603020202020204"/>
+                <a:ea typeface="+mn-ea"/>
+                <a:cs typeface="+mn-cs"/>
+              </a:rPr>
+              <a:t>2G_Orientation</a:t>
             </a:r>
           </a:p>
-          <a:p>
-            <a:pPr lvl="1"/>
-            <a:r>
-              <a:rPr lang="en-US" dirty="0"/>
-              <a:t>Maya Ruiz</a:t>
-            </a:r>
-          </a:p>
-          <a:p>
-            <a:pPr lvl="1"/>
-            <a:r>
-              <a:rPr lang="en-US" dirty="0"/>
-              <a:t>Human Resources Director</a:t>
-            </a:r>
-          </a:p>
-          <a:p>
-            <a:r>
-              <a:rPr lang="en-US" dirty="0"/>
-              <a:t>Day Two</a:t>
-            </a:r>
-          </a:p>
-          <a:p>
-            <a:pPr lvl="1"/>
-            <a:r>
-              <a:rPr lang="en-US" dirty="0"/>
-              <a:t>David Jensen</a:t>
-            </a:r>
-          </a:p>
-          <a:p>
-            <a:pPr lvl="1"/>
-            <a:r>
-              <a:rPr lang="en-US" dirty="0"/>
-              <a:t>Resort Operations Director</a:t>
-            </a:r>
-          </a:p>
-          <a:p>
-            <a:r>
-              <a:rPr lang="en-US" dirty="0"/>
-              <a:t>Day Three</a:t>
-            </a:r>
-          </a:p>
-          <a:p>
-            <a:pPr lvl="1"/>
-            <a:r>
-              <a:rPr lang="en-US" dirty="0"/>
-              <a:t>Ken Lee</a:t>
-            </a:r>
-          </a:p>
-          <a:p>
-            <a:pPr lvl="1"/>
-            <a:r>
-              <a:rPr lang="en-US" dirty="0"/>
-              <a:t>Safety Director</a:t>
-            </a:r>
+        </p:txBody>
+      </p:sp>
+      <p:sp>
+        <p:nvSpPr>
+          <p:cNvPr id="7" name="Slide Number Placeholder 6">
+            <a:extLst>
+              <a:ext uri="{FF2B5EF4-FFF2-40B4-BE49-F238E27FC236}">
+                <a16:creationId xmlns:a16="http://schemas.microsoft.com/office/drawing/2014/main" id="{A195D013-9DC7-8B42-17D9-B2319DD59E08}"/>
+              </a:ext>
+            </a:extLst>
+          </p:cNvPr>
+          <p:cNvSpPr>
+            <a:spLocks noGrp="1"/>
+          </p:cNvSpPr>
+          <p:nvPr>
+            <p:ph type="sldNum" sz="quarter" idx="12"/>
+          </p:nvPr>
+        </p:nvSpPr>
+        <p:spPr/>
+        <p:txBody>
+          <a:bodyPr/>
+          <a:lstStyle/>
+          <a:p>
+            <a:pPr marL="0" marR="0" lvl="0" indent="0" algn="r" defTabSz="914400" rtl="0" eaLnBrk="1" fontAlgn="auto" latinLnBrk="0" hangingPunct="1">
+              <a:lnSpc>
+                <a:spcPct val="100000"/>
+              </a:lnSpc>
+              <a:spcBef>
+                <a:spcPts val="0"/>
+              </a:spcBef>
+              <a:spcAft>
+                <a:spcPts val="0"/>
+              </a:spcAft>
+              <a:buClrTx/>
+              <a:buSzTx/>
+              <a:buFontTx/>
+              <a:buNone/>
+              <a:tabLst/>
+              <a:defRPr/>
+            </a:pPr>
+            <a:fld id="{DCED57B9-9E9A-4BC6-80A9-0D58715E11F6}" type="slidenum">
+              <a:rPr kumimoji="0" lang="en-US" sz="900" b="0" i="0" u="none" strike="noStrike" kern="1200" cap="none" spc="0" normalizeH="0" baseline="0" noProof="0" smtClean="0">
+                <a:ln>
+                  <a:noFill/>
+                </a:ln>
+                <a:solidFill>
+                  <a:srgbClr val="D34817"/>
+                </a:solidFill>
+                <a:effectLst/>
+                <a:uLnTx/>
+                <a:uFillTx/>
+                <a:latin typeface="Trebuchet MS" panose="020B0603020202020204"/>
+                <a:ea typeface="+mn-ea"/>
+                <a:cs typeface="+mn-cs"/>
+              </a:rPr>
+              <a:pPr marL="0" marR="0" lvl="0" indent="0" algn="r" defTabSz="914400" rtl="0" eaLnBrk="1" fontAlgn="auto" latinLnBrk="0" hangingPunct="1">
+                <a:lnSpc>
+                  <a:spcPct val="100000"/>
+                </a:lnSpc>
+                <a:spcBef>
+                  <a:spcPts val="0"/>
+                </a:spcBef>
+                <a:spcAft>
+                  <a:spcPts val="0"/>
+                </a:spcAft>
+                <a:buClrTx/>
+                <a:buSzTx/>
+                <a:buFontTx/>
+                <a:buNone/>
+                <a:tabLst/>
+                <a:defRPr/>
+              </a:pPr>
+              <a:t>3</a:t>
+            </a:fld>
+            <a:endParaRPr kumimoji="0" lang="en-US" sz="900" b="0" i="0" u="none" strike="noStrike" kern="1200" cap="none" spc="0" normalizeH="0" baseline="0" noProof="0">
+              <a:ln>
+                <a:noFill/>
+              </a:ln>
+              <a:solidFill>
+                <a:srgbClr val="D34817"/>
+              </a:solidFill>
+              <a:effectLst/>
+              <a:uLnTx/>
+              <a:uFillTx/>
+              <a:latin typeface="Trebuchet MS" panose="020B0603020202020204"/>
+              <a:ea typeface="+mn-ea"/>
+              <a:cs typeface="+mn-cs"/>
+            </a:endParaRPr>
           </a:p>
         </p:txBody>
       </p:sp>
@@ -10170,10 +14894,9 @@
           <a:lstStyle/>
           <a:p>
             <a:r>
-              <a:rPr lang="en-US"/>
+              <a:rPr lang="en-US" dirty="0"/>
               <a:t>Day One</a:t>
             </a:r>
-            <a:endParaRPr lang="en-US" dirty="0"/>
           </a:p>
         </p:txBody>
       </p:sp>
@@ -10192,23 +14915,34 @@
           <a:bodyPr/>
           <a:lstStyle/>
           <a:p>
+            <a:pPr>
+              <a:buFont typeface="+mj-lt"/>
+              <a:buAutoNum type="arabicPeriod"/>
+            </a:pPr>
             <a:r>
-              <a:rPr lang="en-US"/>
+              <a:rPr lang="en-US" dirty="0"/>
               <a:t>Human Resources overview</a:t>
             </a:r>
           </a:p>
           <a:p>
+            <a:pPr>
+              <a:buFont typeface="+mj-lt"/>
+              <a:buAutoNum type="arabicPeriod"/>
+            </a:pPr>
             <a:r>
-              <a:rPr lang="en-US"/>
+              <a:rPr lang="en-US" dirty="0"/>
               <a:t>Overview of company history</a:t>
             </a:r>
           </a:p>
           <a:p>
+            <a:pPr>
+              <a:buFont typeface="+mj-lt"/>
+              <a:buAutoNum type="arabicPeriod"/>
+            </a:pPr>
             <a:r>
-              <a:rPr lang="en-US"/>
+              <a:rPr lang="en-US" dirty="0"/>
               <a:t>Employee benefits and payroll overview</a:t>
             </a:r>
-            <a:endParaRPr lang="en-US" dirty="0"/>
           </a:p>
         </p:txBody>
       </p:sp>
@@ -10250,22 +14984,259 @@
           <a:bodyPr/>
           <a:lstStyle/>
           <a:p>
+            <a:pPr>
+              <a:buFont typeface="+mj-lt"/>
+              <a:buAutoNum type="arabicPeriod"/>
+            </a:pPr>
             <a:r>
               <a:rPr lang="en-US" dirty="0"/>
               <a:t>Ranch tour including safety</a:t>
             </a:r>
           </a:p>
           <a:p>
+            <a:pPr>
+              <a:buFont typeface="+mj-lt"/>
+              <a:buAutoNum type="arabicPeriod"/>
+            </a:pPr>
             <a:r>
               <a:rPr lang="en-US" dirty="0"/>
               <a:t>Training seminars specific to employee job classification</a:t>
             </a:r>
           </a:p>
           <a:p>
+            <a:pPr>
+              <a:buFont typeface="+mj-lt"/>
+              <a:buAutoNum type="arabicPeriod"/>
+            </a:pPr>
             <a:r>
               <a:rPr lang="en-US" dirty="0"/>
               <a:t>Supervisor meetings</a:t>
             </a:r>
+          </a:p>
+        </p:txBody>
+      </p:sp>
+      <p:sp>
+        <p:nvSpPr>
+          <p:cNvPr id="2" name="Date Placeholder 1">
+            <a:extLst>
+              <a:ext uri="{FF2B5EF4-FFF2-40B4-BE49-F238E27FC236}">
+                <a16:creationId xmlns:a16="http://schemas.microsoft.com/office/drawing/2014/main" id="{D24FFC35-D141-AC0A-ACF3-8EAD9D8F923F}"/>
+              </a:ext>
+            </a:extLst>
+          </p:cNvPr>
+          <p:cNvSpPr>
+            <a:spLocks noGrp="1"/>
+          </p:cNvSpPr>
+          <p:nvPr>
+            <p:ph type="dt" sz="half" idx="10"/>
+          </p:nvPr>
+        </p:nvSpPr>
+        <p:spPr/>
+        <p:txBody>
+          <a:bodyPr/>
+          <a:lstStyle/>
+          <a:p>
+            <a:pPr marL="0" marR="0" lvl="0" indent="0" algn="r" defTabSz="914400" rtl="0" eaLnBrk="1" fontAlgn="auto" latinLnBrk="0" hangingPunct="1">
+              <a:lnSpc>
+                <a:spcPct val="100000"/>
+              </a:lnSpc>
+              <a:spcBef>
+                <a:spcPts val="0"/>
+              </a:spcBef>
+              <a:spcAft>
+                <a:spcPts val="0"/>
+              </a:spcAft>
+              <a:buClrTx/>
+              <a:buSzTx/>
+              <a:buFontTx/>
+              <a:buNone/>
+              <a:tabLst/>
+              <a:defRPr/>
+            </a:pPr>
+            <a:fld id="{F2E5B4A3-8A3E-4E83-9403-72418259DC6A}" type="datetime1">
+              <a:rPr kumimoji="0" lang="en-US" sz="900" b="0" i="0" u="none" strike="noStrike" kern="1200" cap="none" spc="0" normalizeH="0" baseline="0" noProof="0" smtClean="0">
+                <a:ln>
+                  <a:noFill/>
+                </a:ln>
+                <a:solidFill>
+                  <a:prstClr val="black">
+                    <a:tint val="75000"/>
+                  </a:prstClr>
+                </a:solidFill>
+                <a:effectLst/>
+                <a:uLnTx/>
+                <a:uFillTx/>
+                <a:latin typeface="Trebuchet MS" panose="020B0603020202020204"/>
+                <a:ea typeface="+mn-ea"/>
+                <a:cs typeface="+mn-cs"/>
+              </a:rPr>
+              <a:t>04/19/2026</a:t>
+            </a:fld>
+            <a:endParaRPr kumimoji="0" lang="en-US" sz="900" b="0" i="0" u="none" strike="noStrike" kern="1200" cap="none" spc="0" normalizeH="0" baseline="0" noProof="0">
+              <a:ln>
+                <a:noFill/>
+              </a:ln>
+              <a:solidFill>
+                <a:prstClr val="black">
+                  <a:tint val="75000"/>
+                </a:prstClr>
+              </a:solidFill>
+              <a:effectLst/>
+              <a:uLnTx/>
+              <a:uFillTx/>
+              <a:latin typeface="Trebuchet MS" panose="020B0603020202020204"/>
+              <a:ea typeface="+mn-ea"/>
+              <a:cs typeface="+mn-cs"/>
+            </a:endParaRPr>
+          </a:p>
+        </p:txBody>
+      </p:sp>
+      <p:sp>
+        <p:nvSpPr>
+          <p:cNvPr id="3" name="Footer Placeholder 2">
+            <a:extLst>
+              <a:ext uri="{FF2B5EF4-FFF2-40B4-BE49-F238E27FC236}">
+                <a16:creationId xmlns:a16="http://schemas.microsoft.com/office/drawing/2014/main" id="{0F4E7B65-8CE1-A672-0800-D0276BF34C15}"/>
+              </a:ext>
+            </a:extLst>
+          </p:cNvPr>
+          <p:cNvSpPr>
+            <a:spLocks noGrp="1"/>
+          </p:cNvSpPr>
+          <p:nvPr>
+            <p:ph type="ftr" sz="quarter" idx="11"/>
+          </p:nvPr>
+        </p:nvSpPr>
+        <p:spPr/>
+        <p:txBody>
+          <a:bodyPr/>
+          <a:lstStyle/>
+          <a:p>
+            <a:pPr marL="0" marR="0" lvl="0" indent="0" algn="l" defTabSz="914400" rtl="0" eaLnBrk="1" fontAlgn="auto" latinLnBrk="0" hangingPunct="1">
+              <a:lnSpc>
+                <a:spcPct val="100000"/>
+              </a:lnSpc>
+              <a:spcBef>
+                <a:spcPts val="0"/>
+              </a:spcBef>
+              <a:spcAft>
+                <a:spcPts val="0"/>
+              </a:spcAft>
+              <a:buClrTx/>
+              <a:buSzTx/>
+              <a:buFontTx/>
+              <a:buNone/>
+              <a:tabLst/>
+              <a:defRPr/>
+            </a:pPr>
+            <a:r>
+              <a:rPr kumimoji="0" lang="en-US" sz="900" b="0" i="0" u="none" strike="noStrike" kern="1200" cap="none" spc="0" normalizeH="0" baseline="0" noProof="0">
+                <a:ln>
+                  <a:noFill/>
+                </a:ln>
+                <a:solidFill>
+                  <a:prstClr val="black">
+                    <a:tint val="75000"/>
+                  </a:prstClr>
+                </a:solidFill>
+                <a:effectLst/>
+                <a:uLnTx/>
+                <a:uFillTx/>
+                <a:latin typeface="Trebuchet MS" panose="020B0603020202020204"/>
+                <a:ea typeface="+mn-ea"/>
+                <a:cs typeface="+mn-cs"/>
+              </a:rPr>
+              <a:t>2G_Orientation</a:t>
+            </a:r>
+          </a:p>
+        </p:txBody>
+      </p:sp>
+      <p:sp>
+        <p:nvSpPr>
+          <p:cNvPr id="4" name="Slide Number Placeholder 3">
+            <a:extLst>
+              <a:ext uri="{FF2B5EF4-FFF2-40B4-BE49-F238E27FC236}">
+                <a16:creationId xmlns:a16="http://schemas.microsoft.com/office/drawing/2014/main" id="{C9F53310-2CBC-2242-6E90-54E3AED29E46}"/>
+              </a:ext>
+            </a:extLst>
+          </p:cNvPr>
+          <p:cNvSpPr>
+            <a:spLocks noGrp="1"/>
+          </p:cNvSpPr>
+          <p:nvPr>
+            <p:ph type="sldNum" sz="quarter" idx="12"/>
+          </p:nvPr>
+        </p:nvSpPr>
+        <p:spPr/>
+        <p:txBody>
+          <a:bodyPr/>
+          <a:lstStyle/>
+          <a:p>
+            <a:pPr marL="0" marR="0" lvl="0" indent="0" algn="r" defTabSz="914400" rtl="0" eaLnBrk="1" fontAlgn="auto" latinLnBrk="0" hangingPunct="1">
+              <a:lnSpc>
+                <a:spcPct val="100000"/>
+              </a:lnSpc>
+              <a:spcBef>
+                <a:spcPts val="0"/>
+              </a:spcBef>
+              <a:spcAft>
+                <a:spcPts val="0"/>
+              </a:spcAft>
+              <a:buClrTx/>
+              <a:buSzTx/>
+              <a:buFontTx/>
+              <a:buNone/>
+              <a:tabLst/>
+              <a:defRPr/>
+            </a:pPr>
+            <a:fld id="{DCED57B9-9E9A-4BC6-80A9-0D58715E11F6}" type="slidenum">
+              <a:rPr kumimoji="0" lang="en-US" sz="900" b="0" i="0" u="none" strike="noStrike" kern="1200" cap="none" spc="0" normalizeH="0" baseline="0" noProof="0" smtClean="0">
+                <a:ln>
+                  <a:noFill/>
+                </a:ln>
+                <a:solidFill>
+                  <a:srgbClr val="D34817"/>
+                </a:solidFill>
+                <a:effectLst/>
+                <a:uLnTx/>
+                <a:uFillTx/>
+                <a:latin typeface="Trebuchet MS" panose="020B0603020202020204"/>
+                <a:ea typeface="+mn-ea"/>
+                <a:cs typeface="+mn-cs"/>
+              </a:rPr>
+              <a:pPr marL="0" marR="0" lvl="0" indent="0" algn="r" defTabSz="914400" rtl="0" eaLnBrk="1" fontAlgn="auto" latinLnBrk="0" hangingPunct="1">
+                <a:lnSpc>
+                  <a:spcPct val="100000"/>
+                </a:lnSpc>
+                <a:spcBef>
+                  <a:spcPts val="0"/>
+                </a:spcBef>
+                <a:spcAft>
+                  <a:spcPts val="0"/>
+                </a:spcAft>
+                <a:buClrTx/>
+                <a:buSzTx/>
+                <a:buFontTx/>
+                <a:buNone/>
+                <a:tabLst/>
+                <a:defRPr/>
+              </a:pPr>
+              <a:t>4</a:t>
+            </a:fld>
+            <a:endParaRPr kumimoji="0" lang="en-US" sz="900" b="0" i="0" u="none" strike="noStrike" kern="1200" cap="none" spc="0" normalizeH="0" baseline="0" noProof="0">
+              <a:ln>
+                <a:noFill/>
+              </a:ln>
+              <a:solidFill>
+                <a:srgbClr val="D34817"/>
+              </a:solidFill>
+              <a:effectLst/>
+              <a:uLnTx/>
+              <a:uFillTx/>
+              <a:latin typeface="Trebuchet MS" panose="020B0603020202020204"/>
+              <a:ea typeface="+mn-ea"/>
+              <a:cs typeface="+mn-cs"/>
+            </a:endParaRPr>
           </a:p>
         </p:txBody>
       </p:sp>
@@ -10395,27 +15366,299 @@
           </a:p>
         </p:txBody>
       </p:sp>
+      <p:pic>
+        <p:nvPicPr>
+          <p:cNvPr id="4" name="Content Placeholder 3">
+            <a:extLst>
+              <a:ext uri="{FF2B5EF4-FFF2-40B4-BE49-F238E27FC236}">
+                <a16:creationId xmlns:a16="http://schemas.microsoft.com/office/drawing/2014/main" id="{8222998B-C8B6-5CBD-673A-6410FD813361}"/>
+              </a:ext>
+            </a:extLst>
+          </p:cNvPr>
+          <p:cNvPicPr>
+            <a:picLocks noGrp="1" noChangeAspect="1"/>
+          </p:cNvPicPr>
+          <p:nvPr>
+            <p:ph sz="half" idx="2"/>
+          </p:nvPr>
+        </p:nvPicPr>
+        <p:blipFill>
+          <a:blip r:embed="rId2"/>
+          <a:srcRect/>
+          <a:stretch/>
+        </p:blipFill>
+        <p:spPr>
+          <a:xfrm>
+            <a:off x="6858001" y="2389992"/>
+            <a:ext cx="4810123" cy="3208315"/>
+          </a:xfrm>
+          <a:effectLst>
+            <a:glow rad="228600">
+              <a:schemeClr val="accent3">
+                <a:satMod val="175000"/>
+                <a:alpha val="40000"/>
+              </a:schemeClr>
+            </a:glow>
+          </a:effectLst>
+        </p:spPr>
+      </p:pic>
       <p:sp>
         <p:nvSpPr>
-          <p:cNvPr id="5" name="Content Placeholder 4" descr="S20M9+CeAOn64xQWRRb0Ui+jvQDTXc49ldaHqk684I7FFQ+JJTvyxRfKN6kORH4mo08+en7gqNIfuoXWJL+MHzRiL2YZHdmc-~xTF7PVp9/Ok0PX74d9LNfg=="/>
+          <p:cNvPr id="9" name="TextBox 8">
+            <a:extLst>
+              <a:ext uri="{FF2B5EF4-FFF2-40B4-BE49-F238E27FC236}">
+                <a16:creationId xmlns:a16="http://schemas.microsoft.com/office/drawing/2014/main" id="{728CD197-61ED-D375-3D92-41791756C9D5}"/>
+              </a:ext>
+            </a:extLst>
+          </p:cNvPr>
+          <p:cNvSpPr txBox="1"/>
+          <p:nvPr/>
+        </p:nvSpPr>
+        <p:spPr>
+          <a:xfrm>
+            <a:off x="3082194" y="6488668"/>
+            <a:ext cx="6027612" cy="369332"/>
+          </a:xfrm>
+          <a:prstGeom prst="rect">
+            <a:avLst/>
+          </a:prstGeom>
+          <a:noFill/>
+        </p:spPr>
+        <p:txBody>
+          <a:bodyPr wrap="none" rtlCol="0">
+            <a:spAutoFit/>
+          </a:bodyPr>
+          <a:lstStyle/>
+          <a:p>
+            <a:r>
+              <a:rPr lang="en-US" dirty="0"/>
+              <a:t>All employees will be tested on park safety procedures! </a:t>
+            </a:r>
+          </a:p>
+        </p:txBody>
+      </p:sp>
+      <p:sp>
+        <p:nvSpPr>
+          <p:cNvPr id="10" name="Date Placeholder 9">
+            <a:extLst>
+              <a:ext uri="{FF2B5EF4-FFF2-40B4-BE49-F238E27FC236}">
+                <a16:creationId xmlns:a16="http://schemas.microsoft.com/office/drawing/2014/main" id="{B7656541-9351-0214-2672-79ED0D91B014}"/>
+              </a:ext>
+            </a:extLst>
+          </p:cNvPr>
           <p:cNvSpPr>
             <a:spLocks noGrp="1"/>
           </p:cNvSpPr>
           <p:nvPr>
-            <p:ph sz="half" idx="2"/>
+            <p:ph type="dt" sz="half" idx="10"/>
           </p:nvPr>
         </p:nvSpPr>
-        <p:spPr>
-          <a:xfrm>
-            <a:off x="6858000" y="2053734"/>
-            <a:ext cx="4809744" cy="3880773"/>
-          </a:xfrm>
-        </p:spPr>
+        <p:spPr/>
         <p:txBody>
           <a:bodyPr/>
           <a:lstStyle/>
           <a:p>
-            <a:endParaRPr lang="en-US" dirty="0"/>
+            <a:pPr marL="0" marR="0" lvl="0" indent="0" algn="r" defTabSz="914400" rtl="0" eaLnBrk="1" fontAlgn="auto" latinLnBrk="0" hangingPunct="1">
+              <a:lnSpc>
+                <a:spcPct val="100000"/>
+              </a:lnSpc>
+              <a:spcBef>
+                <a:spcPts val="0"/>
+              </a:spcBef>
+              <a:spcAft>
+                <a:spcPts val="0"/>
+              </a:spcAft>
+              <a:buClrTx/>
+              <a:buSzTx/>
+              <a:buFontTx/>
+              <a:buNone/>
+              <a:tabLst/>
+              <a:defRPr/>
+            </a:pPr>
+            <a:fld id="{E176B2BB-06A0-4E77-B110-114C0C984CC2}" type="datetime1">
+              <a:rPr kumimoji="0" lang="en-US" sz="900" b="0" i="0" u="none" strike="noStrike" kern="1200" cap="none" spc="0" normalizeH="0" baseline="0" noProof="0" smtClean="0">
+                <a:ln>
+                  <a:noFill/>
+                </a:ln>
+                <a:solidFill>
+                  <a:prstClr val="black">
+                    <a:tint val="75000"/>
+                  </a:prstClr>
+                </a:solidFill>
+                <a:effectLst/>
+                <a:uLnTx/>
+                <a:uFillTx/>
+                <a:latin typeface="Trebuchet MS" panose="020B0603020202020204"/>
+                <a:ea typeface="+mn-ea"/>
+                <a:cs typeface="+mn-cs"/>
+              </a:rPr>
+              <a:t>04/19/2026</a:t>
+            </a:fld>
+            <a:endParaRPr kumimoji="0" lang="en-US" sz="900" b="0" i="0" u="none" strike="noStrike" kern="1200" cap="none" spc="0" normalizeH="0" baseline="0" noProof="0">
+              <a:ln>
+                <a:noFill/>
+              </a:ln>
+              <a:solidFill>
+                <a:prstClr val="black">
+                  <a:tint val="75000"/>
+                </a:prstClr>
+              </a:solidFill>
+              <a:effectLst/>
+              <a:uLnTx/>
+              <a:uFillTx/>
+              <a:latin typeface="Trebuchet MS" panose="020B0603020202020204"/>
+              <a:ea typeface="+mn-ea"/>
+              <a:cs typeface="+mn-cs"/>
+            </a:endParaRPr>
+          </a:p>
+        </p:txBody>
+      </p:sp>
+      <p:sp>
+        <p:nvSpPr>
+          <p:cNvPr id="11" name="Footer Placeholder 10">
+            <a:extLst>
+              <a:ext uri="{FF2B5EF4-FFF2-40B4-BE49-F238E27FC236}">
+                <a16:creationId xmlns:a16="http://schemas.microsoft.com/office/drawing/2014/main" id="{77F91F4B-A550-471C-27A5-58AD327E375B}"/>
+              </a:ext>
+            </a:extLst>
+          </p:cNvPr>
+          <p:cNvSpPr>
+            <a:spLocks noGrp="1"/>
+          </p:cNvSpPr>
+          <p:nvPr>
+            <p:ph type="ftr" sz="quarter" idx="11"/>
+          </p:nvPr>
+        </p:nvSpPr>
+        <p:spPr/>
+        <p:txBody>
+          <a:bodyPr/>
+          <a:lstStyle/>
+          <a:p>
+            <a:pPr marL="0" marR="0" lvl="0" indent="0" algn="l" defTabSz="914400" rtl="0" eaLnBrk="1" fontAlgn="auto" latinLnBrk="0" hangingPunct="1">
+              <a:lnSpc>
+                <a:spcPct val="100000"/>
+              </a:lnSpc>
+              <a:spcBef>
+                <a:spcPts val="0"/>
+              </a:spcBef>
+              <a:spcAft>
+                <a:spcPts val="0"/>
+              </a:spcAft>
+              <a:buClrTx/>
+              <a:buSzTx/>
+              <a:buFontTx/>
+              <a:buNone/>
+              <a:tabLst/>
+              <a:defRPr/>
+            </a:pPr>
+            <a:r>
+              <a:rPr kumimoji="0" lang="en-US" sz="900" b="0" i="0" u="none" strike="noStrike" kern="1200" cap="none" spc="0" normalizeH="0" baseline="0" noProof="0">
+                <a:ln>
+                  <a:noFill/>
+                </a:ln>
+                <a:solidFill>
+                  <a:prstClr val="black">
+                    <a:tint val="75000"/>
+                  </a:prstClr>
+                </a:solidFill>
+                <a:effectLst/>
+                <a:uLnTx/>
+                <a:uFillTx/>
+                <a:latin typeface="Trebuchet MS" panose="020B0603020202020204"/>
+                <a:ea typeface="+mn-ea"/>
+                <a:cs typeface="+mn-cs"/>
+              </a:rPr>
+              <a:t>2G_Orientation</a:t>
+            </a:r>
+          </a:p>
+        </p:txBody>
+      </p:sp>
+      <p:sp>
+        <p:nvSpPr>
+          <p:cNvPr id="12" name="Slide Number Placeholder 11">
+            <a:extLst>
+              <a:ext uri="{FF2B5EF4-FFF2-40B4-BE49-F238E27FC236}">
+                <a16:creationId xmlns:a16="http://schemas.microsoft.com/office/drawing/2014/main" id="{546CDA25-3165-36FC-4F81-8DCFFE138ECE}"/>
+              </a:ext>
+            </a:extLst>
+          </p:cNvPr>
+          <p:cNvSpPr>
+            <a:spLocks noGrp="1"/>
+          </p:cNvSpPr>
+          <p:nvPr>
+            <p:ph type="sldNum" sz="quarter" idx="12"/>
+          </p:nvPr>
+        </p:nvSpPr>
+        <p:spPr/>
+        <p:txBody>
+          <a:bodyPr/>
+          <a:lstStyle/>
+          <a:p>
+            <a:pPr marL="0" marR="0" lvl="0" indent="0" algn="r" defTabSz="914400" rtl="0" eaLnBrk="1" fontAlgn="auto" latinLnBrk="0" hangingPunct="1">
+              <a:lnSpc>
+                <a:spcPct val="100000"/>
+              </a:lnSpc>
+              <a:spcBef>
+                <a:spcPts val="0"/>
+              </a:spcBef>
+              <a:spcAft>
+                <a:spcPts val="0"/>
+              </a:spcAft>
+              <a:buClrTx/>
+              <a:buSzTx/>
+              <a:buFontTx/>
+              <a:buNone/>
+              <a:tabLst/>
+              <a:defRPr/>
+            </a:pPr>
+            <a:fld id="{DCED57B9-9E9A-4BC6-80A9-0D58715E11F6}" type="slidenum">
+              <a:rPr kumimoji="0" lang="en-US" sz="900" b="0" i="0" u="none" strike="noStrike" kern="1200" cap="none" spc="0" normalizeH="0" baseline="0" noProof="0" smtClean="0">
+                <a:ln>
+                  <a:noFill/>
+                </a:ln>
+                <a:solidFill>
+                  <a:srgbClr val="D34817"/>
+                </a:solidFill>
+                <a:effectLst/>
+                <a:uLnTx/>
+                <a:uFillTx/>
+                <a:latin typeface="Trebuchet MS" panose="020B0603020202020204"/>
+                <a:ea typeface="+mn-ea"/>
+                <a:cs typeface="+mn-cs"/>
+              </a:rPr>
+              <a:pPr marL="0" marR="0" lvl="0" indent="0" algn="r" defTabSz="914400" rtl="0" eaLnBrk="1" fontAlgn="auto" latinLnBrk="0" hangingPunct="1">
+                <a:lnSpc>
+                  <a:spcPct val="100000"/>
+                </a:lnSpc>
+                <a:spcBef>
+                  <a:spcPts val="0"/>
+                </a:spcBef>
+                <a:spcAft>
+                  <a:spcPts val="0"/>
+                </a:spcAft>
+                <a:buClrTx/>
+                <a:buSzTx/>
+                <a:buFontTx/>
+                <a:buNone/>
+                <a:tabLst/>
+                <a:defRPr/>
+              </a:pPr>
+              <a:t>5</a:t>
+            </a:fld>
+            <a:endParaRPr kumimoji="0" lang="en-US" sz="900" b="0" i="0" u="none" strike="noStrike" kern="1200" cap="none" spc="0" normalizeH="0" baseline="0" noProof="0">
+              <a:ln>
+                <a:noFill/>
+              </a:ln>
+              <a:solidFill>
+                <a:srgbClr val="D34817"/>
+              </a:solidFill>
+              <a:effectLst/>
+              <a:uLnTx/>
+              <a:uFillTx/>
+              <a:latin typeface="Trebuchet MS" panose="020B0603020202020204"/>
+              <a:ea typeface="+mn-ea"/>
+              <a:cs typeface="+mn-cs"/>
+            </a:endParaRPr>
           </a:p>
         </p:txBody>
       </p:sp>
@@ -10452,6 +15695,285 @@
           <a:chExt cx="0" cy="0"/>
         </a:xfrm>
       </p:grpSpPr>
+      <p:sp>
+        <p:nvSpPr>
+          <p:cNvPr id="2" name="Diamond 1">
+            <a:extLst>
+              <a:ext uri="{FF2B5EF4-FFF2-40B4-BE49-F238E27FC236}">
+                <a16:creationId xmlns:a16="http://schemas.microsoft.com/office/drawing/2014/main" id="{302FF7E2-C546-F339-95C7-04DE9648ADB9}"/>
+              </a:ext>
+            </a:extLst>
+          </p:cNvPr>
+          <p:cNvSpPr/>
+          <p:nvPr/>
+        </p:nvSpPr>
+        <p:spPr>
+          <a:xfrm>
+            <a:off x="2438400" y="685800"/>
+            <a:ext cx="7315200" cy="5486400"/>
+          </a:xfrm>
+          <a:prstGeom prst="diamond">
+            <a:avLst/>
+          </a:prstGeom>
+          <a:scene3d>
+            <a:camera prst="orthographicFront"/>
+            <a:lightRig rig="threePt" dir="t"/>
+          </a:scene3d>
+          <a:sp3d>
+            <a:bevelT w="114300" prst="artDeco"/>
+          </a:sp3d>
+        </p:spPr>
+        <p:style>
+          <a:lnRef idx="1">
+            <a:schemeClr val="accent3"/>
+          </a:lnRef>
+          <a:fillRef idx="3">
+            <a:schemeClr val="accent3"/>
+          </a:fillRef>
+          <a:effectRef idx="2">
+            <a:schemeClr val="accent3"/>
+          </a:effectRef>
+          <a:fontRef idx="minor">
+            <a:schemeClr val="lt1"/>
+          </a:fontRef>
+        </p:style>
+        <p:txBody>
+          <a:bodyPr rtlCol="0" anchor="ctr"/>
+          <a:lstStyle/>
+          <a:p>
+            <a:pPr algn="ctr"/>
+            <a:r>
+              <a:rPr lang="en-US" sz="2800" dirty="0"/>
+              <a:t>Big Valley Ranch Welcomes You!</a:t>
+            </a:r>
+          </a:p>
+        </p:txBody>
+      </p:sp>
+      <p:sp>
+        <p:nvSpPr>
+          <p:cNvPr id="3" name="Date Placeholder 2">
+            <a:extLst>
+              <a:ext uri="{FF2B5EF4-FFF2-40B4-BE49-F238E27FC236}">
+                <a16:creationId xmlns:a16="http://schemas.microsoft.com/office/drawing/2014/main" id="{A5BDA8FD-AF40-EDC8-940E-E2E9FE1E8989}"/>
+              </a:ext>
+            </a:extLst>
+          </p:cNvPr>
+          <p:cNvSpPr>
+            <a:spLocks noGrp="1"/>
+          </p:cNvSpPr>
+          <p:nvPr>
+            <p:ph type="dt" sz="half" idx="10"/>
+          </p:nvPr>
+        </p:nvSpPr>
+        <p:spPr/>
+        <p:txBody>
+          <a:bodyPr/>
+          <a:lstStyle/>
+          <a:p>
+            <a:pPr marL="0" marR="0" lvl="0" indent="0" algn="r" defTabSz="914400" rtl="0" eaLnBrk="1" fontAlgn="auto" latinLnBrk="0" hangingPunct="1">
+              <a:lnSpc>
+                <a:spcPct val="100000"/>
+              </a:lnSpc>
+              <a:spcBef>
+                <a:spcPts val="0"/>
+              </a:spcBef>
+              <a:spcAft>
+                <a:spcPts val="0"/>
+              </a:spcAft>
+              <a:buClrTx/>
+              <a:buSzTx/>
+              <a:buFontTx/>
+              <a:buNone/>
+              <a:tabLst/>
+              <a:defRPr/>
+            </a:pPr>
+            <a:fld id="{EDD5025C-4536-4E3E-B89A-ABE60835F4CB}" type="datetime1">
+              <a:rPr kumimoji="0" lang="en-US" sz="900" b="0" i="0" u="none" strike="noStrike" kern="1200" cap="none" spc="0" normalizeH="0" baseline="0" noProof="0" smtClean="0">
+                <a:ln>
+                  <a:noFill/>
+                </a:ln>
+                <a:solidFill>
+                  <a:prstClr val="black">
+                    <a:tint val="75000"/>
+                  </a:prstClr>
+                </a:solidFill>
+                <a:effectLst/>
+                <a:uLnTx/>
+                <a:uFillTx/>
+                <a:latin typeface="Trebuchet MS" panose="020B0603020202020204"/>
+                <a:ea typeface="+mn-ea"/>
+                <a:cs typeface="+mn-cs"/>
+              </a:rPr>
+              <a:t>04/19/2026</a:t>
+            </a:fld>
+            <a:endParaRPr kumimoji="0" lang="en-US" sz="900" b="0" i="0" u="none" strike="noStrike" kern="1200" cap="none" spc="0" normalizeH="0" baseline="0" noProof="0">
+              <a:ln>
+                <a:noFill/>
+              </a:ln>
+              <a:solidFill>
+                <a:prstClr val="black">
+                  <a:tint val="75000"/>
+                </a:prstClr>
+              </a:solidFill>
+              <a:effectLst/>
+              <a:uLnTx/>
+              <a:uFillTx/>
+              <a:latin typeface="Trebuchet MS" panose="020B0603020202020204"/>
+              <a:ea typeface="+mn-ea"/>
+              <a:cs typeface="+mn-cs"/>
+            </a:endParaRPr>
+          </a:p>
+        </p:txBody>
+      </p:sp>
+      <p:sp>
+        <p:nvSpPr>
+          <p:cNvPr id="4" name="Footer Placeholder 3">
+            <a:extLst>
+              <a:ext uri="{FF2B5EF4-FFF2-40B4-BE49-F238E27FC236}">
+                <a16:creationId xmlns:a16="http://schemas.microsoft.com/office/drawing/2014/main" id="{BD320B08-DF16-A471-3FDC-C42BBA00ADAA}"/>
+              </a:ext>
+            </a:extLst>
+          </p:cNvPr>
+          <p:cNvSpPr>
+            <a:spLocks noGrp="1"/>
+          </p:cNvSpPr>
+          <p:nvPr>
+            <p:ph type="ftr" sz="quarter" idx="11"/>
+          </p:nvPr>
+        </p:nvSpPr>
+        <p:spPr/>
+        <p:txBody>
+          <a:bodyPr/>
+          <a:lstStyle/>
+          <a:p>
+            <a:pPr marL="0" marR="0" lvl="0" indent="0" algn="l" defTabSz="914400" rtl="0" eaLnBrk="1" fontAlgn="auto" latinLnBrk="0" hangingPunct="1">
+              <a:lnSpc>
+                <a:spcPct val="100000"/>
+              </a:lnSpc>
+              <a:spcBef>
+                <a:spcPts val="0"/>
+              </a:spcBef>
+              <a:spcAft>
+                <a:spcPts val="0"/>
+              </a:spcAft>
+              <a:buClrTx/>
+              <a:buSzTx/>
+              <a:buFontTx/>
+              <a:buNone/>
+              <a:tabLst/>
+              <a:defRPr/>
+            </a:pPr>
+            <a:r>
+              <a:rPr kumimoji="0" lang="en-US" sz="900" b="0" i="0" u="none" strike="noStrike" kern="1200" cap="none" spc="0" normalizeH="0" baseline="0" noProof="0">
+                <a:ln>
+                  <a:noFill/>
+                </a:ln>
+                <a:solidFill>
+                  <a:prstClr val="black">
+                    <a:tint val="75000"/>
+                  </a:prstClr>
+                </a:solidFill>
+                <a:effectLst/>
+                <a:uLnTx/>
+                <a:uFillTx/>
+                <a:latin typeface="Trebuchet MS" panose="020B0603020202020204"/>
+                <a:ea typeface="+mn-ea"/>
+                <a:cs typeface="+mn-cs"/>
+              </a:rPr>
+              <a:t>2G_Orientation</a:t>
+            </a:r>
+          </a:p>
+        </p:txBody>
+      </p:sp>
+      <p:sp>
+        <p:nvSpPr>
+          <p:cNvPr id="5" name="Slide Number Placeholder 4">
+            <a:extLst>
+              <a:ext uri="{FF2B5EF4-FFF2-40B4-BE49-F238E27FC236}">
+                <a16:creationId xmlns:a16="http://schemas.microsoft.com/office/drawing/2014/main" id="{6DA3C80E-4F2D-5A73-2484-0026B5A42503}"/>
+              </a:ext>
+            </a:extLst>
+          </p:cNvPr>
+          <p:cNvSpPr>
+            <a:spLocks noGrp="1"/>
+          </p:cNvSpPr>
+          <p:nvPr>
+            <p:ph type="sldNum" sz="quarter" idx="12"/>
+          </p:nvPr>
+        </p:nvSpPr>
+        <p:spPr/>
+        <p:txBody>
+          <a:bodyPr/>
+          <a:lstStyle/>
+          <a:p>
+            <a:pPr marL="0" marR="0" lvl="0" indent="0" algn="r" defTabSz="914400" rtl="0" eaLnBrk="1" fontAlgn="auto" latinLnBrk="0" hangingPunct="1">
+              <a:lnSpc>
+                <a:spcPct val="100000"/>
+              </a:lnSpc>
+              <a:spcBef>
+                <a:spcPts val="0"/>
+              </a:spcBef>
+              <a:spcAft>
+                <a:spcPts val="0"/>
+              </a:spcAft>
+              <a:buClrTx/>
+              <a:buSzTx/>
+              <a:buFontTx/>
+              <a:buNone/>
+              <a:tabLst/>
+              <a:defRPr/>
+            </a:pPr>
+            <a:fld id="{DCED57B9-9E9A-4BC6-80A9-0D58715E11F6}" type="slidenum">
+              <a:rPr kumimoji="0" lang="en-US" sz="900" b="0" i="0" u="none" strike="noStrike" kern="1200" cap="none" spc="0" normalizeH="0" baseline="0" noProof="0" smtClean="0">
+                <a:ln>
+                  <a:noFill/>
+                </a:ln>
+                <a:solidFill>
+                  <a:srgbClr val="D34817"/>
+                </a:solidFill>
+                <a:effectLst/>
+                <a:uLnTx/>
+                <a:uFillTx/>
+                <a:latin typeface="Trebuchet MS" panose="020B0603020202020204"/>
+                <a:ea typeface="+mn-ea"/>
+                <a:cs typeface="+mn-cs"/>
+              </a:rPr>
+              <a:pPr marL="0" marR="0" lvl="0" indent="0" algn="r" defTabSz="914400" rtl="0" eaLnBrk="1" fontAlgn="auto" latinLnBrk="0" hangingPunct="1">
+                <a:lnSpc>
+                  <a:spcPct val="100000"/>
+                </a:lnSpc>
+                <a:spcBef>
+                  <a:spcPts val="0"/>
+                </a:spcBef>
+                <a:spcAft>
+                  <a:spcPts val="0"/>
+                </a:spcAft>
+                <a:buClrTx/>
+                <a:buSzTx/>
+                <a:buFontTx/>
+                <a:buNone/>
+                <a:tabLst/>
+                <a:defRPr/>
+              </a:pPr>
+              <a:t>6</a:t>
+            </a:fld>
+            <a:endParaRPr kumimoji="0" lang="en-US" sz="900" b="0" i="0" u="none" strike="noStrike" kern="1200" cap="none" spc="0" normalizeH="0" baseline="0" noProof="0">
+              <a:ln>
+                <a:noFill/>
+              </a:ln>
+              <a:solidFill>
+                <a:srgbClr val="D34817"/>
+              </a:solidFill>
+              <a:effectLst/>
+              <a:uLnTx/>
+              <a:uFillTx/>
+              <a:latin typeface="Trebuchet MS" panose="020B0603020202020204"/>
+              <a:ea typeface="+mn-ea"/>
+              <a:cs typeface="+mn-cs"/>
+            </a:endParaRPr>
+          </a:p>
+        </p:txBody>
+      </p:sp>
     </p:spTree>
     <p:extLst>
       <p:ext uri="{BB962C8B-B14F-4D97-AF65-F5344CB8AC3E}">
@@ -10986,16 +16508,14 @@
 </a:theme>
 </file>
 
-<file path=customXML/item.xml><?xml version="1.0" encoding="utf-8"?>
+<file path=customXml/item1.xml><?xml version="1.0" encoding="utf-8"?>
 <project>
   <id>7OwjghzJE9asqUNVlMDdS0yNUJPMdqFQ3sPv2zh55O6/CO52WbiCjCajodb1915GJK3hr4K2j6XGVmd9Llc0ro077ot9GCo6-~FldZGcckXnkVco9uFmhwMw==#@#10954702#@#4/7/2021 9:49:51 PM</id>
 </project>
 </file>
 
-<file path=customXML/itemProps.xml><?xml version="1.0" encoding="utf-8"?>
-<ds:datastoreItem xmlns:ds="http://schemas.openxmlformats.org/officedocument/2006/2/customXml" ds:itemID="{C66AC4F1-97D3-4D10-8D07-51E6CC79AD91}">
-  <ds:schemaRefs>
-    <ds:schemaRef ds:uri=""/>
-  </ds:schemaRefs>
+<file path=customXml/itemProps1.xml><?xml version="1.0" encoding="utf-8"?>
+<ds:datastoreItem xmlns:ds="http://schemas.openxmlformats.org/officeDocument/2006/customXml" ds:itemID="{51BA5174-F36A-4C11-99F4-A541F161F758}">
+  <ds:schemaRefs/>
 </ds:datastoreItem>
 </file>